--- a/Asset Solution Brief Template.pptx
+++ b/Asset Solution Brief Template.pptx
@@ -341,6 +341,32 @@
           <a:lstStyle/>
           <a:p>
             <a:r>
+              <a:rPr kumimoji="0" lang="en-US" sz="1400" b="1" i="0" u="none" strike="noStrike" kern="1200" cap="none" spc="0" normalizeH="0" baseline="0" noProof="0" dirty="0">
+                <a:ln>
+                  <a:noFill/>
+                </a:ln>
+                <a:solidFill>
+                  <a:prstClr val="black"/>
+                </a:solidFill>
+                <a:effectLst/>
+                <a:uLnTx/>
+                <a:uFillTx/>
+                <a:latin typeface="IBM Plex Sans" panose="020B0503050203000203" pitchFamily="34" charset="0"/>
+                <a:ea typeface="+mn-ea"/>
+                <a:cs typeface="+mn-cs"/>
+              </a:rPr>
+              <a:t>Notes on editing this file:</a:t>
+            </a:r>
+          </a:p>
+          <a:p>
+            <a:pPr marL="400050" indent="-173038">
+              <a:spcBef>
+                <a:spcPts val="600"/>
+              </a:spcBef>
+              <a:buFont typeface="Arial" panose="020B0604020202020204" pitchFamily="34" charset="0"/>
+              <a:buChar char="•"/>
+            </a:pPr>
+            <a:r>
               <a:rPr kumimoji="0" lang="en-US" sz="1400" b="0" i="0" u="none" strike="noStrike" kern="1200" cap="none" spc="0" normalizeH="0" baseline="0" noProof="0" dirty="0">
                 <a:ln>
                   <a:noFill/>
@@ -355,7 +381,7 @@
                 <a:ea typeface="+mn-ea"/>
                 <a:cs typeface="+mn-cs"/>
               </a:rPr>
-              <a:t>Notes on editing this file:</a:t>
+              <a:t>The agent chose the best fitting slide master for each page. You may select another or edit the slide master.</a:t>
             </a:r>
           </a:p>
           <a:p>
@@ -381,7 +407,7 @@
                 <a:ea typeface="+mn-ea"/>
                 <a:cs typeface="+mn-cs"/>
               </a:rPr>
-              <a:t>The agent chose the best fitting slide master for each page. You may select another or edit the slide master.</a:t>
+              <a:t>Make text edits as you normally would.</a:t>
             </a:r>
           </a:p>
           <a:p>
@@ -407,7 +433,7 @@
                 <a:ea typeface="+mn-ea"/>
                 <a:cs typeface="+mn-cs"/>
               </a:rPr>
-              <a:t>Make text edits as you normally would.</a:t>
+              <a:t>Spacing between text or image elements may need adjusting if copy went over/under the recommended length</a:t>
             </a:r>
           </a:p>
           <a:p>
@@ -433,7 +459,7 @@
                 <a:ea typeface="+mn-ea"/>
                 <a:cs typeface="+mn-cs"/>
               </a:rPr>
-              <a:t>Spacing between text or image elements may need adjusting if copy went over/under the recommended length</a:t>
+              <a:t>You will need to manually add screenshots and adjust placement/cropping</a:t>
             </a:r>
           </a:p>
           <a:p>
@@ -459,7 +485,7 @@
                 <a:ea typeface="+mn-ea"/>
                 <a:cs typeface="+mn-cs"/>
               </a:rPr>
-              <a:t>You will need to manually add screenshots and adjust placement/cropping</a:t>
+              <a:t>Feel free to replace any agent-generated imagery (e.g. front/back page images, pictograms).</a:t>
             </a:r>
           </a:p>
           <a:p>
@@ -485,35 +511,114 @@
                 <a:ea typeface="+mn-ea"/>
                 <a:cs typeface="+mn-cs"/>
               </a:rPr>
-              <a:t>Feel free to replace any agent-generated imagery (e.g. front/back page images, pictograms).</a:t>
-            </a:r>
-          </a:p>
-          <a:p>
-            <a:pPr marL="400050" indent="-173038">
-              <a:spcBef>
-                <a:spcPts val="600"/>
-              </a:spcBef>
-              <a:buFont typeface="Arial" panose="020B0604020202020204" pitchFamily="34" charset="0"/>
-              <a:buChar char="•"/>
-            </a:pPr>
-            <a:r>
-              <a:rPr kumimoji="0" lang="en-US" sz="1400" b="0" i="0" u="none" strike="noStrike" kern="1200" cap="none" spc="0" normalizeH="0" baseline="0" noProof="0" dirty="0">
-                <a:ln>
-                  <a:noFill/>
-                </a:ln>
-                <a:solidFill>
-                  <a:prstClr val="black"/>
-                </a:solidFill>
-                <a:effectLst/>
-                <a:uLnTx/>
-                <a:uFillTx/>
-                <a:latin typeface="IBM Plex Sans" panose="020B0503050203000203" pitchFamily="34" charset="0"/>
-                <a:ea typeface="+mn-ea"/>
-                <a:cs typeface="+mn-cs"/>
+              <a:t>If you need to move a fixed element on a page, go to View-&gt;Slide Master and move it on the master.</a:t>
+            </a:r>
+            <a:endParaRPr lang="en-US" dirty="0"/>
+          </a:p>
+        </p:txBody>
+      </p:sp>
+      <p:sp>
+        <p:nvSpPr>
+          <p:cNvPr id="6" name="Text Placeholder 5">
+            <a:extLst>
+              <a:ext uri="{FF2B5EF4-FFF2-40B4-BE49-F238E27FC236}">
+                <a16:creationId xmlns:a16="http://schemas.microsoft.com/office/drawing/2014/main" id="{07937654-B41A-8C40-611D-FE2804FE997B}"/>
+              </a:ext>
+            </a:extLst>
+          </p:cNvPr>
+          <p:cNvSpPr>
+            <a:spLocks noGrp="1"/>
+          </p:cNvSpPr>
+          <p:nvPr>
+            <p:ph type="body" sz="quarter" idx="10" hasCustomPrompt="1"/>
+          </p:nvPr>
+        </p:nvSpPr>
+        <p:spPr>
+          <a:xfrm>
+            <a:off x="553383" y="6024377"/>
+            <a:ext cx="6908241" cy="914400"/>
+          </a:xfrm>
+          <a:prstGeom prst="rect">
+            <a:avLst/>
+          </a:prstGeom>
+        </p:spPr>
+        <p:txBody>
+          <a:bodyPr/>
+          <a:lstStyle>
+            <a:lvl1pPr>
+              <a:buNone/>
+              <a:defRPr sz="1400">
+                <a:latin typeface="IBM Plex Sans" panose="020B0503050203000203" pitchFamily="34" charset="0"/>
+              </a:defRPr>
+            </a:lvl1pPr>
+            <a:lvl2pPr>
+              <a:buNone/>
+              <a:defRPr sz="1400">
+                <a:latin typeface="IBM Plex Sans" panose="020B0503050203000203" pitchFamily="34" charset="0"/>
+              </a:defRPr>
+            </a:lvl2pPr>
+            <a:lvl3pPr>
+              <a:buNone/>
+              <a:defRPr sz="1400">
+                <a:latin typeface="IBM Plex Sans" panose="020B0503050203000203" pitchFamily="34" charset="0"/>
+              </a:defRPr>
+            </a:lvl3pPr>
+            <a:lvl4pPr>
+              <a:buNone/>
+              <a:defRPr sz="1400">
+                <a:latin typeface="IBM Plex Sans" panose="020B0503050203000203" pitchFamily="34" charset="0"/>
+              </a:defRPr>
+            </a:lvl4pPr>
+            <a:lvl5pPr>
+              <a:buNone/>
+              <a:defRPr sz="1400">
+                <a:latin typeface="IBM Plex Sans" panose="020B0503050203000203" pitchFamily="34" charset="0"/>
+              </a:defRPr>
+            </a:lvl5pPr>
+          </a:lstStyle>
+          <a:p>
+            <a:pPr lvl="0"/>
+            <a:r>
+              <a:rPr lang="en-US" dirty="0"/>
+              <a:t>Agent notes</a:t>
+            </a:r>
+          </a:p>
+        </p:txBody>
+      </p:sp>
+      <p:sp>
+        <p:nvSpPr>
+          <p:cNvPr id="7" name="TextBox 6">
+            <a:extLst>
+              <a:ext uri="{FF2B5EF4-FFF2-40B4-BE49-F238E27FC236}">
+                <a16:creationId xmlns:a16="http://schemas.microsoft.com/office/drawing/2014/main" id="{32F8908E-DF51-B3D0-FC73-B994200BBAF4}"/>
+              </a:ext>
+            </a:extLst>
+          </p:cNvPr>
+          <p:cNvSpPr txBox="1"/>
+          <p:nvPr userDrawn="1"/>
+        </p:nvSpPr>
+        <p:spPr>
+          <a:xfrm>
+            <a:off x="466724" y="5579848"/>
+            <a:ext cx="3807453" cy="307777"/>
+          </a:xfrm>
+          <a:prstGeom prst="rect">
+            <a:avLst/>
+          </a:prstGeom>
+          <a:noFill/>
+        </p:spPr>
+        <p:txBody>
+          <a:bodyPr wrap="none" rtlCol="0">
+            <a:spAutoFit/>
+          </a:bodyPr>
+          <a:lstStyle/>
+          <a:p>
+            <a:r>
+              <a:rPr lang="en-US" sz="1400" b="1" dirty="0">
+                <a:latin typeface="IBM Plex Sans" panose="020B0503050203000203" pitchFamily="34" charset="0"/>
               </a:rPr>
-              <a:t>If you need to move a fixed element on a page, go to View-&gt;Slide Master and move it on the master.</a:t>
-            </a:r>
-            <a:endParaRPr lang="en-US" dirty="0"/>
+              <a:t>Notes from the Solution Brief Builder agent</a:t>
+            </a:r>
           </a:p>
         </p:txBody>
       </p:sp>
@@ -10399,8 +10504,8 @@
         </p:nvSpPr>
         <p:spPr>
           <a:xfrm>
-            <a:off x="3045486" y="375677"/>
-            <a:ext cx="4439753" cy="2140584"/>
+            <a:off x="3045486" y="605123"/>
+            <a:ext cx="4439753" cy="1474048"/>
           </a:xfrm>
           <a:prstGeom prst="rect">
             <a:avLst/>
@@ -10423,7 +10528,7 @@
             <a:pPr lvl="0"/>
             <a:r>
               <a:rPr lang="en-US" dirty="0"/>
-              <a:t>Why IBM</a:t>
+              <a:t>Why IBM paragraph</a:t>
             </a:r>
           </a:p>
         </p:txBody>
@@ -10446,7 +10551,7 @@
         </p:nvSpPr>
         <p:spPr>
           <a:xfrm>
-            <a:off x="3045486" y="2679066"/>
+            <a:off x="3045483" y="2280775"/>
             <a:ext cx="4439753" cy="295755"/>
           </a:xfrm>
           <a:prstGeom prst="rect">
@@ -11616,6 +11721,48 @@
               <a:t> </a:t>
             </a:r>
             <a:endParaRPr lang="en-US" dirty="0"/>
+          </a:p>
+        </p:txBody>
+      </p:sp>
+      <p:sp>
+        <p:nvSpPr>
+          <p:cNvPr id="2" name="TextBox 1">
+            <a:extLst>
+              <a:ext uri="{FF2B5EF4-FFF2-40B4-BE49-F238E27FC236}">
+                <a16:creationId xmlns:a16="http://schemas.microsoft.com/office/drawing/2014/main" id="{59F37567-8072-B5AF-D3C3-9B7B08336A87}"/>
+              </a:ext>
+            </a:extLst>
+          </p:cNvPr>
+          <p:cNvSpPr txBox="1"/>
+          <p:nvPr userDrawn="1"/>
+        </p:nvSpPr>
+        <p:spPr>
+          <a:xfrm>
+            <a:off x="3045485" y="369271"/>
+            <a:ext cx="688314" cy="138499"/>
+          </a:xfrm>
+          <a:prstGeom prst="rect">
+            <a:avLst/>
+          </a:prstGeom>
+          <a:noFill/>
+        </p:spPr>
+        <p:txBody>
+          <a:bodyPr wrap="square" lIns="0" tIns="0" rIns="0" bIns="0" rtlCol="0">
+            <a:spAutoFit/>
+          </a:bodyPr>
+          <a:lstStyle/>
+          <a:p>
+            <a:pPr>
+              <a:lnSpc>
+                <a:spcPct val="100000"/>
+              </a:lnSpc>
+            </a:pPr>
+            <a:r>
+              <a:rPr lang="en-US" sz="900" b="1" dirty="0">
+                <a:latin typeface="IBM Plex Sans" panose="020B0503050203000203" pitchFamily="34" charset="0"/>
+              </a:rPr>
+              <a:t>Why IBM</a:t>
+            </a:r>
           </a:p>
         </p:txBody>
       </p:sp>

--- a/Asset Solution Brief Template.pptx
+++ b/Asset Solution Brief Template.pptx
@@ -5,21 +5,15 @@
     <p:sldMasterId id="2147483660" r:id="rId1"/>
   </p:sldMasterIdLst>
   <p:notesMasterIdLst>
-    <p:notesMasterId r:id="rId14"/>
+    <p:notesMasterId r:id="rId5"/>
   </p:notesMasterIdLst>
+  <p:handoutMasterIdLst>
+    <p:handoutMasterId r:id="rId6"/>
+  </p:handoutMasterIdLst>
   <p:sldIdLst>
     <p:sldId id="270" r:id="rId2"/>
-    <p:sldId id="261" r:id="rId3"/>
-    <p:sldId id="263" r:id="rId4"/>
-    <p:sldId id="264" r:id="rId5"/>
-    <p:sldId id="265" r:id="rId6"/>
-    <p:sldId id="262" r:id="rId7"/>
-    <p:sldId id="266" r:id="rId8"/>
-    <p:sldId id="267" r:id="rId9"/>
-    <p:sldId id="259" r:id="rId10"/>
-    <p:sldId id="258" r:id="rId11"/>
-    <p:sldId id="268" r:id="rId12"/>
-    <p:sldId id="269" r:id="rId13"/>
+    <p:sldId id="268" r:id="rId3"/>
+    <p:sldId id="269" r:id="rId4"/>
   </p:sldIdLst>
   <p:sldSz cx="7772400" cy="10058400"/>
   <p:notesSz cx="6858000" cy="9144000"/>
@@ -119,42 +113,6 @@
     </a:lvl9pPr>
   </p:defaultTextStyle>
   <p:extLst>
-    <p:ext uri="{521415D9-36F7-43E2-AB2F-B90AF26B5E84}">
-      <p14:sectionLst xmlns:p14="http://schemas.microsoft.com/office/powerpoint/2010/main">
-        <p14:section name="Notes" id="{9B639C47-2D07-483F-8B7C-04667D5C564A}">
-          <p14:sldIdLst>
-            <p14:sldId id="270"/>
-          </p14:sldIdLst>
-        </p14:section>
-        <p14:section name="Front Page" id="{3D30EF36-7D8E-4375-8C7F-6171A074FC17}">
-          <p14:sldIdLst>
-            <p14:sldId id="261"/>
-          </p14:sldIdLst>
-        </p14:section>
-        <p14:section name="Key Capabilties - pick 1 layout" id="{9AC29C26-43E8-4A21-81AE-C8BE8A461126}">
-          <p14:sldIdLst>
-            <p14:sldId id="263"/>
-            <p14:sldId id="264"/>
-            <p14:sldId id="265"/>
-            <p14:sldId id="262"/>
-            <p14:sldId id="266"/>
-          </p14:sldIdLst>
-        </p14:section>
-        <p14:section name="Benefits - choose one layout" id="{857691D0-E14B-447F-9461-A7EAF6BA2DCF}">
-          <p14:sldIdLst>
-            <p14:sldId id="267"/>
-            <p14:sldId id="259"/>
-          </p14:sldIdLst>
-        </p14:section>
-        <p14:section name="Back Page" id="{F80A6766-27FA-435A-9357-6162F407EC69}">
-          <p14:sldIdLst>
-            <p14:sldId id="258"/>
-            <p14:sldId id="268"/>
-            <p14:sldId id="269"/>
-          </p14:sldIdLst>
-        </p14:section>
-      </p14:sectionLst>
-    </p:ext>
     <p:ext uri="{EFAFB233-063F-42B5-8137-9DF3F51BA10A}">
       <p15:sldGuideLst xmlns:p15="http://schemas.microsoft.com/office/powerpoint/2012/main">
         <p15:guide id="1" orient="horz" pos="240" userDrawn="1">
@@ -181,6 +139,195 @@
     </p:ext>
   </p:extLst>
 </p:presentation>
+</file>
+
+<file path=ppt/handoutMasters/handoutMaster1.xml><?xml version="1.0" encoding="utf-8"?>
+<p:handoutMaster xmlns:a="http://schemas.openxmlformats.org/drawingml/2006/main" xmlns:r="http://schemas.openxmlformats.org/officeDocument/2006/relationships" xmlns:p="http://schemas.openxmlformats.org/presentationml/2006/main">
+  <p:cSld>
+    <p:bg>
+      <p:bgRef idx="1001">
+        <a:schemeClr val="bg1"/>
+      </p:bgRef>
+    </p:bg>
+    <p:spTree>
+      <p:nvGrpSpPr>
+        <p:cNvPr id="1" name=""/>
+        <p:cNvGrpSpPr/>
+        <p:nvPr/>
+      </p:nvGrpSpPr>
+      <p:grpSpPr>
+        <a:xfrm>
+          <a:off x="0" y="0"/>
+          <a:ext cx="0" cy="0"/>
+          <a:chOff x="0" y="0"/>
+          <a:chExt cx="0" cy="0"/>
+        </a:xfrm>
+      </p:grpSpPr>
+      <p:sp>
+        <p:nvSpPr>
+          <p:cNvPr id="2" name="Header Placeholder 1">
+            <a:extLst>
+              <a:ext uri="{FF2B5EF4-FFF2-40B4-BE49-F238E27FC236}">
+                <a16:creationId xmlns:a16="http://schemas.microsoft.com/office/drawing/2014/main" id="{54575411-0C46-867E-DE9E-78398264E784}"/>
+              </a:ext>
+            </a:extLst>
+          </p:cNvPr>
+          <p:cNvSpPr>
+            <a:spLocks noGrp="1"/>
+          </p:cNvSpPr>
+          <p:nvPr>
+            <p:ph type="hdr" sz="quarter"/>
+          </p:nvPr>
+        </p:nvSpPr>
+        <p:spPr>
+          <a:xfrm>
+            <a:off x="0" y="0"/>
+            <a:ext cx="2971800" cy="458788"/>
+          </a:xfrm>
+          <a:prstGeom prst="rect">
+            <a:avLst/>
+          </a:prstGeom>
+        </p:spPr>
+        <p:txBody>
+          <a:bodyPr vert="horz" lIns="91440" tIns="45720" rIns="91440" bIns="45720" rtlCol="0"/>
+          <a:lstStyle>
+            <a:lvl1pPr algn="l">
+              <a:defRPr sz="1200"/>
+            </a:lvl1pPr>
+          </a:lstStyle>
+          <a:p>
+            <a:endParaRPr lang="en-US"/>
+          </a:p>
+        </p:txBody>
+      </p:sp>
+      <p:sp>
+        <p:nvSpPr>
+          <p:cNvPr id="3" name="Date Placeholder 2">
+            <a:extLst>
+              <a:ext uri="{FF2B5EF4-FFF2-40B4-BE49-F238E27FC236}">
+                <a16:creationId xmlns:a16="http://schemas.microsoft.com/office/drawing/2014/main" id="{0320701D-5EB9-923F-8487-F50BB139EBBE}"/>
+              </a:ext>
+            </a:extLst>
+          </p:cNvPr>
+          <p:cNvSpPr>
+            <a:spLocks noGrp="1"/>
+          </p:cNvSpPr>
+          <p:nvPr>
+            <p:ph type="dt" sz="quarter" idx="1"/>
+          </p:nvPr>
+        </p:nvSpPr>
+        <p:spPr>
+          <a:xfrm>
+            <a:off x="3884613" y="0"/>
+            <a:ext cx="2971800" cy="458788"/>
+          </a:xfrm>
+          <a:prstGeom prst="rect">
+            <a:avLst/>
+          </a:prstGeom>
+        </p:spPr>
+        <p:txBody>
+          <a:bodyPr vert="horz" lIns="91440" tIns="45720" rIns="91440" bIns="45720" rtlCol="0"/>
+          <a:lstStyle>
+            <a:lvl1pPr algn="r">
+              <a:defRPr sz="1200"/>
+            </a:lvl1pPr>
+          </a:lstStyle>
+          <a:p>
+            <a:fld id="{46EA407C-5CB9-47CF-BBBB-3982928850A3}" type="datetimeFigureOut">
+              <a:rPr lang="en-US" smtClean="0"/>
+              <a:t>9/21/2026</a:t>
+            </a:fld>
+            <a:endParaRPr lang="en-US"/>
+          </a:p>
+        </p:txBody>
+      </p:sp>
+      <p:sp>
+        <p:nvSpPr>
+          <p:cNvPr id="4" name="Footer Placeholder 3">
+            <a:extLst>
+              <a:ext uri="{FF2B5EF4-FFF2-40B4-BE49-F238E27FC236}">
+                <a16:creationId xmlns:a16="http://schemas.microsoft.com/office/drawing/2014/main" id="{D8F772F4-B115-47DD-20B4-FE0986363333}"/>
+              </a:ext>
+            </a:extLst>
+          </p:cNvPr>
+          <p:cNvSpPr>
+            <a:spLocks noGrp="1"/>
+          </p:cNvSpPr>
+          <p:nvPr>
+            <p:ph type="ftr" sz="quarter" idx="2"/>
+          </p:nvPr>
+        </p:nvSpPr>
+        <p:spPr>
+          <a:xfrm>
+            <a:off x="0" y="8685213"/>
+            <a:ext cx="2971800" cy="458787"/>
+          </a:xfrm>
+          <a:prstGeom prst="rect">
+            <a:avLst/>
+          </a:prstGeom>
+        </p:spPr>
+        <p:txBody>
+          <a:bodyPr vert="horz" lIns="91440" tIns="45720" rIns="91440" bIns="45720" rtlCol="0" anchor="b"/>
+          <a:lstStyle>
+            <a:lvl1pPr algn="l">
+              <a:defRPr sz="1200"/>
+            </a:lvl1pPr>
+          </a:lstStyle>
+          <a:p>
+            <a:endParaRPr lang="en-US"/>
+          </a:p>
+        </p:txBody>
+      </p:sp>
+      <p:sp>
+        <p:nvSpPr>
+          <p:cNvPr id="5" name="Slide Number Placeholder 4">
+            <a:extLst>
+              <a:ext uri="{FF2B5EF4-FFF2-40B4-BE49-F238E27FC236}">
+                <a16:creationId xmlns:a16="http://schemas.microsoft.com/office/drawing/2014/main" id="{48E91E95-6B6E-8313-4F0A-D00CC5B2A76E}"/>
+              </a:ext>
+            </a:extLst>
+          </p:cNvPr>
+          <p:cNvSpPr>
+            <a:spLocks noGrp="1"/>
+          </p:cNvSpPr>
+          <p:nvPr>
+            <p:ph type="sldNum" sz="quarter" idx="3"/>
+          </p:nvPr>
+        </p:nvSpPr>
+        <p:spPr>
+          <a:xfrm>
+            <a:off x="3884613" y="8685213"/>
+            <a:ext cx="2971800" cy="458787"/>
+          </a:xfrm>
+          <a:prstGeom prst="rect">
+            <a:avLst/>
+          </a:prstGeom>
+        </p:spPr>
+        <p:txBody>
+          <a:bodyPr vert="horz" lIns="91440" tIns="45720" rIns="91440" bIns="45720" rtlCol="0" anchor="b"/>
+          <a:lstStyle>
+            <a:lvl1pPr algn="r">
+              <a:defRPr sz="1200"/>
+            </a:lvl1pPr>
+          </a:lstStyle>
+          <a:p>
+            <a:fld id="{07272F8A-4AD4-4C76-BCF4-B254343F64DF}" type="slidenum">
+              <a:rPr lang="en-US" smtClean="0"/>
+              <a:t>‹#›</a:t>
+            </a:fld>
+            <a:endParaRPr lang="en-US"/>
+          </a:p>
+        </p:txBody>
+      </p:sp>
+    </p:spTree>
+    <p:extLst>
+      <p:ext uri="{BB962C8B-B14F-4D97-AF65-F5344CB8AC3E}">
+        <p14:creationId xmlns:p14="http://schemas.microsoft.com/office/powerpoint/2010/main" val="3047350234"/>
+      </p:ext>
+    </p:extLst>
+  </p:cSld>
+  <p:clrMap bg1="lt1" tx1="dk1" bg2="lt2" tx2="dk2" accent1="accent1" accent2="accent2" accent3="accent3" accent4="accent4" accent5="accent5" accent6="accent6" hlink="hlink" folHlink="folHlink"/>
+</p:handoutMaster>
 </file>
 
 <file path=ppt/notesMasters/notesMaster1.xml><?xml version="1.0" encoding="utf-8"?>
@@ -597,7 +744,7 @@
           <a:p>
             <a:fld id="{5E163197-9E82-4B5A-8180-F90BA4BFB91C}" type="slidenum">
               <a:rPr lang="en-US" smtClean="0"/>
-              <a:t>11</a:t>
+              <a:t>2</a:t>
             </a:fld>
             <a:endParaRPr lang="en-US"/>
           </a:p>
@@ -681,7 +828,7 @@
           <a:p>
             <a:fld id="{5E163197-9E82-4B5A-8180-F90BA4BFB91C}" type="slidenum">
               <a:rPr lang="en-US" smtClean="0"/>
-              <a:t>12</a:t>
+              <a:t>3</a:t>
             </a:fld>
             <a:endParaRPr lang="en-US"/>
           </a:p>
@@ -14153,187 +14300,7 @@
 </p:sld>
 </file>
 
-<file path=ppt/slides/slide10.xml><?xml version="1.0" encoding="utf-8"?>
-<p:sld xmlns:a="http://schemas.openxmlformats.org/drawingml/2006/main" xmlns:r="http://schemas.openxmlformats.org/officeDocument/2006/relationships" xmlns:p="http://schemas.openxmlformats.org/presentationml/2006/main">
-  <p:cSld>
-    <p:spTree>
-      <p:nvGrpSpPr>
-        <p:cNvPr id="1" name=""/>
-        <p:cNvGrpSpPr/>
-        <p:nvPr/>
-      </p:nvGrpSpPr>
-      <p:grpSpPr>
-        <a:xfrm>
-          <a:off x="0" y="0"/>
-          <a:ext cx="0" cy="0"/>
-          <a:chOff x="0" y="0"/>
-          <a:chExt cx="0" cy="0"/>
-        </a:xfrm>
-      </p:grpSpPr>
-      <p:sp>
-        <p:nvSpPr>
-          <p:cNvPr id="2" name="Online Image Placeholder 1">
-            <a:extLst>
-              <a:ext uri="{FF2B5EF4-FFF2-40B4-BE49-F238E27FC236}">
-                <a16:creationId xmlns:a16="http://schemas.microsoft.com/office/drawing/2014/main" id="{F1223D89-3A76-4717-6A68-F49BDEEC9FA3}"/>
-              </a:ext>
-            </a:extLst>
-          </p:cNvPr>
-          <p:cNvSpPr>
-            <a:spLocks noGrp="1"/>
-          </p:cNvSpPr>
-          <p:nvPr>
-            <p:ph type="clipArt" sz="quarter" idx="22"/>
-          </p:nvPr>
-        </p:nvSpPr>
-        <p:spPr/>
-        <p:txBody>
-          <a:bodyPr/>
-          <a:lstStyle/>
-          <a:p>
-            <a:endParaRPr lang="en-US"/>
-          </a:p>
-        </p:txBody>
-      </p:sp>
-      <p:sp>
-        <p:nvSpPr>
-          <p:cNvPr id="3" name="Text Placeholder 2">
-            <a:extLst>
-              <a:ext uri="{FF2B5EF4-FFF2-40B4-BE49-F238E27FC236}">
-                <a16:creationId xmlns:a16="http://schemas.microsoft.com/office/drawing/2014/main" id="{38606E14-B8DE-D2B1-586D-C318AD5762FD}"/>
-              </a:ext>
-            </a:extLst>
-          </p:cNvPr>
-          <p:cNvSpPr>
-            <a:spLocks noGrp="1"/>
-          </p:cNvSpPr>
-          <p:nvPr>
-            <p:ph type="body" sz="quarter" idx="26"/>
-          </p:nvPr>
-        </p:nvSpPr>
-        <p:spPr/>
-        <p:txBody>
-          <a:bodyPr/>
-          <a:lstStyle/>
-          <a:p>
-            <a:endParaRPr lang="en-US" dirty="0"/>
-          </a:p>
-        </p:txBody>
-      </p:sp>
-      <p:sp>
-        <p:nvSpPr>
-          <p:cNvPr id="4" name="Text Placeholder 3">
-            <a:extLst>
-              <a:ext uri="{FF2B5EF4-FFF2-40B4-BE49-F238E27FC236}">
-                <a16:creationId xmlns:a16="http://schemas.microsoft.com/office/drawing/2014/main" id="{36D6A413-B139-960E-EFD3-4BB7E6170432}"/>
-              </a:ext>
-            </a:extLst>
-          </p:cNvPr>
-          <p:cNvSpPr>
-            <a:spLocks noGrp="1"/>
-          </p:cNvSpPr>
-          <p:nvPr>
-            <p:ph type="body" sz="quarter" idx="27"/>
-          </p:nvPr>
-        </p:nvSpPr>
-        <p:spPr/>
-        <p:txBody>
-          <a:bodyPr/>
-          <a:lstStyle/>
-          <a:p>
-            <a:endParaRPr lang="en-US"/>
-          </a:p>
-        </p:txBody>
-      </p:sp>
-      <p:sp>
-        <p:nvSpPr>
-          <p:cNvPr id="5" name="Text Placeholder 4">
-            <a:extLst>
-              <a:ext uri="{FF2B5EF4-FFF2-40B4-BE49-F238E27FC236}">
-                <a16:creationId xmlns:a16="http://schemas.microsoft.com/office/drawing/2014/main" id="{FBC3774E-F30B-03F2-F403-D3783EA93143}"/>
-              </a:ext>
-            </a:extLst>
-          </p:cNvPr>
-          <p:cNvSpPr>
-            <a:spLocks noGrp="1"/>
-          </p:cNvSpPr>
-          <p:nvPr>
-            <p:ph type="body" sz="quarter" idx="29"/>
-          </p:nvPr>
-        </p:nvSpPr>
-        <p:spPr/>
-        <p:txBody>
-          <a:bodyPr/>
-          <a:lstStyle/>
-          <a:p>
-            <a:endParaRPr lang="en-US"/>
-          </a:p>
-        </p:txBody>
-      </p:sp>
-      <p:sp>
-        <p:nvSpPr>
-          <p:cNvPr id="6" name="Text Placeholder 5">
-            <a:extLst>
-              <a:ext uri="{FF2B5EF4-FFF2-40B4-BE49-F238E27FC236}">
-                <a16:creationId xmlns:a16="http://schemas.microsoft.com/office/drawing/2014/main" id="{7136ED3B-95D7-4031-51A5-1510932649F2}"/>
-              </a:ext>
-            </a:extLst>
-          </p:cNvPr>
-          <p:cNvSpPr>
-            <a:spLocks noGrp="1"/>
-          </p:cNvSpPr>
-          <p:nvPr>
-            <p:ph type="body" sz="quarter" idx="30"/>
-          </p:nvPr>
-        </p:nvSpPr>
-        <p:spPr/>
-        <p:txBody>
-          <a:bodyPr/>
-          <a:lstStyle/>
-          <a:p>
-            <a:endParaRPr lang="en-US"/>
-          </a:p>
-        </p:txBody>
-      </p:sp>
-      <p:sp>
-        <p:nvSpPr>
-          <p:cNvPr id="7" name="Text Placeholder 6">
-            <a:extLst>
-              <a:ext uri="{FF2B5EF4-FFF2-40B4-BE49-F238E27FC236}">
-                <a16:creationId xmlns:a16="http://schemas.microsoft.com/office/drawing/2014/main" id="{0A81989F-D36C-805A-C343-BA7B4E0FFBF4}"/>
-              </a:ext>
-            </a:extLst>
-          </p:cNvPr>
-          <p:cNvSpPr>
-            <a:spLocks noGrp="1"/>
-          </p:cNvSpPr>
-          <p:nvPr>
-            <p:ph type="body" sz="quarter" idx="31"/>
-          </p:nvPr>
-        </p:nvSpPr>
-        <p:spPr/>
-        <p:txBody>
-          <a:bodyPr/>
-          <a:lstStyle/>
-          <a:p>
-            <a:endParaRPr lang="en-US"/>
-          </a:p>
-        </p:txBody>
-      </p:sp>
-    </p:spTree>
-    <p:extLst>
-      <p:ext uri="{BB962C8B-B14F-4D97-AF65-F5344CB8AC3E}">
-        <p14:creationId xmlns:p14="http://schemas.microsoft.com/office/powerpoint/2010/main" val="1960043415"/>
-      </p:ext>
-    </p:extLst>
-  </p:cSld>
-  <p:clrMapOvr>
-    <a:masterClrMapping/>
-  </p:clrMapOvr>
-</p:sld>
-</file>
-
-<file path=ppt/slides/slide11.xml><?xml version="1.0" encoding="utf-8"?>
+<file path=ppt/slides/slide2.xml><?xml version="1.0" encoding="utf-8"?>
 <p:sld xmlns:a="http://schemas.openxmlformats.org/drawingml/2006/main" xmlns:r="http://schemas.openxmlformats.org/officeDocument/2006/relationships" xmlns:p="http://schemas.openxmlformats.org/presentationml/2006/main">
   <p:cSld>
     <p:spTree>
@@ -24364,7 +24331,7 @@
 </p:sld>
 </file>
 
-<file path=ppt/slides/slide12.xml><?xml version="1.0" encoding="utf-8"?>
+<file path=ppt/slides/slide3.xml><?xml version="1.0" encoding="utf-8"?>
 <p:sld xmlns:a="http://schemas.openxmlformats.org/drawingml/2006/main" xmlns:r="http://schemas.openxmlformats.org/officeDocument/2006/relationships" xmlns:p="http://schemas.openxmlformats.org/presentationml/2006/main">
   <p:cSld>
     <p:spTree>
@@ -35221,3471 +35188,6 @@
     <p:extLst>
       <p:ext uri="{BB962C8B-B14F-4D97-AF65-F5344CB8AC3E}">
         <p14:creationId xmlns:p14="http://schemas.microsoft.com/office/powerpoint/2010/main" val="527061229"/>
-      </p:ext>
-    </p:extLst>
-  </p:cSld>
-  <p:clrMapOvr>
-    <a:masterClrMapping/>
-  </p:clrMapOvr>
-</p:sld>
-</file>
-
-<file path=ppt/slides/slide2.xml><?xml version="1.0" encoding="utf-8"?>
-<p:sld xmlns:a="http://schemas.openxmlformats.org/drawingml/2006/main" xmlns:r="http://schemas.openxmlformats.org/officeDocument/2006/relationships" xmlns:p="http://schemas.openxmlformats.org/presentationml/2006/main">
-  <p:cSld>
-    <p:spTree>
-      <p:nvGrpSpPr>
-        <p:cNvPr id="1" name=""/>
-        <p:cNvGrpSpPr/>
-        <p:nvPr/>
-      </p:nvGrpSpPr>
-      <p:grpSpPr>
-        <a:xfrm>
-          <a:off x="0" y="0"/>
-          <a:ext cx="0" cy="0"/>
-          <a:chOff x="0" y="0"/>
-          <a:chExt cx="0" cy="0"/>
-        </a:xfrm>
-      </p:grpSpPr>
-      <p:sp>
-        <p:nvSpPr>
-          <p:cNvPr id="2" name="Text Placeholder 1">
-            <a:extLst>
-              <a:ext uri="{FF2B5EF4-FFF2-40B4-BE49-F238E27FC236}">
-                <a16:creationId xmlns:a16="http://schemas.microsoft.com/office/drawing/2014/main" id="{4E44D813-925B-9179-F178-AF1931C45A03}"/>
-              </a:ext>
-            </a:extLst>
-          </p:cNvPr>
-          <p:cNvSpPr>
-            <a:spLocks noGrp="1"/>
-          </p:cNvSpPr>
-          <p:nvPr>
-            <p:ph type="body" sz="quarter" idx="12"/>
-          </p:nvPr>
-        </p:nvSpPr>
-        <p:spPr/>
-        <p:txBody>
-          <a:bodyPr/>
-          <a:lstStyle/>
-          <a:p>
-            <a:endParaRPr lang="en-US" dirty="0"/>
-          </a:p>
-        </p:txBody>
-      </p:sp>
-      <p:sp>
-        <p:nvSpPr>
-          <p:cNvPr id="3" name="Text Placeholder 2">
-            <a:extLst>
-              <a:ext uri="{FF2B5EF4-FFF2-40B4-BE49-F238E27FC236}">
-                <a16:creationId xmlns:a16="http://schemas.microsoft.com/office/drawing/2014/main" id="{0AF4B789-CE00-D8FF-7269-2603B634C40C}"/>
-              </a:ext>
-            </a:extLst>
-          </p:cNvPr>
-          <p:cNvSpPr>
-            <a:spLocks noGrp="1"/>
-          </p:cNvSpPr>
-          <p:nvPr>
-            <p:ph type="body" sz="quarter" idx="13"/>
-          </p:nvPr>
-        </p:nvSpPr>
-        <p:spPr/>
-        <p:txBody>
-          <a:bodyPr/>
-          <a:lstStyle/>
-          <a:p>
-            <a:endParaRPr lang="en-US"/>
-          </a:p>
-        </p:txBody>
-      </p:sp>
-      <p:sp>
-        <p:nvSpPr>
-          <p:cNvPr id="4" name="Text Placeholder 3">
-            <a:extLst>
-              <a:ext uri="{FF2B5EF4-FFF2-40B4-BE49-F238E27FC236}">
-                <a16:creationId xmlns:a16="http://schemas.microsoft.com/office/drawing/2014/main" id="{0B64CF28-4D43-0D10-F339-81EB24E4B1B5}"/>
-              </a:ext>
-            </a:extLst>
-          </p:cNvPr>
-          <p:cNvSpPr>
-            <a:spLocks noGrp="1"/>
-          </p:cNvSpPr>
-          <p:nvPr>
-            <p:ph type="body" sz="quarter" idx="14"/>
-          </p:nvPr>
-        </p:nvSpPr>
-        <p:spPr/>
-        <p:txBody>
-          <a:bodyPr/>
-          <a:lstStyle/>
-          <a:p>
-            <a:endParaRPr lang="en-US"/>
-          </a:p>
-        </p:txBody>
-      </p:sp>
-      <p:sp>
-        <p:nvSpPr>
-          <p:cNvPr id="5" name="Text Placeholder 4">
-            <a:extLst>
-              <a:ext uri="{FF2B5EF4-FFF2-40B4-BE49-F238E27FC236}">
-                <a16:creationId xmlns:a16="http://schemas.microsoft.com/office/drawing/2014/main" id="{8E18E1E9-D546-4FEC-F83C-5C1E18D8ACF1}"/>
-              </a:ext>
-            </a:extLst>
-          </p:cNvPr>
-          <p:cNvSpPr>
-            <a:spLocks noGrp="1"/>
-          </p:cNvSpPr>
-          <p:nvPr>
-            <p:ph type="body" sz="quarter" idx="15"/>
-          </p:nvPr>
-        </p:nvSpPr>
-        <p:spPr/>
-        <p:txBody>
-          <a:bodyPr/>
-          <a:lstStyle/>
-          <a:p>
-            <a:endParaRPr lang="en-US"/>
-          </a:p>
-        </p:txBody>
-      </p:sp>
-      <p:sp>
-        <p:nvSpPr>
-          <p:cNvPr id="6" name="Picture Placeholder 5">
-            <a:extLst>
-              <a:ext uri="{FF2B5EF4-FFF2-40B4-BE49-F238E27FC236}">
-                <a16:creationId xmlns:a16="http://schemas.microsoft.com/office/drawing/2014/main" id="{856AC64A-B7AC-C467-0EA3-DFDBC2108F8D}"/>
-              </a:ext>
-            </a:extLst>
-          </p:cNvPr>
-          <p:cNvSpPr>
-            <a:spLocks noGrp="1"/>
-          </p:cNvSpPr>
-          <p:nvPr>
-            <p:ph type="pic" sz="quarter" idx="16"/>
-          </p:nvPr>
-        </p:nvSpPr>
-        <p:spPr/>
-        <p:txBody>
-          <a:bodyPr/>
-          <a:lstStyle/>
-          <a:p>
-            <a:endParaRPr lang="en-US"/>
-          </a:p>
-        </p:txBody>
-      </p:sp>
-      <p:sp>
-        <p:nvSpPr>
-          <p:cNvPr id="7" name="Text Placeholder 6">
-            <a:extLst>
-              <a:ext uri="{FF2B5EF4-FFF2-40B4-BE49-F238E27FC236}">
-                <a16:creationId xmlns:a16="http://schemas.microsoft.com/office/drawing/2014/main" id="{3A6887CD-F3AE-FA6B-6C1D-195231BB0A6C}"/>
-              </a:ext>
-            </a:extLst>
-          </p:cNvPr>
-          <p:cNvSpPr>
-            <a:spLocks noGrp="1"/>
-          </p:cNvSpPr>
-          <p:nvPr>
-            <p:ph type="body" sz="quarter" idx="18"/>
-          </p:nvPr>
-        </p:nvSpPr>
-        <p:spPr/>
-        <p:txBody>
-          <a:bodyPr/>
-          <a:lstStyle/>
-          <a:p>
-            <a:endParaRPr lang="en-US"/>
-          </a:p>
-        </p:txBody>
-      </p:sp>
-      <p:sp>
-        <p:nvSpPr>
-          <p:cNvPr id="8" name="Text Placeholder 7">
-            <a:extLst>
-              <a:ext uri="{FF2B5EF4-FFF2-40B4-BE49-F238E27FC236}">
-                <a16:creationId xmlns:a16="http://schemas.microsoft.com/office/drawing/2014/main" id="{D699C3A2-EA2F-971D-FA31-3C3A9215DE38}"/>
-              </a:ext>
-            </a:extLst>
-          </p:cNvPr>
-          <p:cNvSpPr>
-            <a:spLocks noGrp="1"/>
-          </p:cNvSpPr>
-          <p:nvPr>
-            <p:ph type="body" sz="quarter" idx="19"/>
-          </p:nvPr>
-        </p:nvSpPr>
-        <p:spPr/>
-        <p:txBody>
-          <a:bodyPr/>
-          <a:lstStyle/>
-          <a:p>
-            <a:endParaRPr lang="en-US"/>
-          </a:p>
-        </p:txBody>
-      </p:sp>
-      <p:sp>
-        <p:nvSpPr>
-          <p:cNvPr id="9" name="Text Placeholder 8">
-            <a:extLst>
-              <a:ext uri="{FF2B5EF4-FFF2-40B4-BE49-F238E27FC236}">
-                <a16:creationId xmlns:a16="http://schemas.microsoft.com/office/drawing/2014/main" id="{9FDB0D45-EC21-036C-FC20-FDA8B09A237B}"/>
-              </a:ext>
-            </a:extLst>
-          </p:cNvPr>
-          <p:cNvSpPr>
-            <a:spLocks noGrp="1"/>
-          </p:cNvSpPr>
-          <p:nvPr>
-            <p:ph type="body" sz="quarter" idx="20"/>
-          </p:nvPr>
-        </p:nvSpPr>
-        <p:spPr/>
-        <p:txBody>
-          <a:bodyPr/>
-          <a:lstStyle/>
-          <a:p>
-            <a:endParaRPr lang="en-US"/>
-          </a:p>
-        </p:txBody>
-      </p:sp>
-    </p:spTree>
-    <p:extLst>
-      <p:ext uri="{BB962C8B-B14F-4D97-AF65-F5344CB8AC3E}">
-        <p14:creationId xmlns:p14="http://schemas.microsoft.com/office/powerpoint/2010/main" val="3284978216"/>
-      </p:ext>
-    </p:extLst>
-  </p:cSld>
-  <p:clrMapOvr>
-    <a:masterClrMapping/>
-  </p:clrMapOvr>
-</p:sld>
-</file>
-
-<file path=ppt/slides/slide3.xml><?xml version="1.0" encoding="utf-8"?>
-<p:sld xmlns:a="http://schemas.openxmlformats.org/drawingml/2006/main" xmlns:r="http://schemas.openxmlformats.org/officeDocument/2006/relationships" xmlns:p="http://schemas.openxmlformats.org/presentationml/2006/main">
-  <p:cSld>
-    <p:spTree>
-      <p:nvGrpSpPr>
-        <p:cNvPr id="1" name=""/>
-        <p:cNvGrpSpPr/>
-        <p:nvPr/>
-      </p:nvGrpSpPr>
-      <p:grpSpPr>
-        <a:xfrm>
-          <a:off x="0" y="0"/>
-          <a:ext cx="0" cy="0"/>
-          <a:chOff x="0" y="0"/>
-          <a:chExt cx="0" cy="0"/>
-        </a:xfrm>
-      </p:grpSpPr>
-      <p:sp>
-        <p:nvSpPr>
-          <p:cNvPr id="2" name="Text Placeholder 1">
-            <a:extLst>
-              <a:ext uri="{FF2B5EF4-FFF2-40B4-BE49-F238E27FC236}">
-                <a16:creationId xmlns:a16="http://schemas.microsoft.com/office/drawing/2014/main" id="{D16C76C4-740F-718F-8B54-92B683F6C89D}"/>
-              </a:ext>
-            </a:extLst>
-          </p:cNvPr>
-          <p:cNvSpPr>
-            <a:spLocks noGrp="1"/>
-          </p:cNvSpPr>
-          <p:nvPr>
-            <p:ph type="body" sz="quarter" idx="11"/>
-          </p:nvPr>
-        </p:nvSpPr>
-        <p:spPr/>
-        <p:txBody>
-          <a:bodyPr/>
-          <a:lstStyle/>
-          <a:p>
-            <a:endParaRPr lang="en-US"/>
-          </a:p>
-        </p:txBody>
-      </p:sp>
-      <p:sp>
-        <p:nvSpPr>
-          <p:cNvPr id="3" name="Text Placeholder 2">
-            <a:extLst>
-              <a:ext uri="{FF2B5EF4-FFF2-40B4-BE49-F238E27FC236}">
-                <a16:creationId xmlns:a16="http://schemas.microsoft.com/office/drawing/2014/main" id="{80E3B610-77A5-CBA2-A346-AC3C3B484595}"/>
-              </a:ext>
-            </a:extLst>
-          </p:cNvPr>
-          <p:cNvSpPr>
-            <a:spLocks noGrp="1"/>
-          </p:cNvSpPr>
-          <p:nvPr>
-            <p:ph type="body" sz="quarter" idx="12"/>
-          </p:nvPr>
-        </p:nvSpPr>
-        <p:spPr/>
-        <p:txBody>
-          <a:bodyPr/>
-          <a:lstStyle/>
-          <a:p>
-            <a:endParaRPr lang="en-US"/>
-          </a:p>
-        </p:txBody>
-      </p:sp>
-      <p:sp>
-        <p:nvSpPr>
-          <p:cNvPr id="4" name="Text Placeholder 3">
-            <a:extLst>
-              <a:ext uri="{FF2B5EF4-FFF2-40B4-BE49-F238E27FC236}">
-                <a16:creationId xmlns:a16="http://schemas.microsoft.com/office/drawing/2014/main" id="{3D28D077-4BCE-1017-BA51-1A060E0BDAEC}"/>
-              </a:ext>
-            </a:extLst>
-          </p:cNvPr>
-          <p:cNvSpPr>
-            <a:spLocks noGrp="1"/>
-          </p:cNvSpPr>
-          <p:nvPr>
-            <p:ph type="body" sz="quarter" idx="13"/>
-          </p:nvPr>
-        </p:nvSpPr>
-        <p:spPr/>
-        <p:txBody>
-          <a:bodyPr/>
-          <a:lstStyle/>
-          <a:p>
-            <a:endParaRPr lang="en-US"/>
-          </a:p>
-        </p:txBody>
-      </p:sp>
-      <p:sp>
-        <p:nvSpPr>
-          <p:cNvPr id="5" name="Text Placeholder 4">
-            <a:extLst>
-              <a:ext uri="{FF2B5EF4-FFF2-40B4-BE49-F238E27FC236}">
-                <a16:creationId xmlns:a16="http://schemas.microsoft.com/office/drawing/2014/main" id="{240F7255-BD99-2CE6-3292-0203265F9D34}"/>
-              </a:ext>
-            </a:extLst>
-          </p:cNvPr>
-          <p:cNvSpPr>
-            <a:spLocks noGrp="1"/>
-          </p:cNvSpPr>
-          <p:nvPr>
-            <p:ph type="body" sz="quarter" idx="33"/>
-          </p:nvPr>
-        </p:nvSpPr>
-        <p:spPr/>
-        <p:txBody>
-          <a:bodyPr/>
-          <a:lstStyle/>
-          <a:p>
-            <a:endParaRPr lang="en-US"/>
-          </a:p>
-        </p:txBody>
-      </p:sp>
-      <p:sp>
-        <p:nvSpPr>
-          <p:cNvPr id="6" name="Text Placeholder 5">
-            <a:extLst>
-              <a:ext uri="{FF2B5EF4-FFF2-40B4-BE49-F238E27FC236}">
-                <a16:creationId xmlns:a16="http://schemas.microsoft.com/office/drawing/2014/main" id="{C7C61B2D-144C-CAB0-7A32-91A72511BABE}"/>
-              </a:ext>
-            </a:extLst>
-          </p:cNvPr>
-          <p:cNvSpPr>
-            <a:spLocks noGrp="1"/>
-          </p:cNvSpPr>
-          <p:nvPr>
-            <p:ph type="body" sz="quarter" idx="34"/>
-          </p:nvPr>
-        </p:nvSpPr>
-        <p:spPr/>
-        <p:txBody>
-          <a:bodyPr/>
-          <a:lstStyle/>
-          <a:p>
-            <a:endParaRPr lang="en-US"/>
-          </a:p>
-        </p:txBody>
-      </p:sp>
-      <p:sp>
-        <p:nvSpPr>
-          <p:cNvPr id="7" name="Text Placeholder 6">
-            <a:extLst>
-              <a:ext uri="{FF2B5EF4-FFF2-40B4-BE49-F238E27FC236}">
-                <a16:creationId xmlns:a16="http://schemas.microsoft.com/office/drawing/2014/main" id="{FC56E693-A8FB-1BF9-AA4A-BB529A6B19A5}"/>
-              </a:ext>
-            </a:extLst>
-          </p:cNvPr>
-          <p:cNvSpPr>
-            <a:spLocks noGrp="1"/>
-          </p:cNvSpPr>
-          <p:nvPr>
-            <p:ph type="body" sz="quarter" idx="35"/>
-          </p:nvPr>
-        </p:nvSpPr>
-        <p:spPr/>
-        <p:txBody>
-          <a:bodyPr/>
-          <a:lstStyle/>
-          <a:p>
-            <a:endParaRPr lang="en-US"/>
-          </a:p>
-        </p:txBody>
-      </p:sp>
-      <p:sp>
-        <p:nvSpPr>
-          <p:cNvPr id="8" name="Text Placeholder 7">
-            <a:extLst>
-              <a:ext uri="{FF2B5EF4-FFF2-40B4-BE49-F238E27FC236}">
-                <a16:creationId xmlns:a16="http://schemas.microsoft.com/office/drawing/2014/main" id="{A6AC6688-A316-7575-3BE7-2CE296B5A9B1}"/>
-              </a:ext>
-            </a:extLst>
-          </p:cNvPr>
-          <p:cNvSpPr>
-            <a:spLocks noGrp="1"/>
-          </p:cNvSpPr>
-          <p:nvPr>
-            <p:ph type="body" sz="quarter" idx="36"/>
-          </p:nvPr>
-        </p:nvSpPr>
-        <p:spPr/>
-        <p:txBody>
-          <a:bodyPr/>
-          <a:lstStyle/>
-          <a:p>
-            <a:endParaRPr lang="en-US"/>
-          </a:p>
-        </p:txBody>
-      </p:sp>
-      <p:sp>
-        <p:nvSpPr>
-          <p:cNvPr id="9" name="Text Placeholder 8">
-            <a:extLst>
-              <a:ext uri="{FF2B5EF4-FFF2-40B4-BE49-F238E27FC236}">
-                <a16:creationId xmlns:a16="http://schemas.microsoft.com/office/drawing/2014/main" id="{DCBF457B-2A23-3CC1-00E4-DE34F4923AFC}"/>
-              </a:ext>
-            </a:extLst>
-          </p:cNvPr>
-          <p:cNvSpPr>
-            <a:spLocks noGrp="1"/>
-          </p:cNvSpPr>
-          <p:nvPr>
-            <p:ph type="body" sz="quarter" idx="37"/>
-          </p:nvPr>
-        </p:nvSpPr>
-        <p:spPr/>
-        <p:txBody>
-          <a:bodyPr/>
-          <a:lstStyle/>
-          <a:p>
-            <a:endParaRPr lang="en-US"/>
-          </a:p>
-        </p:txBody>
-      </p:sp>
-      <p:sp>
-        <p:nvSpPr>
-          <p:cNvPr id="10" name="Text Placeholder 9">
-            <a:extLst>
-              <a:ext uri="{FF2B5EF4-FFF2-40B4-BE49-F238E27FC236}">
-                <a16:creationId xmlns:a16="http://schemas.microsoft.com/office/drawing/2014/main" id="{FCAAE55E-A811-EF5C-8607-8827156F25B7}"/>
-              </a:ext>
-            </a:extLst>
-          </p:cNvPr>
-          <p:cNvSpPr>
-            <a:spLocks noGrp="1"/>
-          </p:cNvSpPr>
-          <p:nvPr>
-            <p:ph type="body" sz="quarter" idx="38"/>
-          </p:nvPr>
-        </p:nvSpPr>
-        <p:spPr/>
-        <p:txBody>
-          <a:bodyPr/>
-          <a:lstStyle/>
-          <a:p>
-            <a:endParaRPr lang="en-US"/>
-          </a:p>
-        </p:txBody>
-      </p:sp>
-      <p:sp>
-        <p:nvSpPr>
-          <p:cNvPr id="11" name="Text Placeholder 10">
-            <a:extLst>
-              <a:ext uri="{FF2B5EF4-FFF2-40B4-BE49-F238E27FC236}">
-                <a16:creationId xmlns:a16="http://schemas.microsoft.com/office/drawing/2014/main" id="{F59E590C-5DCC-DE1C-E628-3320620CDCF0}"/>
-              </a:ext>
-            </a:extLst>
-          </p:cNvPr>
-          <p:cNvSpPr>
-            <a:spLocks noGrp="1"/>
-          </p:cNvSpPr>
-          <p:nvPr>
-            <p:ph type="body" sz="quarter" idx="39"/>
-          </p:nvPr>
-        </p:nvSpPr>
-        <p:spPr/>
-        <p:txBody>
-          <a:bodyPr/>
-          <a:lstStyle/>
-          <a:p>
-            <a:endParaRPr lang="en-US"/>
-          </a:p>
-        </p:txBody>
-      </p:sp>
-      <p:sp>
-        <p:nvSpPr>
-          <p:cNvPr id="12" name="Text Placeholder 11">
-            <a:extLst>
-              <a:ext uri="{FF2B5EF4-FFF2-40B4-BE49-F238E27FC236}">
-                <a16:creationId xmlns:a16="http://schemas.microsoft.com/office/drawing/2014/main" id="{3CFD6479-78DC-E265-4C60-BF6B0DE446F2}"/>
-              </a:ext>
-            </a:extLst>
-          </p:cNvPr>
-          <p:cNvSpPr>
-            <a:spLocks noGrp="1"/>
-          </p:cNvSpPr>
-          <p:nvPr>
-            <p:ph type="body" sz="quarter" idx="40"/>
-          </p:nvPr>
-        </p:nvSpPr>
-        <p:spPr/>
-        <p:txBody>
-          <a:bodyPr/>
-          <a:lstStyle/>
-          <a:p>
-            <a:endParaRPr lang="en-US"/>
-          </a:p>
-        </p:txBody>
-      </p:sp>
-      <p:sp>
-        <p:nvSpPr>
-          <p:cNvPr id="13" name="Text Placeholder 12">
-            <a:extLst>
-              <a:ext uri="{FF2B5EF4-FFF2-40B4-BE49-F238E27FC236}">
-                <a16:creationId xmlns:a16="http://schemas.microsoft.com/office/drawing/2014/main" id="{06334722-FD0A-4699-6A89-0083C41975DE}"/>
-              </a:ext>
-            </a:extLst>
-          </p:cNvPr>
-          <p:cNvSpPr>
-            <a:spLocks noGrp="1"/>
-          </p:cNvSpPr>
-          <p:nvPr>
-            <p:ph type="body" sz="quarter" idx="41"/>
-          </p:nvPr>
-        </p:nvSpPr>
-        <p:spPr/>
-        <p:txBody>
-          <a:bodyPr/>
-          <a:lstStyle/>
-          <a:p>
-            <a:endParaRPr lang="en-US"/>
-          </a:p>
-        </p:txBody>
-      </p:sp>
-      <p:sp>
-        <p:nvSpPr>
-          <p:cNvPr id="14" name="Text Placeholder 13">
-            <a:extLst>
-              <a:ext uri="{FF2B5EF4-FFF2-40B4-BE49-F238E27FC236}">
-                <a16:creationId xmlns:a16="http://schemas.microsoft.com/office/drawing/2014/main" id="{DDC03C83-98FE-6EF4-1194-1D1B9E3F834D}"/>
-              </a:ext>
-            </a:extLst>
-          </p:cNvPr>
-          <p:cNvSpPr>
-            <a:spLocks noGrp="1"/>
-          </p:cNvSpPr>
-          <p:nvPr>
-            <p:ph type="body" sz="quarter" idx="42"/>
-          </p:nvPr>
-        </p:nvSpPr>
-        <p:spPr/>
-        <p:txBody>
-          <a:bodyPr/>
-          <a:lstStyle/>
-          <a:p>
-            <a:endParaRPr lang="en-US"/>
-          </a:p>
-        </p:txBody>
-      </p:sp>
-      <p:sp>
-        <p:nvSpPr>
-          <p:cNvPr id="15" name="Picture Placeholder 14">
-            <a:extLst>
-              <a:ext uri="{FF2B5EF4-FFF2-40B4-BE49-F238E27FC236}">
-                <a16:creationId xmlns:a16="http://schemas.microsoft.com/office/drawing/2014/main" id="{1587E2F3-1ACF-EAC3-5665-7CB8F0C931DF}"/>
-              </a:ext>
-            </a:extLst>
-          </p:cNvPr>
-          <p:cNvSpPr>
-            <a:spLocks noGrp="1"/>
-          </p:cNvSpPr>
-          <p:nvPr>
-            <p:ph type="pic" sz="quarter" idx="43"/>
-          </p:nvPr>
-        </p:nvSpPr>
-        <p:spPr/>
-        <p:txBody>
-          <a:bodyPr/>
-          <a:lstStyle/>
-          <a:p>
-            <a:endParaRPr lang="en-US"/>
-          </a:p>
-        </p:txBody>
-      </p:sp>
-      <p:sp>
-        <p:nvSpPr>
-          <p:cNvPr id="16" name="Picture Placeholder 15">
-            <a:extLst>
-              <a:ext uri="{FF2B5EF4-FFF2-40B4-BE49-F238E27FC236}">
-                <a16:creationId xmlns:a16="http://schemas.microsoft.com/office/drawing/2014/main" id="{B858087C-4A36-3681-19D3-F3C21BE5DDE4}"/>
-              </a:ext>
-            </a:extLst>
-          </p:cNvPr>
-          <p:cNvSpPr>
-            <a:spLocks noGrp="1"/>
-          </p:cNvSpPr>
-          <p:nvPr>
-            <p:ph type="pic" sz="quarter" idx="44"/>
-          </p:nvPr>
-        </p:nvSpPr>
-        <p:spPr/>
-        <p:txBody>
-          <a:bodyPr/>
-          <a:lstStyle/>
-          <a:p>
-            <a:endParaRPr lang="en-US"/>
-          </a:p>
-        </p:txBody>
-      </p:sp>
-      <p:sp>
-        <p:nvSpPr>
-          <p:cNvPr id="17" name="Picture Placeholder 16">
-            <a:extLst>
-              <a:ext uri="{FF2B5EF4-FFF2-40B4-BE49-F238E27FC236}">
-                <a16:creationId xmlns:a16="http://schemas.microsoft.com/office/drawing/2014/main" id="{71287929-0B6C-168F-8856-DA671D3022C4}"/>
-              </a:ext>
-            </a:extLst>
-          </p:cNvPr>
-          <p:cNvSpPr>
-            <a:spLocks noGrp="1"/>
-          </p:cNvSpPr>
-          <p:nvPr>
-            <p:ph type="pic" sz="quarter" idx="45"/>
-          </p:nvPr>
-        </p:nvSpPr>
-        <p:spPr/>
-        <p:txBody>
-          <a:bodyPr/>
-          <a:lstStyle/>
-          <a:p>
-            <a:endParaRPr lang="en-US"/>
-          </a:p>
-        </p:txBody>
-      </p:sp>
-      <p:sp>
-        <p:nvSpPr>
-          <p:cNvPr id="18" name="Picture Placeholder 17">
-            <a:extLst>
-              <a:ext uri="{FF2B5EF4-FFF2-40B4-BE49-F238E27FC236}">
-                <a16:creationId xmlns:a16="http://schemas.microsoft.com/office/drawing/2014/main" id="{555F223E-F1CE-6B9A-4389-FE457F390095}"/>
-              </a:ext>
-            </a:extLst>
-          </p:cNvPr>
-          <p:cNvSpPr>
-            <a:spLocks noGrp="1"/>
-          </p:cNvSpPr>
-          <p:nvPr>
-            <p:ph type="pic" sz="quarter" idx="46"/>
-          </p:nvPr>
-        </p:nvSpPr>
-        <p:spPr/>
-        <p:txBody>
-          <a:bodyPr/>
-          <a:lstStyle/>
-          <a:p>
-            <a:endParaRPr lang="en-US"/>
-          </a:p>
-        </p:txBody>
-      </p:sp>
-    </p:spTree>
-    <p:extLst>
-      <p:ext uri="{BB962C8B-B14F-4D97-AF65-F5344CB8AC3E}">
-        <p14:creationId xmlns:p14="http://schemas.microsoft.com/office/powerpoint/2010/main" val="1195048704"/>
-      </p:ext>
-    </p:extLst>
-  </p:cSld>
-  <p:clrMapOvr>
-    <a:masterClrMapping/>
-  </p:clrMapOvr>
-</p:sld>
-</file>
-
-<file path=ppt/slides/slide4.xml><?xml version="1.0" encoding="utf-8"?>
-<p:sld xmlns:a="http://schemas.openxmlformats.org/drawingml/2006/main" xmlns:r="http://schemas.openxmlformats.org/officeDocument/2006/relationships" xmlns:p="http://schemas.openxmlformats.org/presentationml/2006/main">
-  <p:cSld>
-    <p:spTree>
-      <p:nvGrpSpPr>
-        <p:cNvPr id="1" name=""/>
-        <p:cNvGrpSpPr/>
-        <p:nvPr/>
-      </p:nvGrpSpPr>
-      <p:grpSpPr>
-        <a:xfrm>
-          <a:off x="0" y="0"/>
-          <a:ext cx="0" cy="0"/>
-          <a:chOff x="0" y="0"/>
-          <a:chExt cx="0" cy="0"/>
-        </a:xfrm>
-      </p:grpSpPr>
-      <p:sp>
-        <p:nvSpPr>
-          <p:cNvPr id="2" name="Text Placeholder 1">
-            <a:extLst>
-              <a:ext uri="{FF2B5EF4-FFF2-40B4-BE49-F238E27FC236}">
-                <a16:creationId xmlns:a16="http://schemas.microsoft.com/office/drawing/2014/main" id="{B39651BB-03C7-92D1-EBD5-9C4313BF35B5}"/>
-              </a:ext>
-            </a:extLst>
-          </p:cNvPr>
-          <p:cNvSpPr>
-            <a:spLocks noGrp="1"/>
-          </p:cNvSpPr>
-          <p:nvPr>
-            <p:ph type="body" sz="quarter" idx="11"/>
-          </p:nvPr>
-        </p:nvSpPr>
-        <p:spPr/>
-        <p:txBody>
-          <a:bodyPr/>
-          <a:lstStyle/>
-          <a:p>
-            <a:endParaRPr lang="en-US"/>
-          </a:p>
-        </p:txBody>
-      </p:sp>
-      <p:sp>
-        <p:nvSpPr>
-          <p:cNvPr id="3" name="Text Placeholder 2">
-            <a:extLst>
-              <a:ext uri="{FF2B5EF4-FFF2-40B4-BE49-F238E27FC236}">
-                <a16:creationId xmlns:a16="http://schemas.microsoft.com/office/drawing/2014/main" id="{5B8C65C4-335B-489C-ED62-EDF96CC07BD6}"/>
-              </a:ext>
-            </a:extLst>
-          </p:cNvPr>
-          <p:cNvSpPr>
-            <a:spLocks noGrp="1"/>
-          </p:cNvSpPr>
-          <p:nvPr>
-            <p:ph type="body" sz="quarter" idx="12"/>
-          </p:nvPr>
-        </p:nvSpPr>
-        <p:spPr/>
-        <p:txBody>
-          <a:bodyPr/>
-          <a:lstStyle/>
-          <a:p>
-            <a:endParaRPr lang="en-US"/>
-          </a:p>
-        </p:txBody>
-      </p:sp>
-      <p:sp>
-        <p:nvSpPr>
-          <p:cNvPr id="4" name="Text Placeholder 3">
-            <a:extLst>
-              <a:ext uri="{FF2B5EF4-FFF2-40B4-BE49-F238E27FC236}">
-                <a16:creationId xmlns:a16="http://schemas.microsoft.com/office/drawing/2014/main" id="{5A01C282-870E-3F14-F66E-69521A2591E9}"/>
-              </a:ext>
-            </a:extLst>
-          </p:cNvPr>
-          <p:cNvSpPr>
-            <a:spLocks noGrp="1"/>
-          </p:cNvSpPr>
-          <p:nvPr>
-            <p:ph type="body" sz="quarter" idx="13"/>
-          </p:nvPr>
-        </p:nvSpPr>
-        <p:spPr/>
-        <p:txBody>
-          <a:bodyPr/>
-          <a:lstStyle/>
-          <a:p>
-            <a:endParaRPr lang="en-US"/>
-          </a:p>
-        </p:txBody>
-      </p:sp>
-      <p:sp>
-        <p:nvSpPr>
-          <p:cNvPr id="5" name="Text Placeholder 4">
-            <a:extLst>
-              <a:ext uri="{FF2B5EF4-FFF2-40B4-BE49-F238E27FC236}">
-                <a16:creationId xmlns:a16="http://schemas.microsoft.com/office/drawing/2014/main" id="{CBBB30B4-0315-1028-8F0E-2E50C058B2A4}"/>
-              </a:ext>
-            </a:extLst>
-          </p:cNvPr>
-          <p:cNvSpPr>
-            <a:spLocks noGrp="1"/>
-          </p:cNvSpPr>
-          <p:nvPr>
-            <p:ph type="body" sz="quarter" idx="33"/>
-          </p:nvPr>
-        </p:nvSpPr>
-        <p:spPr/>
-        <p:txBody>
-          <a:bodyPr/>
-          <a:lstStyle/>
-          <a:p>
-            <a:endParaRPr lang="en-US"/>
-          </a:p>
-        </p:txBody>
-      </p:sp>
-      <p:sp>
-        <p:nvSpPr>
-          <p:cNvPr id="6" name="Picture Placeholder 5">
-            <a:extLst>
-              <a:ext uri="{FF2B5EF4-FFF2-40B4-BE49-F238E27FC236}">
-                <a16:creationId xmlns:a16="http://schemas.microsoft.com/office/drawing/2014/main" id="{F5640770-634B-2C4F-B7EE-783ED3A7275C}"/>
-              </a:ext>
-            </a:extLst>
-          </p:cNvPr>
-          <p:cNvSpPr>
-            <a:spLocks noGrp="1"/>
-          </p:cNvSpPr>
-          <p:nvPr>
-            <p:ph type="pic" sz="quarter" idx="43"/>
-          </p:nvPr>
-        </p:nvSpPr>
-        <p:spPr/>
-        <p:txBody>
-          <a:bodyPr/>
-          <a:lstStyle/>
-          <a:p>
-            <a:endParaRPr lang="en-US"/>
-          </a:p>
-        </p:txBody>
-      </p:sp>
-      <p:sp>
-        <p:nvSpPr>
-          <p:cNvPr id="7" name="Text Placeholder 6">
-            <a:extLst>
-              <a:ext uri="{FF2B5EF4-FFF2-40B4-BE49-F238E27FC236}">
-                <a16:creationId xmlns:a16="http://schemas.microsoft.com/office/drawing/2014/main" id="{3C32928B-4D64-0447-E542-1089DA71B767}"/>
-              </a:ext>
-            </a:extLst>
-          </p:cNvPr>
-          <p:cNvSpPr>
-            <a:spLocks noGrp="1"/>
-          </p:cNvSpPr>
-          <p:nvPr>
-            <p:ph type="body" sz="quarter" idx="44"/>
-          </p:nvPr>
-        </p:nvSpPr>
-        <p:spPr/>
-        <p:txBody>
-          <a:bodyPr/>
-          <a:lstStyle/>
-          <a:p>
-            <a:endParaRPr lang="en-US"/>
-          </a:p>
-        </p:txBody>
-      </p:sp>
-      <p:sp>
-        <p:nvSpPr>
-          <p:cNvPr id="8" name="Text Placeholder 7">
-            <a:extLst>
-              <a:ext uri="{FF2B5EF4-FFF2-40B4-BE49-F238E27FC236}">
-                <a16:creationId xmlns:a16="http://schemas.microsoft.com/office/drawing/2014/main" id="{DA15841B-2EFA-8178-C4F3-18088E6FC0CE}"/>
-              </a:ext>
-            </a:extLst>
-          </p:cNvPr>
-          <p:cNvSpPr>
-            <a:spLocks noGrp="1"/>
-          </p:cNvSpPr>
-          <p:nvPr>
-            <p:ph type="body" sz="quarter" idx="45"/>
-          </p:nvPr>
-        </p:nvSpPr>
-        <p:spPr/>
-        <p:txBody>
-          <a:bodyPr/>
-          <a:lstStyle/>
-          <a:p>
-            <a:endParaRPr lang="en-US"/>
-          </a:p>
-        </p:txBody>
-      </p:sp>
-      <p:sp>
-        <p:nvSpPr>
-          <p:cNvPr id="9" name="Text Placeholder 8">
-            <a:extLst>
-              <a:ext uri="{FF2B5EF4-FFF2-40B4-BE49-F238E27FC236}">
-                <a16:creationId xmlns:a16="http://schemas.microsoft.com/office/drawing/2014/main" id="{7BB40E48-6CBF-5C93-166D-7FAD72F19DB7}"/>
-              </a:ext>
-            </a:extLst>
-          </p:cNvPr>
-          <p:cNvSpPr>
-            <a:spLocks noGrp="1"/>
-          </p:cNvSpPr>
-          <p:nvPr>
-            <p:ph type="body" sz="quarter" idx="46"/>
-          </p:nvPr>
-        </p:nvSpPr>
-        <p:spPr/>
-        <p:txBody>
-          <a:bodyPr/>
-          <a:lstStyle/>
-          <a:p>
-            <a:endParaRPr lang="en-US"/>
-          </a:p>
-        </p:txBody>
-      </p:sp>
-      <p:sp>
-        <p:nvSpPr>
-          <p:cNvPr id="10" name="Picture Placeholder 9">
-            <a:extLst>
-              <a:ext uri="{FF2B5EF4-FFF2-40B4-BE49-F238E27FC236}">
-                <a16:creationId xmlns:a16="http://schemas.microsoft.com/office/drawing/2014/main" id="{590F4DD9-273E-BEB5-D812-61B32E677135}"/>
-              </a:ext>
-            </a:extLst>
-          </p:cNvPr>
-          <p:cNvSpPr>
-            <a:spLocks noGrp="1"/>
-          </p:cNvSpPr>
-          <p:nvPr>
-            <p:ph type="pic" sz="quarter" idx="47"/>
-          </p:nvPr>
-        </p:nvSpPr>
-        <p:spPr/>
-        <p:txBody>
-          <a:bodyPr/>
-          <a:lstStyle/>
-          <a:p>
-            <a:endParaRPr lang="en-US"/>
-          </a:p>
-        </p:txBody>
-      </p:sp>
-      <p:sp>
-        <p:nvSpPr>
-          <p:cNvPr id="11" name="Text Placeholder 10">
-            <a:extLst>
-              <a:ext uri="{FF2B5EF4-FFF2-40B4-BE49-F238E27FC236}">
-                <a16:creationId xmlns:a16="http://schemas.microsoft.com/office/drawing/2014/main" id="{4F2BB747-69E9-F8A0-EDBE-E00D5DD1773E}"/>
-              </a:ext>
-            </a:extLst>
-          </p:cNvPr>
-          <p:cNvSpPr>
-            <a:spLocks noGrp="1"/>
-          </p:cNvSpPr>
-          <p:nvPr>
-            <p:ph type="body" sz="quarter" idx="48"/>
-          </p:nvPr>
-        </p:nvSpPr>
-        <p:spPr/>
-        <p:txBody>
-          <a:bodyPr/>
-          <a:lstStyle/>
-          <a:p>
-            <a:endParaRPr lang="en-US"/>
-          </a:p>
-        </p:txBody>
-      </p:sp>
-      <p:sp>
-        <p:nvSpPr>
-          <p:cNvPr id="12" name="Text Placeholder 11">
-            <a:extLst>
-              <a:ext uri="{FF2B5EF4-FFF2-40B4-BE49-F238E27FC236}">
-                <a16:creationId xmlns:a16="http://schemas.microsoft.com/office/drawing/2014/main" id="{579DE8A5-D66E-BD68-D332-AD9D1AB25125}"/>
-              </a:ext>
-            </a:extLst>
-          </p:cNvPr>
-          <p:cNvSpPr>
-            <a:spLocks noGrp="1"/>
-          </p:cNvSpPr>
-          <p:nvPr>
-            <p:ph type="body" sz="quarter" idx="49"/>
-          </p:nvPr>
-        </p:nvSpPr>
-        <p:spPr/>
-        <p:txBody>
-          <a:bodyPr/>
-          <a:lstStyle/>
-          <a:p>
-            <a:endParaRPr lang="en-US"/>
-          </a:p>
-        </p:txBody>
-      </p:sp>
-      <p:sp>
-        <p:nvSpPr>
-          <p:cNvPr id="13" name="Text Placeholder 12">
-            <a:extLst>
-              <a:ext uri="{FF2B5EF4-FFF2-40B4-BE49-F238E27FC236}">
-                <a16:creationId xmlns:a16="http://schemas.microsoft.com/office/drawing/2014/main" id="{253F85C7-F046-1976-6550-573401C2EFED}"/>
-              </a:ext>
-            </a:extLst>
-          </p:cNvPr>
-          <p:cNvSpPr>
-            <a:spLocks noGrp="1"/>
-          </p:cNvSpPr>
-          <p:nvPr>
-            <p:ph type="body" sz="quarter" idx="50"/>
-          </p:nvPr>
-        </p:nvSpPr>
-        <p:spPr/>
-        <p:txBody>
-          <a:bodyPr/>
-          <a:lstStyle/>
-          <a:p>
-            <a:endParaRPr lang="en-US"/>
-          </a:p>
-        </p:txBody>
-      </p:sp>
-      <p:sp>
-        <p:nvSpPr>
-          <p:cNvPr id="14" name="Picture Placeholder 13">
-            <a:extLst>
-              <a:ext uri="{FF2B5EF4-FFF2-40B4-BE49-F238E27FC236}">
-                <a16:creationId xmlns:a16="http://schemas.microsoft.com/office/drawing/2014/main" id="{2144AB06-0D41-3BC7-6ECF-2D347C7C747A}"/>
-              </a:ext>
-            </a:extLst>
-          </p:cNvPr>
-          <p:cNvSpPr>
-            <a:spLocks noGrp="1"/>
-          </p:cNvSpPr>
-          <p:nvPr>
-            <p:ph type="pic" sz="quarter" idx="51"/>
-          </p:nvPr>
-        </p:nvSpPr>
-        <p:spPr/>
-        <p:txBody>
-          <a:bodyPr/>
-          <a:lstStyle/>
-          <a:p>
-            <a:endParaRPr lang="en-US"/>
-          </a:p>
-        </p:txBody>
-      </p:sp>
-      <p:sp>
-        <p:nvSpPr>
-          <p:cNvPr id="15" name="Text Placeholder 14">
-            <a:extLst>
-              <a:ext uri="{FF2B5EF4-FFF2-40B4-BE49-F238E27FC236}">
-                <a16:creationId xmlns:a16="http://schemas.microsoft.com/office/drawing/2014/main" id="{8F4F1B4E-DC79-94A5-F127-E84B28AFEB35}"/>
-              </a:ext>
-            </a:extLst>
-          </p:cNvPr>
-          <p:cNvSpPr>
-            <a:spLocks noGrp="1"/>
-          </p:cNvSpPr>
-          <p:nvPr>
-            <p:ph type="body" sz="quarter" idx="52"/>
-          </p:nvPr>
-        </p:nvSpPr>
-        <p:spPr/>
-        <p:txBody>
-          <a:bodyPr/>
-          <a:lstStyle/>
-          <a:p>
-            <a:endParaRPr lang="en-US"/>
-          </a:p>
-        </p:txBody>
-      </p:sp>
-      <p:sp>
-        <p:nvSpPr>
-          <p:cNvPr id="16" name="Text Placeholder 15">
-            <a:extLst>
-              <a:ext uri="{FF2B5EF4-FFF2-40B4-BE49-F238E27FC236}">
-                <a16:creationId xmlns:a16="http://schemas.microsoft.com/office/drawing/2014/main" id="{D17BE2E1-C7E5-6468-16FB-B378C4B47826}"/>
-              </a:ext>
-            </a:extLst>
-          </p:cNvPr>
-          <p:cNvSpPr>
-            <a:spLocks noGrp="1"/>
-          </p:cNvSpPr>
-          <p:nvPr>
-            <p:ph type="body" sz="quarter" idx="53"/>
-          </p:nvPr>
-        </p:nvSpPr>
-        <p:spPr/>
-        <p:txBody>
-          <a:bodyPr/>
-          <a:lstStyle/>
-          <a:p>
-            <a:endParaRPr lang="en-US"/>
-          </a:p>
-        </p:txBody>
-      </p:sp>
-      <p:sp>
-        <p:nvSpPr>
-          <p:cNvPr id="17" name="Text Placeholder 16">
-            <a:extLst>
-              <a:ext uri="{FF2B5EF4-FFF2-40B4-BE49-F238E27FC236}">
-                <a16:creationId xmlns:a16="http://schemas.microsoft.com/office/drawing/2014/main" id="{986EFA79-94BA-6B58-E538-769CB6D90C21}"/>
-              </a:ext>
-            </a:extLst>
-          </p:cNvPr>
-          <p:cNvSpPr>
-            <a:spLocks noGrp="1"/>
-          </p:cNvSpPr>
-          <p:nvPr>
-            <p:ph type="body" sz="quarter" idx="54"/>
-          </p:nvPr>
-        </p:nvSpPr>
-        <p:spPr/>
-        <p:txBody>
-          <a:bodyPr/>
-          <a:lstStyle/>
-          <a:p>
-            <a:endParaRPr lang="en-US"/>
-          </a:p>
-        </p:txBody>
-      </p:sp>
-      <p:sp>
-        <p:nvSpPr>
-          <p:cNvPr id="18" name="Picture Placeholder 17">
-            <a:extLst>
-              <a:ext uri="{FF2B5EF4-FFF2-40B4-BE49-F238E27FC236}">
-                <a16:creationId xmlns:a16="http://schemas.microsoft.com/office/drawing/2014/main" id="{5BBEF173-F393-CD2E-F482-861114077076}"/>
-              </a:ext>
-            </a:extLst>
-          </p:cNvPr>
-          <p:cNvSpPr>
-            <a:spLocks noGrp="1"/>
-          </p:cNvSpPr>
-          <p:nvPr>
-            <p:ph type="pic" sz="quarter" idx="55"/>
-          </p:nvPr>
-        </p:nvSpPr>
-        <p:spPr/>
-        <p:txBody>
-          <a:bodyPr/>
-          <a:lstStyle/>
-          <a:p>
-            <a:endParaRPr lang="en-US"/>
-          </a:p>
-        </p:txBody>
-      </p:sp>
-    </p:spTree>
-    <p:extLst>
-      <p:ext uri="{BB962C8B-B14F-4D97-AF65-F5344CB8AC3E}">
-        <p14:creationId xmlns:p14="http://schemas.microsoft.com/office/powerpoint/2010/main" val="2319947847"/>
-      </p:ext>
-    </p:extLst>
-  </p:cSld>
-  <p:clrMapOvr>
-    <a:masterClrMapping/>
-  </p:clrMapOvr>
-</p:sld>
-</file>
-
-<file path=ppt/slides/slide5.xml><?xml version="1.0" encoding="utf-8"?>
-<p:sld xmlns:a="http://schemas.openxmlformats.org/drawingml/2006/main" xmlns:r="http://schemas.openxmlformats.org/officeDocument/2006/relationships" xmlns:p="http://schemas.openxmlformats.org/presentationml/2006/main">
-  <p:cSld>
-    <p:spTree>
-      <p:nvGrpSpPr>
-        <p:cNvPr id="1" name=""/>
-        <p:cNvGrpSpPr/>
-        <p:nvPr/>
-      </p:nvGrpSpPr>
-      <p:grpSpPr>
-        <a:xfrm>
-          <a:off x="0" y="0"/>
-          <a:ext cx="0" cy="0"/>
-          <a:chOff x="0" y="0"/>
-          <a:chExt cx="0" cy="0"/>
-        </a:xfrm>
-      </p:grpSpPr>
-      <p:sp>
-        <p:nvSpPr>
-          <p:cNvPr id="2" name="Text Placeholder 1">
-            <a:extLst>
-              <a:ext uri="{FF2B5EF4-FFF2-40B4-BE49-F238E27FC236}">
-                <a16:creationId xmlns:a16="http://schemas.microsoft.com/office/drawing/2014/main" id="{89E5E9EF-78EB-6398-0DF0-5BECEDFE8F6B}"/>
-              </a:ext>
-            </a:extLst>
-          </p:cNvPr>
-          <p:cNvSpPr>
-            <a:spLocks noGrp="1"/>
-          </p:cNvSpPr>
-          <p:nvPr>
-            <p:ph type="body" sz="quarter" idx="11"/>
-          </p:nvPr>
-        </p:nvSpPr>
-        <p:spPr/>
-        <p:txBody>
-          <a:bodyPr/>
-          <a:lstStyle/>
-          <a:p>
-            <a:endParaRPr lang="en-US"/>
-          </a:p>
-        </p:txBody>
-      </p:sp>
-      <p:sp>
-        <p:nvSpPr>
-          <p:cNvPr id="3" name="Text Placeholder 2">
-            <a:extLst>
-              <a:ext uri="{FF2B5EF4-FFF2-40B4-BE49-F238E27FC236}">
-                <a16:creationId xmlns:a16="http://schemas.microsoft.com/office/drawing/2014/main" id="{530AA4C7-A663-7035-ED8D-7B43EF350B32}"/>
-              </a:ext>
-            </a:extLst>
-          </p:cNvPr>
-          <p:cNvSpPr>
-            <a:spLocks noGrp="1"/>
-          </p:cNvSpPr>
-          <p:nvPr>
-            <p:ph type="body" sz="quarter" idx="12"/>
-          </p:nvPr>
-        </p:nvSpPr>
-        <p:spPr/>
-        <p:txBody>
-          <a:bodyPr/>
-          <a:lstStyle/>
-          <a:p>
-            <a:endParaRPr lang="en-US"/>
-          </a:p>
-        </p:txBody>
-      </p:sp>
-      <p:sp>
-        <p:nvSpPr>
-          <p:cNvPr id="4" name="Text Placeholder 3">
-            <a:extLst>
-              <a:ext uri="{FF2B5EF4-FFF2-40B4-BE49-F238E27FC236}">
-                <a16:creationId xmlns:a16="http://schemas.microsoft.com/office/drawing/2014/main" id="{CED95CBA-6414-EA61-9873-46CA9CE60E8A}"/>
-              </a:ext>
-            </a:extLst>
-          </p:cNvPr>
-          <p:cNvSpPr>
-            <a:spLocks noGrp="1"/>
-          </p:cNvSpPr>
-          <p:nvPr>
-            <p:ph type="body" sz="quarter" idx="13"/>
-          </p:nvPr>
-        </p:nvSpPr>
-        <p:spPr/>
-        <p:txBody>
-          <a:bodyPr/>
-          <a:lstStyle/>
-          <a:p>
-            <a:endParaRPr lang="en-US"/>
-          </a:p>
-        </p:txBody>
-      </p:sp>
-      <p:sp>
-        <p:nvSpPr>
-          <p:cNvPr id="5" name="Text Placeholder 4">
-            <a:extLst>
-              <a:ext uri="{FF2B5EF4-FFF2-40B4-BE49-F238E27FC236}">
-                <a16:creationId xmlns:a16="http://schemas.microsoft.com/office/drawing/2014/main" id="{132576D7-AE36-E65F-92C9-8A0BCF089886}"/>
-              </a:ext>
-            </a:extLst>
-          </p:cNvPr>
-          <p:cNvSpPr>
-            <a:spLocks noGrp="1"/>
-          </p:cNvSpPr>
-          <p:nvPr>
-            <p:ph type="body" sz="quarter" idx="21"/>
-          </p:nvPr>
-        </p:nvSpPr>
-        <p:spPr/>
-        <p:txBody>
-          <a:bodyPr/>
-          <a:lstStyle/>
-          <a:p>
-            <a:endParaRPr lang="en-US"/>
-          </a:p>
-        </p:txBody>
-      </p:sp>
-      <p:sp>
-        <p:nvSpPr>
-          <p:cNvPr id="6" name="Text Placeholder 5">
-            <a:extLst>
-              <a:ext uri="{FF2B5EF4-FFF2-40B4-BE49-F238E27FC236}">
-                <a16:creationId xmlns:a16="http://schemas.microsoft.com/office/drawing/2014/main" id="{6036C9EA-945B-C3C0-9213-D2681287DFF3}"/>
-              </a:ext>
-            </a:extLst>
-          </p:cNvPr>
-          <p:cNvSpPr>
-            <a:spLocks noGrp="1"/>
-          </p:cNvSpPr>
-          <p:nvPr>
-            <p:ph type="body" sz="quarter" idx="22"/>
-          </p:nvPr>
-        </p:nvSpPr>
-        <p:spPr/>
-        <p:txBody>
-          <a:bodyPr/>
-          <a:lstStyle/>
-          <a:p>
-            <a:endParaRPr lang="en-US"/>
-          </a:p>
-        </p:txBody>
-      </p:sp>
-      <p:sp>
-        <p:nvSpPr>
-          <p:cNvPr id="7" name="Text Placeholder 6">
-            <a:extLst>
-              <a:ext uri="{FF2B5EF4-FFF2-40B4-BE49-F238E27FC236}">
-                <a16:creationId xmlns:a16="http://schemas.microsoft.com/office/drawing/2014/main" id="{DFBAF90D-0413-3F52-CE5B-F5EE13BA447E}"/>
-              </a:ext>
-            </a:extLst>
-          </p:cNvPr>
-          <p:cNvSpPr>
-            <a:spLocks noGrp="1"/>
-          </p:cNvSpPr>
-          <p:nvPr>
-            <p:ph type="body" sz="quarter" idx="23"/>
-          </p:nvPr>
-        </p:nvSpPr>
-        <p:spPr/>
-        <p:txBody>
-          <a:bodyPr/>
-          <a:lstStyle/>
-          <a:p>
-            <a:endParaRPr lang="en-US"/>
-          </a:p>
-        </p:txBody>
-      </p:sp>
-      <p:sp>
-        <p:nvSpPr>
-          <p:cNvPr id="8" name="Text Placeholder 7">
-            <a:extLst>
-              <a:ext uri="{FF2B5EF4-FFF2-40B4-BE49-F238E27FC236}">
-                <a16:creationId xmlns:a16="http://schemas.microsoft.com/office/drawing/2014/main" id="{EBEED91C-7A4B-3FF7-38C8-6FA061EFD5EA}"/>
-              </a:ext>
-            </a:extLst>
-          </p:cNvPr>
-          <p:cNvSpPr>
-            <a:spLocks noGrp="1"/>
-          </p:cNvSpPr>
-          <p:nvPr>
-            <p:ph type="body" sz="quarter" idx="24"/>
-          </p:nvPr>
-        </p:nvSpPr>
-        <p:spPr/>
-        <p:txBody>
-          <a:bodyPr/>
-          <a:lstStyle/>
-          <a:p>
-            <a:endParaRPr lang="en-US"/>
-          </a:p>
-        </p:txBody>
-      </p:sp>
-      <p:sp>
-        <p:nvSpPr>
-          <p:cNvPr id="9" name="Text Placeholder 8">
-            <a:extLst>
-              <a:ext uri="{FF2B5EF4-FFF2-40B4-BE49-F238E27FC236}">
-                <a16:creationId xmlns:a16="http://schemas.microsoft.com/office/drawing/2014/main" id="{23A516C8-4051-FCDC-70A7-AD084F433B4B}"/>
-              </a:ext>
-            </a:extLst>
-          </p:cNvPr>
-          <p:cNvSpPr>
-            <a:spLocks noGrp="1"/>
-          </p:cNvSpPr>
-          <p:nvPr>
-            <p:ph type="body" sz="quarter" idx="25"/>
-          </p:nvPr>
-        </p:nvSpPr>
-        <p:spPr/>
-        <p:txBody>
-          <a:bodyPr/>
-          <a:lstStyle/>
-          <a:p>
-            <a:endParaRPr lang="en-US"/>
-          </a:p>
-        </p:txBody>
-      </p:sp>
-      <p:sp>
-        <p:nvSpPr>
-          <p:cNvPr id="10" name="Text Placeholder 9">
-            <a:extLst>
-              <a:ext uri="{FF2B5EF4-FFF2-40B4-BE49-F238E27FC236}">
-                <a16:creationId xmlns:a16="http://schemas.microsoft.com/office/drawing/2014/main" id="{4C57AD6A-4AAB-03A3-CCD8-0371E4B4C829}"/>
-              </a:ext>
-            </a:extLst>
-          </p:cNvPr>
-          <p:cNvSpPr>
-            <a:spLocks noGrp="1"/>
-          </p:cNvSpPr>
-          <p:nvPr>
-            <p:ph type="body" sz="quarter" idx="26"/>
-          </p:nvPr>
-        </p:nvSpPr>
-        <p:spPr/>
-        <p:txBody>
-          <a:bodyPr/>
-          <a:lstStyle/>
-          <a:p>
-            <a:endParaRPr lang="en-US"/>
-          </a:p>
-        </p:txBody>
-      </p:sp>
-      <p:sp>
-        <p:nvSpPr>
-          <p:cNvPr id="11" name="Text Placeholder 10">
-            <a:extLst>
-              <a:ext uri="{FF2B5EF4-FFF2-40B4-BE49-F238E27FC236}">
-                <a16:creationId xmlns:a16="http://schemas.microsoft.com/office/drawing/2014/main" id="{9B1A9C7C-4346-68FA-7C54-0A24EACDAA3A}"/>
-              </a:ext>
-            </a:extLst>
-          </p:cNvPr>
-          <p:cNvSpPr>
-            <a:spLocks noGrp="1"/>
-          </p:cNvSpPr>
-          <p:nvPr>
-            <p:ph type="body" sz="quarter" idx="27"/>
-          </p:nvPr>
-        </p:nvSpPr>
-        <p:spPr/>
-        <p:txBody>
-          <a:bodyPr/>
-          <a:lstStyle/>
-          <a:p>
-            <a:endParaRPr lang="en-US"/>
-          </a:p>
-        </p:txBody>
-      </p:sp>
-      <p:sp>
-        <p:nvSpPr>
-          <p:cNvPr id="12" name="Text Placeholder 11">
-            <a:extLst>
-              <a:ext uri="{FF2B5EF4-FFF2-40B4-BE49-F238E27FC236}">
-                <a16:creationId xmlns:a16="http://schemas.microsoft.com/office/drawing/2014/main" id="{CB0B36DE-B5B1-B78C-1FD2-718E537D3CC2}"/>
-              </a:ext>
-            </a:extLst>
-          </p:cNvPr>
-          <p:cNvSpPr>
-            <a:spLocks noGrp="1"/>
-          </p:cNvSpPr>
-          <p:nvPr>
-            <p:ph type="body" sz="quarter" idx="28"/>
-          </p:nvPr>
-        </p:nvSpPr>
-        <p:spPr/>
-        <p:txBody>
-          <a:bodyPr/>
-          <a:lstStyle/>
-          <a:p>
-            <a:endParaRPr lang="en-US"/>
-          </a:p>
-        </p:txBody>
-      </p:sp>
-      <p:sp>
-        <p:nvSpPr>
-          <p:cNvPr id="13" name="Text Placeholder 12">
-            <a:extLst>
-              <a:ext uri="{FF2B5EF4-FFF2-40B4-BE49-F238E27FC236}">
-                <a16:creationId xmlns:a16="http://schemas.microsoft.com/office/drawing/2014/main" id="{072D2111-4993-D8E7-536E-4BA06F003B6C}"/>
-              </a:ext>
-            </a:extLst>
-          </p:cNvPr>
-          <p:cNvSpPr>
-            <a:spLocks noGrp="1"/>
-          </p:cNvSpPr>
-          <p:nvPr>
-            <p:ph type="body" sz="quarter" idx="29"/>
-          </p:nvPr>
-        </p:nvSpPr>
-        <p:spPr/>
-        <p:txBody>
-          <a:bodyPr/>
-          <a:lstStyle/>
-          <a:p>
-            <a:endParaRPr lang="en-US"/>
-          </a:p>
-        </p:txBody>
-      </p:sp>
-      <p:sp>
-        <p:nvSpPr>
-          <p:cNvPr id="14" name="Text Placeholder 13">
-            <a:extLst>
-              <a:ext uri="{FF2B5EF4-FFF2-40B4-BE49-F238E27FC236}">
-                <a16:creationId xmlns:a16="http://schemas.microsoft.com/office/drawing/2014/main" id="{5639DC2B-6228-2E60-71FC-8D09137F7FD9}"/>
-              </a:ext>
-            </a:extLst>
-          </p:cNvPr>
-          <p:cNvSpPr>
-            <a:spLocks noGrp="1"/>
-          </p:cNvSpPr>
-          <p:nvPr>
-            <p:ph type="body" sz="quarter" idx="30"/>
-          </p:nvPr>
-        </p:nvSpPr>
-        <p:spPr/>
-        <p:txBody>
-          <a:bodyPr/>
-          <a:lstStyle/>
-          <a:p>
-            <a:endParaRPr lang="en-US"/>
-          </a:p>
-        </p:txBody>
-      </p:sp>
-      <p:sp>
-        <p:nvSpPr>
-          <p:cNvPr id="15" name="Text Placeholder 14">
-            <a:extLst>
-              <a:ext uri="{FF2B5EF4-FFF2-40B4-BE49-F238E27FC236}">
-                <a16:creationId xmlns:a16="http://schemas.microsoft.com/office/drawing/2014/main" id="{3B712455-FC97-41B4-9793-FF99B9769B12}"/>
-              </a:ext>
-            </a:extLst>
-          </p:cNvPr>
-          <p:cNvSpPr>
-            <a:spLocks noGrp="1"/>
-          </p:cNvSpPr>
-          <p:nvPr>
-            <p:ph type="body" sz="quarter" idx="31"/>
-          </p:nvPr>
-        </p:nvSpPr>
-        <p:spPr/>
-        <p:txBody>
-          <a:bodyPr/>
-          <a:lstStyle/>
-          <a:p>
-            <a:endParaRPr lang="en-US"/>
-          </a:p>
-        </p:txBody>
-      </p:sp>
-      <p:sp>
-        <p:nvSpPr>
-          <p:cNvPr id="16" name="Text Placeholder 15">
-            <a:extLst>
-              <a:ext uri="{FF2B5EF4-FFF2-40B4-BE49-F238E27FC236}">
-                <a16:creationId xmlns:a16="http://schemas.microsoft.com/office/drawing/2014/main" id="{17F76B5C-0F0C-B66A-493B-892C41705C95}"/>
-              </a:ext>
-            </a:extLst>
-          </p:cNvPr>
-          <p:cNvSpPr>
-            <a:spLocks noGrp="1"/>
-          </p:cNvSpPr>
-          <p:nvPr>
-            <p:ph type="body" sz="quarter" idx="32"/>
-          </p:nvPr>
-        </p:nvSpPr>
-        <p:spPr/>
-        <p:txBody>
-          <a:bodyPr/>
-          <a:lstStyle/>
-          <a:p>
-            <a:endParaRPr lang="en-US"/>
-          </a:p>
-        </p:txBody>
-      </p:sp>
-      <p:sp>
-        <p:nvSpPr>
-          <p:cNvPr id="17" name="Text Placeholder 16">
-            <a:extLst>
-              <a:ext uri="{FF2B5EF4-FFF2-40B4-BE49-F238E27FC236}">
-                <a16:creationId xmlns:a16="http://schemas.microsoft.com/office/drawing/2014/main" id="{A5823E96-FCA7-FF9D-701B-7D2882533D39}"/>
-              </a:ext>
-            </a:extLst>
-          </p:cNvPr>
-          <p:cNvSpPr>
-            <a:spLocks noGrp="1"/>
-          </p:cNvSpPr>
-          <p:nvPr>
-            <p:ph type="body" sz="quarter" idx="33"/>
-          </p:nvPr>
-        </p:nvSpPr>
-        <p:spPr/>
-        <p:txBody>
-          <a:bodyPr/>
-          <a:lstStyle/>
-          <a:p>
-            <a:endParaRPr lang="en-US"/>
-          </a:p>
-        </p:txBody>
-      </p:sp>
-    </p:spTree>
-    <p:extLst>
-      <p:ext uri="{BB962C8B-B14F-4D97-AF65-F5344CB8AC3E}">
-        <p14:creationId xmlns:p14="http://schemas.microsoft.com/office/powerpoint/2010/main" val="3481445199"/>
-      </p:ext>
-    </p:extLst>
-  </p:cSld>
-  <p:clrMapOvr>
-    <a:masterClrMapping/>
-  </p:clrMapOvr>
-</p:sld>
-</file>
-
-<file path=ppt/slides/slide6.xml><?xml version="1.0" encoding="utf-8"?>
-<p:sld xmlns:a="http://schemas.openxmlformats.org/drawingml/2006/main" xmlns:r="http://schemas.openxmlformats.org/officeDocument/2006/relationships" xmlns:p="http://schemas.openxmlformats.org/presentationml/2006/main">
-  <p:cSld>
-    <p:spTree>
-      <p:nvGrpSpPr>
-        <p:cNvPr id="1" name=""/>
-        <p:cNvGrpSpPr/>
-        <p:nvPr/>
-      </p:nvGrpSpPr>
-      <p:grpSpPr>
-        <a:xfrm>
-          <a:off x="0" y="0"/>
-          <a:ext cx="0" cy="0"/>
-          <a:chOff x="0" y="0"/>
-          <a:chExt cx="0" cy="0"/>
-        </a:xfrm>
-      </p:grpSpPr>
-      <p:sp>
-        <p:nvSpPr>
-          <p:cNvPr id="2" name="Text Placeholder 1">
-            <a:extLst>
-              <a:ext uri="{FF2B5EF4-FFF2-40B4-BE49-F238E27FC236}">
-                <a16:creationId xmlns:a16="http://schemas.microsoft.com/office/drawing/2014/main" id="{16E95823-F106-CF27-51AF-AC928FC614F9}"/>
-              </a:ext>
-            </a:extLst>
-          </p:cNvPr>
-          <p:cNvSpPr>
-            <a:spLocks noGrp="1"/>
-          </p:cNvSpPr>
-          <p:nvPr>
-            <p:ph type="body" sz="quarter" idx="10"/>
-          </p:nvPr>
-        </p:nvSpPr>
-        <p:spPr/>
-        <p:txBody>
-          <a:bodyPr/>
-          <a:lstStyle/>
-          <a:p>
-            <a:endParaRPr lang="en-US"/>
-          </a:p>
-        </p:txBody>
-      </p:sp>
-      <p:sp>
-        <p:nvSpPr>
-          <p:cNvPr id="3" name="Text Placeholder 2">
-            <a:extLst>
-              <a:ext uri="{FF2B5EF4-FFF2-40B4-BE49-F238E27FC236}">
-                <a16:creationId xmlns:a16="http://schemas.microsoft.com/office/drawing/2014/main" id="{E441EA98-F9C5-B6F1-7D04-E8C32B651411}"/>
-              </a:ext>
-            </a:extLst>
-          </p:cNvPr>
-          <p:cNvSpPr>
-            <a:spLocks noGrp="1"/>
-          </p:cNvSpPr>
-          <p:nvPr>
-            <p:ph type="body" sz="quarter" idx="11"/>
-          </p:nvPr>
-        </p:nvSpPr>
-        <p:spPr/>
-        <p:txBody>
-          <a:bodyPr/>
-          <a:lstStyle/>
-          <a:p>
-            <a:endParaRPr lang="en-US"/>
-          </a:p>
-        </p:txBody>
-      </p:sp>
-      <p:sp>
-        <p:nvSpPr>
-          <p:cNvPr id="4" name="Text Placeholder 3">
-            <a:extLst>
-              <a:ext uri="{FF2B5EF4-FFF2-40B4-BE49-F238E27FC236}">
-                <a16:creationId xmlns:a16="http://schemas.microsoft.com/office/drawing/2014/main" id="{85BA016C-BBAA-A322-EE3A-BA05182B8C62}"/>
-              </a:ext>
-            </a:extLst>
-          </p:cNvPr>
-          <p:cNvSpPr>
-            <a:spLocks noGrp="1"/>
-          </p:cNvSpPr>
-          <p:nvPr>
-            <p:ph type="body" sz="quarter" idx="12"/>
-          </p:nvPr>
-        </p:nvSpPr>
-        <p:spPr/>
-        <p:txBody>
-          <a:bodyPr/>
-          <a:lstStyle/>
-          <a:p>
-            <a:endParaRPr lang="en-US"/>
-          </a:p>
-        </p:txBody>
-      </p:sp>
-      <p:sp>
-        <p:nvSpPr>
-          <p:cNvPr id="5" name="Text Placeholder 4">
-            <a:extLst>
-              <a:ext uri="{FF2B5EF4-FFF2-40B4-BE49-F238E27FC236}">
-                <a16:creationId xmlns:a16="http://schemas.microsoft.com/office/drawing/2014/main" id="{B83D6329-E0D4-A580-EB5F-6258394C19E6}"/>
-              </a:ext>
-            </a:extLst>
-          </p:cNvPr>
-          <p:cNvSpPr>
-            <a:spLocks noGrp="1"/>
-          </p:cNvSpPr>
-          <p:nvPr>
-            <p:ph type="body" sz="quarter" idx="13"/>
-          </p:nvPr>
-        </p:nvSpPr>
-        <p:spPr/>
-        <p:txBody>
-          <a:bodyPr/>
-          <a:lstStyle/>
-          <a:p>
-            <a:endParaRPr lang="en-US"/>
-          </a:p>
-        </p:txBody>
-      </p:sp>
-      <p:sp>
-        <p:nvSpPr>
-          <p:cNvPr id="6" name="Text Placeholder 5">
-            <a:extLst>
-              <a:ext uri="{FF2B5EF4-FFF2-40B4-BE49-F238E27FC236}">
-                <a16:creationId xmlns:a16="http://schemas.microsoft.com/office/drawing/2014/main" id="{08BD1B77-3B10-D8A5-9612-7A30FF83EEE3}"/>
-              </a:ext>
-            </a:extLst>
-          </p:cNvPr>
-          <p:cNvSpPr>
-            <a:spLocks noGrp="1"/>
-          </p:cNvSpPr>
-          <p:nvPr>
-            <p:ph type="body" sz="quarter" idx="14"/>
-          </p:nvPr>
-        </p:nvSpPr>
-        <p:spPr/>
-        <p:txBody>
-          <a:bodyPr/>
-          <a:lstStyle/>
-          <a:p>
-            <a:endParaRPr lang="en-US"/>
-          </a:p>
-        </p:txBody>
-      </p:sp>
-      <p:sp>
-        <p:nvSpPr>
-          <p:cNvPr id="7" name="Text Placeholder 6">
-            <a:extLst>
-              <a:ext uri="{FF2B5EF4-FFF2-40B4-BE49-F238E27FC236}">
-                <a16:creationId xmlns:a16="http://schemas.microsoft.com/office/drawing/2014/main" id="{126FC2E1-A440-1AC6-0C32-5759936A3175}"/>
-              </a:ext>
-            </a:extLst>
-          </p:cNvPr>
-          <p:cNvSpPr>
-            <a:spLocks noGrp="1"/>
-          </p:cNvSpPr>
-          <p:nvPr>
-            <p:ph type="body" sz="quarter" idx="15"/>
-          </p:nvPr>
-        </p:nvSpPr>
-        <p:spPr/>
-        <p:txBody>
-          <a:bodyPr/>
-          <a:lstStyle/>
-          <a:p>
-            <a:endParaRPr lang="en-US"/>
-          </a:p>
-        </p:txBody>
-      </p:sp>
-      <p:sp>
-        <p:nvSpPr>
-          <p:cNvPr id="8" name="Text Placeholder 7">
-            <a:extLst>
-              <a:ext uri="{FF2B5EF4-FFF2-40B4-BE49-F238E27FC236}">
-                <a16:creationId xmlns:a16="http://schemas.microsoft.com/office/drawing/2014/main" id="{E21F704F-9B82-5DF7-CAC4-666D7AEA561D}"/>
-              </a:ext>
-            </a:extLst>
-          </p:cNvPr>
-          <p:cNvSpPr>
-            <a:spLocks noGrp="1"/>
-          </p:cNvSpPr>
-          <p:nvPr>
-            <p:ph type="body" sz="quarter" idx="16"/>
-          </p:nvPr>
-        </p:nvSpPr>
-        <p:spPr/>
-        <p:txBody>
-          <a:bodyPr/>
-          <a:lstStyle/>
-          <a:p>
-            <a:endParaRPr lang="en-US"/>
-          </a:p>
-        </p:txBody>
-      </p:sp>
-      <p:sp>
-        <p:nvSpPr>
-          <p:cNvPr id="9" name="Text Placeholder 8">
-            <a:extLst>
-              <a:ext uri="{FF2B5EF4-FFF2-40B4-BE49-F238E27FC236}">
-                <a16:creationId xmlns:a16="http://schemas.microsoft.com/office/drawing/2014/main" id="{B014BBF7-0F7E-B860-42AB-C0BD111B350B}"/>
-              </a:ext>
-            </a:extLst>
-          </p:cNvPr>
-          <p:cNvSpPr>
-            <a:spLocks noGrp="1"/>
-          </p:cNvSpPr>
-          <p:nvPr>
-            <p:ph type="body" sz="quarter" idx="17"/>
-          </p:nvPr>
-        </p:nvSpPr>
-        <p:spPr/>
-        <p:txBody>
-          <a:bodyPr/>
-          <a:lstStyle/>
-          <a:p>
-            <a:endParaRPr lang="en-US"/>
-          </a:p>
-        </p:txBody>
-      </p:sp>
-      <p:sp>
-        <p:nvSpPr>
-          <p:cNvPr id="10" name="Text Placeholder 9">
-            <a:extLst>
-              <a:ext uri="{FF2B5EF4-FFF2-40B4-BE49-F238E27FC236}">
-                <a16:creationId xmlns:a16="http://schemas.microsoft.com/office/drawing/2014/main" id="{D78C5D06-F67E-70ED-2B0E-97D515C3A40F}"/>
-              </a:ext>
-            </a:extLst>
-          </p:cNvPr>
-          <p:cNvSpPr>
-            <a:spLocks noGrp="1"/>
-          </p:cNvSpPr>
-          <p:nvPr>
-            <p:ph type="body" sz="quarter" idx="18"/>
-          </p:nvPr>
-        </p:nvSpPr>
-        <p:spPr/>
-        <p:txBody>
-          <a:bodyPr/>
-          <a:lstStyle/>
-          <a:p>
-            <a:endParaRPr lang="en-US"/>
-          </a:p>
-        </p:txBody>
-      </p:sp>
-      <p:sp>
-        <p:nvSpPr>
-          <p:cNvPr id="11" name="Text Placeholder 10">
-            <a:extLst>
-              <a:ext uri="{FF2B5EF4-FFF2-40B4-BE49-F238E27FC236}">
-                <a16:creationId xmlns:a16="http://schemas.microsoft.com/office/drawing/2014/main" id="{386D5410-C0BD-D5E1-DADC-0ED19B5284AE}"/>
-              </a:ext>
-            </a:extLst>
-          </p:cNvPr>
-          <p:cNvSpPr>
-            <a:spLocks noGrp="1"/>
-          </p:cNvSpPr>
-          <p:nvPr>
-            <p:ph type="body" sz="quarter" idx="19"/>
-          </p:nvPr>
-        </p:nvSpPr>
-        <p:spPr/>
-        <p:txBody>
-          <a:bodyPr/>
-          <a:lstStyle/>
-          <a:p>
-            <a:endParaRPr lang="en-US"/>
-          </a:p>
-        </p:txBody>
-      </p:sp>
-      <p:sp>
-        <p:nvSpPr>
-          <p:cNvPr id="12" name="Text Placeholder 11">
-            <a:extLst>
-              <a:ext uri="{FF2B5EF4-FFF2-40B4-BE49-F238E27FC236}">
-                <a16:creationId xmlns:a16="http://schemas.microsoft.com/office/drawing/2014/main" id="{383B1882-F535-AB15-0A2A-D2A0B7EFF906}"/>
-              </a:ext>
-            </a:extLst>
-          </p:cNvPr>
-          <p:cNvSpPr>
-            <a:spLocks noGrp="1"/>
-          </p:cNvSpPr>
-          <p:nvPr>
-            <p:ph type="body" sz="quarter" idx="20"/>
-          </p:nvPr>
-        </p:nvSpPr>
-        <p:spPr/>
-        <p:txBody>
-          <a:bodyPr/>
-          <a:lstStyle/>
-          <a:p>
-            <a:endParaRPr lang="en-US"/>
-          </a:p>
-        </p:txBody>
-      </p:sp>
-      <p:sp>
-        <p:nvSpPr>
-          <p:cNvPr id="13" name="Text Placeholder 12">
-            <a:extLst>
-              <a:ext uri="{FF2B5EF4-FFF2-40B4-BE49-F238E27FC236}">
-                <a16:creationId xmlns:a16="http://schemas.microsoft.com/office/drawing/2014/main" id="{BB0069B8-BBBE-0D40-DD03-8CBE7A2A6348}"/>
-              </a:ext>
-            </a:extLst>
-          </p:cNvPr>
-          <p:cNvSpPr>
-            <a:spLocks noGrp="1"/>
-          </p:cNvSpPr>
-          <p:nvPr>
-            <p:ph type="body" sz="quarter" idx="21"/>
-          </p:nvPr>
-        </p:nvSpPr>
-        <p:spPr/>
-        <p:txBody>
-          <a:bodyPr/>
-          <a:lstStyle/>
-          <a:p>
-            <a:endParaRPr lang="en-US"/>
-          </a:p>
-        </p:txBody>
-      </p:sp>
-      <p:sp>
-        <p:nvSpPr>
-          <p:cNvPr id="14" name="Text Placeholder 13">
-            <a:extLst>
-              <a:ext uri="{FF2B5EF4-FFF2-40B4-BE49-F238E27FC236}">
-                <a16:creationId xmlns:a16="http://schemas.microsoft.com/office/drawing/2014/main" id="{0167EFDC-0FC0-F7EC-C35B-B262BAAA670A}"/>
-              </a:ext>
-            </a:extLst>
-          </p:cNvPr>
-          <p:cNvSpPr>
-            <a:spLocks noGrp="1"/>
-          </p:cNvSpPr>
-          <p:nvPr>
-            <p:ph type="body" sz="quarter" idx="22"/>
-          </p:nvPr>
-        </p:nvSpPr>
-        <p:spPr/>
-        <p:txBody>
-          <a:bodyPr/>
-          <a:lstStyle/>
-          <a:p>
-            <a:endParaRPr lang="en-US"/>
-          </a:p>
-        </p:txBody>
-      </p:sp>
-      <p:sp>
-        <p:nvSpPr>
-          <p:cNvPr id="15" name="Text Placeholder 14">
-            <a:extLst>
-              <a:ext uri="{FF2B5EF4-FFF2-40B4-BE49-F238E27FC236}">
-                <a16:creationId xmlns:a16="http://schemas.microsoft.com/office/drawing/2014/main" id="{B9919A43-49FE-E9EA-EADB-FC61AB7F6791}"/>
-              </a:ext>
-            </a:extLst>
-          </p:cNvPr>
-          <p:cNvSpPr>
-            <a:spLocks noGrp="1"/>
-          </p:cNvSpPr>
-          <p:nvPr>
-            <p:ph type="body" sz="quarter" idx="23"/>
-          </p:nvPr>
-        </p:nvSpPr>
-        <p:spPr/>
-        <p:txBody>
-          <a:bodyPr/>
-          <a:lstStyle/>
-          <a:p>
-            <a:endParaRPr lang="en-US"/>
-          </a:p>
-        </p:txBody>
-      </p:sp>
-      <p:sp>
-        <p:nvSpPr>
-          <p:cNvPr id="16" name="Text Placeholder 15">
-            <a:extLst>
-              <a:ext uri="{FF2B5EF4-FFF2-40B4-BE49-F238E27FC236}">
-                <a16:creationId xmlns:a16="http://schemas.microsoft.com/office/drawing/2014/main" id="{2BF26F6A-2783-D37A-48DB-173B3F2048EF}"/>
-              </a:ext>
-            </a:extLst>
-          </p:cNvPr>
-          <p:cNvSpPr>
-            <a:spLocks noGrp="1"/>
-          </p:cNvSpPr>
-          <p:nvPr>
-            <p:ph type="body" sz="quarter" idx="24"/>
-          </p:nvPr>
-        </p:nvSpPr>
-        <p:spPr/>
-        <p:txBody>
-          <a:bodyPr/>
-          <a:lstStyle/>
-          <a:p>
-            <a:endParaRPr lang="en-US"/>
-          </a:p>
-        </p:txBody>
-      </p:sp>
-      <p:sp>
-        <p:nvSpPr>
-          <p:cNvPr id="17" name="Text Placeholder 16">
-            <a:extLst>
-              <a:ext uri="{FF2B5EF4-FFF2-40B4-BE49-F238E27FC236}">
-                <a16:creationId xmlns:a16="http://schemas.microsoft.com/office/drawing/2014/main" id="{1C67E552-016D-7151-598F-B1B42F43E914}"/>
-              </a:ext>
-            </a:extLst>
-          </p:cNvPr>
-          <p:cNvSpPr>
-            <a:spLocks noGrp="1"/>
-          </p:cNvSpPr>
-          <p:nvPr>
-            <p:ph type="body" sz="quarter" idx="25"/>
-          </p:nvPr>
-        </p:nvSpPr>
-        <p:spPr/>
-        <p:txBody>
-          <a:bodyPr/>
-          <a:lstStyle/>
-          <a:p>
-            <a:endParaRPr lang="en-US"/>
-          </a:p>
-        </p:txBody>
-      </p:sp>
-      <p:sp>
-        <p:nvSpPr>
-          <p:cNvPr id="18" name="Text Placeholder 17">
-            <a:extLst>
-              <a:ext uri="{FF2B5EF4-FFF2-40B4-BE49-F238E27FC236}">
-                <a16:creationId xmlns:a16="http://schemas.microsoft.com/office/drawing/2014/main" id="{5EA7BBAE-489F-3F81-6572-CF35DACF15A6}"/>
-              </a:ext>
-            </a:extLst>
-          </p:cNvPr>
-          <p:cNvSpPr>
-            <a:spLocks noGrp="1"/>
-          </p:cNvSpPr>
-          <p:nvPr>
-            <p:ph type="body" sz="quarter" idx="26"/>
-          </p:nvPr>
-        </p:nvSpPr>
-        <p:spPr/>
-        <p:txBody>
-          <a:bodyPr/>
-          <a:lstStyle/>
-          <a:p>
-            <a:endParaRPr lang="en-US"/>
-          </a:p>
-        </p:txBody>
-      </p:sp>
-      <p:sp>
-        <p:nvSpPr>
-          <p:cNvPr id="19" name="Text Placeholder 18">
-            <a:extLst>
-              <a:ext uri="{FF2B5EF4-FFF2-40B4-BE49-F238E27FC236}">
-                <a16:creationId xmlns:a16="http://schemas.microsoft.com/office/drawing/2014/main" id="{CF99FEFF-79F3-0896-EB8E-F9F9716FD8BE}"/>
-              </a:ext>
-            </a:extLst>
-          </p:cNvPr>
-          <p:cNvSpPr>
-            <a:spLocks noGrp="1"/>
-          </p:cNvSpPr>
-          <p:nvPr>
-            <p:ph type="body" sz="quarter" idx="27"/>
-          </p:nvPr>
-        </p:nvSpPr>
-        <p:spPr/>
-        <p:txBody>
-          <a:bodyPr/>
-          <a:lstStyle/>
-          <a:p>
-            <a:endParaRPr lang="en-US"/>
-          </a:p>
-        </p:txBody>
-      </p:sp>
-      <p:sp>
-        <p:nvSpPr>
-          <p:cNvPr id="20" name="Text Placeholder 19">
-            <a:extLst>
-              <a:ext uri="{FF2B5EF4-FFF2-40B4-BE49-F238E27FC236}">
-                <a16:creationId xmlns:a16="http://schemas.microsoft.com/office/drawing/2014/main" id="{8F0A50F4-BF64-1913-3752-83E7BA585267}"/>
-              </a:ext>
-            </a:extLst>
-          </p:cNvPr>
-          <p:cNvSpPr>
-            <a:spLocks noGrp="1"/>
-          </p:cNvSpPr>
-          <p:nvPr>
-            <p:ph type="body" sz="quarter" idx="28"/>
-          </p:nvPr>
-        </p:nvSpPr>
-        <p:spPr/>
-        <p:txBody>
-          <a:bodyPr/>
-          <a:lstStyle/>
-          <a:p>
-            <a:endParaRPr lang="en-US"/>
-          </a:p>
-        </p:txBody>
-      </p:sp>
-      <p:sp>
-        <p:nvSpPr>
-          <p:cNvPr id="21" name="Text Placeholder 20">
-            <a:extLst>
-              <a:ext uri="{FF2B5EF4-FFF2-40B4-BE49-F238E27FC236}">
-                <a16:creationId xmlns:a16="http://schemas.microsoft.com/office/drawing/2014/main" id="{22950F20-6D3C-3DEA-5719-C1D3643CC98A}"/>
-              </a:ext>
-            </a:extLst>
-          </p:cNvPr>
-          <p:cNvSpPr>
-            <a:spLocks noGrp="1"/>
-          </p:cNvSpPr>
-          <p:nvPr>
-            <p:ph type="body" sz="quarter" idx="29"/>
-          </p:nvPr>
-        </p:nvSpPr>
-        <p:spPr/>
-        <p:txBody>
-          <a:bodyPr/>
-          <a:lstStyle/>
-          <a:p>
-            <a:endParaRPr lang="en-US"/>
-          </a:p>
-        </p:txBody>
-      </p:sp>
-      <p:sp>
-        <p:nvSpPr>
-          <p:cNvPr id="22" name="Text Placeholder 21">
-            <a:extLst>
-              <a:ext uri="{FF2B5EF4-FFF2-40B4-BE49-F238E27FC236}">
-                <a16:creationId xmlns:a16="http://schemas.microsoft.com/office/drawing/2014/main" id="{78068358-29A2-F586-CD1D-7677C6D6E7F7}"/>
-              </a:ext>
-            </a:extLst>
-          </p:cNvPr>
-          <p:cNvSpPr>
-            <a:spLocks noGrp="1"/>
-          </p:cNvSpPr>
-          <p:nvPr>
-            <p:ph type="body" sz="quarter" idx="30"/>
-          </p:nvPr>
-        </p:nvSpPr>
-        <p:spPr/>
-        <p:txBody>
-          <a:bodyPr/>
-          <a:lstStyle/>
-          <a:p>
-            <a:endParaRPr lang="en-US"/>
-          </a:p>
-        </p:txBody>
-      </p:sp>
-      <p:sp>
-        <p:nvSpPr>
-          <p:cNvPr id="23" name="Text Placeholder 22">
-            <a:extLst>
-              <a:ext uri="{FF2B5EF4-FFF2-40B4-BE49-F238E27FC236}">
-                <a16:creationId xmlns:a16="http://schemas.microsoft.com/office/drawing/2014/main" id="{3158D57D-E667-2E07-A2FD-7D245C3C9591}"/>
-              </a:ext>
-            </a:extLst>
-          </p:cNvPr>
-          <p:cNvSpPr>
-            <a:spLocks noGrp="1"/>
-          </p:cNvSpPr>
-          <p:nvPr>
-            <p:ph type="body" sz="quarter" idx="31"/>
-          </p:nvPr>
-        </p:nvSpPr>
-        <p:spPr/>
-        <p:txBody>
-          <a:bodyPr/>
-          <a:lstStyle/>
-          <a:p>
-            <a:endParaRPr lang="en-US"/>
-          </a:p>
-        </p:txBody>
-      </p:sp>
-      <p:sp>
-        <p:nvSpPr>
-          <p:cNvPr id="24" name="Text Placeholder 23">
-            <a:extLst>
-              <a:ext uri="{FF2B5EF4-FFF2-40B4-BE49-F238E27FC236}">
-                <a16:creationId xmlns:a16="http://schemas.microsoft.com/office/drawing/2014/main" id="{9848CC2A-865A-E484-4C0A-7859C4E9AFF7}"/>
-              </a:ext>
-            </a:extLst>
-          </p:cNvPr>
-          <p:cNvSpPr>
-            <a:spLocks noGrp="1"/>
-          </p:cNvSpPr>
-          <p:nvPr>
-            <p:ph type="body" sz="quarter" idx="32"/>
-          </p:nvPr>
-        </p:nvSpPr>
-        <p:spPr/>
-        <p:txBody>
-          <a:bodyPr/>
-          <a:lstStyle/>
-          <a:p>
-            <a:endParaRPr lang="en-US"/>
-          </a:p>
-        </p:txBody>
-      </p:sp>
-      <p:sp>
-        <p:nvSpPr>
-          <p:cNvPr id="25" name="Text Placeholder 24">
-            <a:extLst>
-              <a:ext uri="{FF2B5EF4-FFF2-40B4-BE49-F238E27FC236}">
-                <a16:creationId xmlns:a16="http://schemas.microsoft.com/office/drawing/2014/main" id="{082F481B-7A72-0FEA-DA20-21255E92AFFB}"/>
-              </a:ext>
-            </a:extLst>
-          </p:cNvPr>
-          <p:cNvSpPr>
-            <a:spLocks noGrp="1"/>
-          </p:cNvSpPr>
-          <p:nvPr>
-            <p:ph type="body" sz="quarter" idx="33"/>
-          </p:nvPr>
-        </p:nvSpPr>
-        <p:spPr/>
-        <p:txBody>
-          <a:bodyPr/>
-          <a:lstStyle/>
-          <a:p>
-            <a:endParaRPr lang="en-US"/>
-          </a:p>
-        </p:txBody>
-      </p:sp>
-    </p:spTree>
-    <p:extLst>
-      <p:ext uri="{BB962C8B-B14F-4D97-AF65-F5344CB8AC3E}">
-        <p14:creationId xmlns:p14="http://schemas.microsoft.com/office/powerpoint/2010/main" val="2711003818"/>
-      </p:ext>
-    </p:extLst>
-  </p:cSld>
-  <p:clrMapOvr>
-    <a:masterClrMapping/>
-  </p:clrMapOvr>
-</p:sld>
-</file>
-
-<file path=ppt/slides/slide7.xml><?xml version="1.0" encoding="utf-8"?>
-<p:sld xmlns:a="http://schemas.openxmlformats.org/drawingml/2006/main" xmlns:r="http://schemas.openxmlformats.org/officeDocument/2006/relationships" xmlns:p="http://schemas.openxmlformats.org/presentationml/2006/main">
-  <p:cSld>
-    <p:spTree>
-      <p:nvGrpSpPr>
-        <p:cNvPr id="1" name=""/>
-        <p:cNvGrpSpPr/>
-        <p:nvPr/>
-      </p:nvGrpSpPr>
-      <p:grpSpPr>
-        <a:xfrm>
-          <a:off x="0" y="0"/>
-          <a:ext cx="0" cy="0"/>
-          <a:chOff x="0" y="0"/>
-          <a:chExt cx="0" cy="0"/>
-        </a:xfrm>
-      </p:grpSpPr>
-      <p:sp>
-        <p:nvSpPr>
-          <p:cNvPr id="2" name="Text Placeholder 1">
-            <a:extLst>
-              <a:ext uri="{FF2B5EF4-FFF2-40B4-BE49-F238E27FC236}">
-                <a16:creationId xmlns:a16="http://schemas.microsoft.com/office/drawing/2014/main" id="{F6B0E0AA-FA10-9711-A328-894B8B0C7F1C}"/>
-              </a:ext>
-            </a:extLst>
-          </p:cNvPr>
-          <p:cNvSpPr>
-            <a:spLocks noGrp="1"/>
-          </p:cNvSpPr>
-          <p:nvPr>
-            <p:ph type="body" sz="quarter" idx="11"/>
-          </p:nvPr>
-        </p:nvSpPr>
-        <p:spPr/>
-        <p:txBody>
-          <a:bodyPr/>
-          <a:lstStyle/>
-          <a:p>
-            <a:endParaRPr lang="en-US"/>
-          </a:p>
-        </p:txBody>
-      </p:sp>
-      <p:sp>
-        <p:nvSpPr>
-          <p:cNvPr id="3" name="Text Placeholder 2">
-            <a:extLst>
-              <a:ext uri="{FF2B5EF4-FFF2-40B4-BE49-F238E27FC236}">
-                <a16:creationId xmlns:a16="http://schemas.microsoft.com/office/drawing/2014/main" id="{8A166953-32EE-A6B7-49AA-DED12499A2C0}"/>
-              </a:ext>
-            </a:extLst>
-          </p:cNvPr>
-          <p:cNvSpPr>
-            <a:spLocks noGrp="1"/>
-          </p:cNvSpPr>
-          <p:nvPr>
-            <p:ph type="body" sz="quarter" idx="13"/>
-          </p:nvPr>
-        </p:nvSpPr>
-        <p:spPr/>
-        <p:txBody>
-          <a:bodyPr/>
-          <a:lstStyle/>
-          <a:p>
-            <a:endParaRPr lang="en-US"/>
-          </a:p>
-        </p:txBody>
-      </p:sp>
-      <p:sp>
-        <p:nvSpPr>
-          <p:cNvPr id="4" name="Text Placeholder 3">
-            <a:extLst>
-              <a:ext uri="{FF2B5EF4-FFF2-40B4-BE49-F238E27FC236}">
-                <a16:creationId xmlns:a16="http://schemas.microsoft.com/office/drawing/2014/main" id="{0D683C31-869B-A28D-E43A-FFEC27B56BD2}"/>
-              </a:ext>
-            </a:extLst>
-          </p:cNvPr>
-          <p:cNvSpPr>
-            <a:spLocks noGrp="1"/>
-          </p:cNvSpPr>
-          <p:nvPr>
-            <p:ph type="body" sz="quarter" idx="33"/>
-          </p:nvPr>
-        </p:nvSpPr>
-        <p:spPr/>
-        <p:txBody>
-          <a:bodyPr/>
-          <a:lstStyle/>
-          <a:p>
-            <a:endParaRPr lang="en-US"/>
-          </a:p>
-        </p:txBody>
-      </p:sp>
-      <p:sp>
-        <p:nvSpPr>
-          <p:cNvPr id="5" name="Text Placeholder 4">
-            <a:extLst>
-              <a:ext uri="{FF2B5EF4-FFF2-40B4-BE49-F238E27FC236}">
-                <a16:creationId xmlns:a16="http://schemas.microsoft.com/office/drawing/2014/main" id="{A26A06C8-758E-92FE-D2A2-5F71AFC10B12}"/>
-              </a:ext>
-            </a:extLst>
-          </p:cNvPr>
-          <p:cNvSpPr>
-            <a:spLocks noGrp="1"/>
-          </p:cNvSpPr>
-          <p:nvPr>
-            <p:ph type="body" sz="quarter" idx="44"/>
-          </p:nvPr>
-        </p:nvSpPr>
-        <p:spPr/>
-        <p:txBody>
-          <a:bodyPr/>
-          <a:lstStyle/>
-          <a:p>
-            <a:endParaRPr lang="en-US"/>
-          </a:p>
-        </p:txBody>
-      </p:sp>
-      <p:sp>
-        <p:nvSpPr>
-          <p:cNvPr id="6" name="Text Placeholder 5">
-            <a:extLst>
-              <a:ext uri="{FF2B5EF4-FFF2-40B4-BE49-F238E27FC236}">
-                <a16:creationId xmlns:a16="http://schemas.microsoft.com/office/drawing/2014/main" id="{832DE97D-7BE0-0808-7791-5095D17A454E}"/>
-              </a:ext>
-            </a:extLst>
-          </p:cNvPr>
-          <p:cNvSpPr>
-            <a:spLocks noGrp="1"/>
-          </p:cNvSpPr>
-          <p:nvPr>
-            <p:ph type="body" sz="quarter" idx="46"/>
-          </p:nvPr>
-        </p:nvSpPr>
-        <p:spPr/>
-        <p:txBody>
-          <a:bodyPr/>
-          <a:lstStyle/>
-          <a:p>
-            <a:endParaRPr lang="en-US"/>
-          </a:p>
-        </p:txBody>
-      </p:sp>
-      <p:sp>
-        <p:nvSpPr>
-          <p:cNvPr id="7" name="Text Placeholder 6">
-            <a:extLst>
-              <a:ext uri="{FF2B5EF4-FFF2-40B4-BE49-F238E27FC236}">
-                <a16:creationId xmlns:a16="http://schemas.microsoft.com/office/drawing/2014/main" id="{24888E63-7324-3C4A-B5BC-FE8A960C85AC}"/>
-              </a:ext>
-            </a:extLst>
-          </p:cNvPr>
-          <p:cNvSpPr>
-            <a:spLocks noGrp="1"/>
-          </p:cNvSpPr>
-          <p:nvPr>
-            <p:ph type="body" sz="quarter" idx="48"/>
-          </p:nvPr>
-        </p:nvSpPr>
-        <p:spPr/>
-        <p:txBody>
-          <a:bodyPr/>
-          <a:lstStyle/>
-          <a:p>
-            <a:endParaRPr lang="en-US"/>
-          </a:p>
-        </p:txBody>
-      </p:sp>
-      <p:sp>
-        <p:nvSpPr>
-          <p:cNvPr id="8" name="Text Placeholder 7">
-            <a:extLst>
-              <a:ext uri="{FF2B5EF4-FFF2-40B4-BE49-F238E27FC236}">
-                <a16:creationId xmlns:a16="http://schemas.microsoft.com/office/drawing/2014/main" id="{9F9CB6C9-6744-6ED7-7D55-9E8D5E7A72CB}"/>
-              </a:ext>
-            </a:extLst>
-          </p:cNvPr>
-          <p:cNvSpPr>
-            <a:spLocks noGrp="1"/>
-          </p:cNvSpPr>
-          <p:nvPr>
-            <p:ph type="body" sz="quarter" idx="50"/>
-          </p:nvPr>
-        </p:nvSpPr>
-        <p:spPr/>
-        <p:txBody>
-          <a:bodyPr/>
-          <a:lstStyle/>
-          <a:p>
-            <a:endParaRPr lang="en-US"/>
-          </a:p>
-        </p:txBody>
-      </p:sp>
-      <p:sp>
-        <p:nvSpPr>
-          <p:cNvPr id="9" name="Text Placeholder 8">
-            <a:extLst>
-              <a:ext uri="{FF2B5EF4-FFF2-40B4-BE49-F238E27FC236}">
-                <a16:creationId xmlns:a16="http://schemas.microsoft.com/office/drawing/2014/main" id="{EC5A1DDB-3250-DE73-FA7E-F40B4377DA83}"/>
-              </a:ext>
-            </a:extLst>
-          </p:cNvPr>
-          <p:cNvSpPr>
-            <a:spLocks noGrp="1"/>
-          </p:cNvSpPr>
-          <p:nvPr>
-            <p:ph type="body" sz="quarter" idx="52"/>
-          </p:nvPr>
-        </p:nvSpPr>
-        <p:spPr/>
-        <p:txBody>
-          <a:bodyPr/>
-          <a:lstStyle/>
-          <a:p>
-            <a:endParaRPr lang="en-US"/>
-          </a:p>
-        </p:txBody>
-      </p:sp>
-      <p:sp>
-        <p:nvSpPr>
-          <p:cNvPr id="10" name="Text Placeholder 9">
-            <a:extLst>
-              <a:ext uri="{FF2B5EF4-FFF2-40B4-BE49-F238E27FC236}">
-                <a16:creationId xmlns:a16="http://schemas.microsoft.com/office/drawing/2014/main" id="{A4A9187F-5187-4D69-D57F-0E01D97898E4}"/>
-              </a:ext>
-            </a:extLst>
-          </p:cNvPr>
-          <p:cNvSpPr>
-            <a:spLocks noGrp="1"/>
-          </p:cNvSpPr>
-          <p:nvPr>
-            <p:ph type="body" sz="quarter" idx="54"/>
-          </p:nvPr>
-        </p:nvSpPr>
-        <p:spPr/>
-        <p:txBody>
-          <a:bodyPr/>
-          <a:lstStyle/>
-          <a:p>
-            <a:endParaRPr lang="en-US"/>
-          </a:p>
-        </p:txBody>
-      </p:sp>
-      <p:sp>
-        <p:nvSpPr>
-          <p:cNvPr id="11" name="Text Placeholder 10">
-            <a:extLst>
-              <a:ext uri="{FF2B5EF4-FFF2-40B4-BE49-F238E27FC236}">
-                <a16:creationId xmlns:a16="http://schemas.microsoft.com/office/drawing/2014/main" id="{F123D7B5-0F05-84FD-18EB-33DC59E94450}"/>
-              </a:ext>
-            </a:extLst>
-          </p:cNvPr>
-          <p:cNvSpPr>
-            <a:spLocks noGrp="1"/>
-          </p:cNvSpPr>
-          <p:nvPr>
-            <p:ph type="body" sz="quarter" idx="55"/>
-          </p:nvPr>
-        </p:nvSpPr>
-        <p:spPr/>
-        <p:txBody>
-          <a:bodyPr/>
-          <a:lstStyle/>
-          <a:p>
-            <a:endParaRPr lang="en-US"/>
-          </a:p>
-        </p:txBody>
-      </p:sp>
-      <p:sp>
-        <p:nvSpPr>
-          <p:cNvPr id="12" name="Text Placeholder 11">
-            <a:extLst>
-              <a:ext uri="{FF2B5EF4-FFF2-40B4-BE49-F238E27FC236}">
-                <a16:creationId xmlns:a16="http://schemas.microsoft.com/office/drawing/2014/main" id="{3F53A76A-A367-BE6B-BC02-BDBA7927CB49}"/>
-              </a:ext>
-            </a:extLst>
-          </p:cNvPr>
-          <p:cNvSpPr>
-            <a:spLocks noGrp="1"/>
-          </p:cNvSpPr>
-          <p:nvPr>
-            <p:ph type="body" sz="quarter" idx="56"/>
-          </p:nvPr>
-        </p:nvSpPr>
-        <p:spPr/>
-        <p:txBody>
-          <a:bodyPr/>
-          <a:lstStyle/>
-          <a:p>
-            <a:endParaRPr lang="en-US"/>
-          </a:p>
-        </p:txBody>
-      </p:sp>
-      <p:sp>
-        <p:nvSpPr>
-          <p:cNvPr id="13" name="Text Placeholder 12">
-            <a:extLst>
-              <a:ext uri="{FF2B5EF4-FFF2-40B4-BE49-F238E27FC236}">
-                <a16:creationId xmlns:a16="http://schemas.microsoft.com/office/drawing/2014/main" id="{17A1693A-59B6-6BFC-6640-251FF7930C15}"/>
-              </a:ext>
-            </a:extLst>
-          </p:cNvPr>
-          <p:cNvSpPr>
-            <a:spLocks noGrp="1"/>
-          </p:cNvSpPr>
-          <p:nvPr>
-            <p:ph type="body" sz="quarter" idx="57"/>
-          </p:nvPr>
-        </p:nvSpPr>
-        <p:spPr/>
-        <p:txBody>
-          <a:bodyPr/>
-          <a:lstStyle/>
-          <a:p>
-            <a:endParaRPr lang="en-US"/>
-          </a:p>
-        </p:txBody>
-      </p:sp>
-      <p:sp>
-        <p:nvSpPr>
-          <p:cNvPr id="14" name="Text Placeholder 13">
-            <a:extLst>
-              <a:ext uri="{FF2B5EF4-FFF2-40B4-BE49-F238E27FC236}">
-                <a16:creationId xmlns:a16="http://schemas.microsoft.com/office/drawing/2014/main" id="{4DC6B26A-A57C-050B-A1FC-2C5A780EC0A1}"/>
-              </a:ext>
-            </a:extLst>
-          </p:cNvPr>
-          <p:cNvSpPr>
-            <a:spLocks noGrp="1"/>
-          </p:cNvSpPr>
-          <p:nvPr>
-            <p:ph type="body" sz="quarter" idx="58"/>
-          </p:nvPr>
-        </p:nvSpPr>
-        <p:spPr/>
-        <p:txBody>
-          <a:bodyPr/>
-          <a:lstStyle/>
-          <a:p>
-            <a:endParaRPr lang="en-US"/>
-          </a:p>
-        </p:txBody>
-      </p:sp>
-      <p:sp>
-        <p:nvSpPr>
-          <p:cNvPr id="15" name="Picture Placeholder 14">
-            <a:extLst>
-              <a:ext uri="{FF2B5EF4-FFF2-40B4-BE49-F238E27FC236}">
-                <a16:creationId xmlns:a16="http://schemas.microsoft.com/office/drawing/2014/main" id="{8CEDA992-4FCB-5B45-A11F-DF9F20799A3E}"/>
-              </a:ext>
-            </a:extLst>
-          </p:cNvPr>
-          <p:cNvSpPr>
-            <a:spLocks noGrp="1"/>
-          </p:cNvSpPr>
-          <p:nvPr>
-            <p:ph type="pic" sz="quarter" idx="59"/>
-          </p:nvPr>
-        </p:nvSpPr>
-        <p:spPr/>
-        <p:txBody>
-          <a:bodyPr/>
-          <a:lstStyle/>
-          <a:p>
-            <a:endParaRPr lang="en-US"/>
-          </a:p>
-        </p:txBody>
-      </p:sp>
-    </p:spTree>
-    <p:extLst>
-      <p:ext uri="{BB962C8B-B14F-4D97-AF65-F5344CB8AC3E}">
-        <p14:creationId xmlns:p14="http://schemas.microsoft.com/office/powerpoint/2010/main" val="895194645"/>
-      </p:ext>
-    </p:extLst>
-  </p:cSld>
-  <p:clrMapOvr>
-    <a:masterClrMapping/>
-  </p:clrMapOvr>
-</p:sld>
-</file>
-
-<file path=ppt/slides/slide8.xml><?xml version="1.0" encoding="utf-8"?>
-<p:sld xmlns:a="http://schemas.openxmlformats.org/drawingml/2006/main" xmlns:r="http://schemas.openxmlformats.org/officeDocument/2006/relationships" xmlns:p="http://schemas.openxmlformats.org/presentationml/2006/main">
-  <p:cSld>
-    <p:spTree>
-      <p:nvGrpSpPr>
-        <p:cNvPr id="1" name=""/>
-        <p:cNvGrpSpPr/>
-        <p:nvPr/>
-      </p:nvGrpSpPr>
-      <p:grpSpPr>
-        <a:xfrm>
-          <a:off x="0" y="0"/>
-          <a:ext cx="0" cy="0"/>
-          <a:chOff x="0" y="0"/>
-          <a:chExt cx="0" cy="0"/>
-        </a:xfrm>
-      </p:grpSpPr>
-      <p:sp>
-        <p:nvSpPr>
-          <p:cNvPr id="2" name="Online Image Placeholder 1">
-            <a:extLst>
-              <a:ext uri="{FF2B5EF4-FFF2-40B4-BE49-F238E27FC236}">
-                <a16:creationId xmlns:a16="http://schemas.microsoft.com/office/drawing/2014/main" id="{4F44D660-3644-C334-C2F3-99554D2C9DE5}"/>
-              </a:ext>
-            </a:extLst>
-          </p:cNvPr>
-          <p:cNvSpPr>
-            <a:spLocks noGrp="1"/>
-          </p:cNvSpPr>
-          <p:nvPr>
-            <p:ph type="clipArt" sz="quarter" idx="22"/>
-          </p:nvPr>
-        </p:nvSpPr>
-        <p:spPr/>
-        <p:txBody>
-          <a:bodyPr/>
-          <a:lstStyle/>
-          <a:p>
-            <a:endParaRPr lang="en-US"/>
-          </a:p>
-        </p:txBody>
-      </p:sp>
-      <p:sp>
-        <p:nvSpPr>
-          <p:cNvPr id="3" name="Text Placeholder 2">
-            <a:extLst>
-              <a:ext uri="{FF2B5EF4-FFF2-40B4-BE49-F238E27FC236}">
-                <a16:creationId xmlns:a16="http://schemas.microsoft.com/office/drawing/2014/main" id="{38A61110-5D29-A7E7-B7C2-39B50CEFCADB}"/>
-              </a:ext>
-            </a:extLst>
-          </p:cNvPr>
-          <p:cNvSpPr>
-            <a:spLocks noGrp="1"/>
-          </p:cNvSpPr>
-          <p:nvPr>
-            <p:ph type="body" sz="quarter" idx="26"/>
-          </p:nvPr>
-        </p:nvSpPr>
-        <p:spPr/>
-        <p:txBody>
-          <a:bodyPr/>
-          <a:lstStyle/>
-          <a:p>
-            <a:endParaRPr lang="en-US"/>
-          </a:p>
-        </p:txBody>
-      </p:sp>
-      <p:sp>
-        <p:nvSpPr>
-          <p:cNvPr id="4" name="Text Placeholder 3">
-            <a:extLst>
-              <a:ext uri="{FF2B5EF4-FFF2-40B4-BE49-F238E27FC236}">
-                <a16:creationId xmlns:a16="http://schemas.microsoft.com/office/drawing/2014/main" id="{CB2E0DBF-1B00-17B0-14FB-A3FCC9D48E50}"/>
-              </a:ext>
-            </a:extLst>
-          </p:cNvPr>
-          <p:cNvSpPr>
-            <a:spLocks noGrp="1"/>
-          </p:cNvSpPr>
-          <p:nvPr>
-            <p:ph type="body" sz="quarter" idx="29"/>
-          </p:nvPr>
-        </p:nvSpPr>
-        <p:spPr/>
-        <p:txBody>
-          <a:bodyPr/>
-          <a:lstStyle/>
-          <a:p>
-            <a:endParaRPr lang="en-US"/>
-          </a:p>
-        </p:txBody>
-      </p:sp>
-      <p:sp>
-        <p:nvSpPr>
-          <p:cNvPr id="5" name="Text Placeholder 4">
-            <a:extLst>
-              <a:ext uri="{FF2B5EF4-FFF2-40B4-BE49-F238E27FC236}">
-                <a16:creationId xmlns:a16="http://schemas.microsoft.com/office/drawing/2014/main" id="{435E94CC-811E-FC4F-F8ED-8492DB857C9F}"/>
-              </a:ext>
-            </a:extLst>
-          </p:cNvPr>
-          <p:cNvSpPr>
-            <a:spLocks noGrp="1"/>
-          </p:cNvSpPr>
-          <p:nvPr>
-            <p:ph type="body" sz="quarter" idx="30"/>
-          </p:nvPr>
-        </p:nvSpPr>
-        <p:spPr/>
-        <p:txBody>
-          <a:bodyPr/>
-          <a:lstStyle/>
-          <a:p>
-            <a:endParaRPr lang="en-US"/>
-          </a:p>
-        </p:txBody>
-      </p:sp>
-      <p:sp>
-        <p:nvSpPr>
-          <p:cNvPr id="6" name="Online Image Placeholder 5">
-            <a:extLst>
-              <a:ext uri="{FF2B5EF4-FFF2-40B4-BE49-F238E27FC236}">
-                <a16:creationId xmlns:a16="http://schemas.microsoft.com/office/drawing/2014/main" id="{EE51DACA-3EE3-F04B-91B3-7E78F3FFFDF6}"/>
-              </a:ext>
-            </a:extLst>
-          </p:cNvPr>
-          <p:cNvSpPr>
-            <a:spLocks noGrp="1"/>
-          </p:cNvSpPr>
-          <p:nvPr>
-            <p:ph type="clipArt" sz="quarter" idx="31"/>
-          </p:nvPr>
-        </p:nvSpPr>
-        <p:spPr/>
-        <p:txBody>
-          <a:bodyPr/>
-          <a:lstStyle/>
-          <a:p>
-            <a:endParaRPr lang="en-US"/>
-          </a:p>
-        </p:txBody>
-      </p:sp>
-      <p:sp>
-        <p:nvSpPr>
-          <p:cNvPr id="7" name="Text Placeholder 6">
-            <a:extLst>
-              <a:ext uri="{FF2B5EF4-FFF2-40B4-BE49-F238E27FC236}">
-                <a16:creationId xmlns:a16="http://schemas.microsoft.com/office/drawing/2014/main" id="{08598D55-6623-921F-16F0-A04687C9A2AF}"/>
-              </a:ext>
-            </a:extLst>
-          </p:cNvPr>
-          <p:cNvSpPr>
-            <a:spLocks noGrp="1"/>
-          </p:cNvSpPr>
-          <p:nvPr>
-            <p:ph type="body" sz="quarter" idx="32"/>
-          </p:nvPr>
-        </p:nvSpPr>
-        <p:spPr/>
-        <p:txBody>
-          <a:bodyPr/>
-          <a:lstStyle/>
-          <a:p>
-            <a:endParaRPr lang="en-US"/>
-          </a:p>
-        </p:txBody>
-      </p:sp>
-      <p:sp>
-        <p:nvSpPr>
-          <p:cNvPr id="8" name="Text Placeholder 7">
-            <a:extLst>
-              <a:ext uri="{FF2B5EF4-FFF2-40B4-BE49-F238E27FC236}">
-                <a16:creationId xmlns:a16="http://schemas.microsoft.com/office/drawing/2014/main" id="{6DC73538-052E-0C74-2C31-C4DA2BE18C07}"/>
-              </a:ext>
-            </a:extLst>
-          </p:cNvPr>
-          <p:cNvSpPr>
-            <a:spLocks noGrp="1"/>
-          </p:cNvSpPr>
-          <p:nvPr>
-            <p:ph type="body" sz="quarter" idx="33"/>
-          </p:nvPr>
-        </p:nvSpPr>
-        <p:spPr/>
-        <p:txBody>
-          <a:bodyPr/>
-          <a:lstStyle/>
-          <a:p>
-            <a:endParaRPr lang="en-US"/>
-          </a:p>
-        </p:txBody>
-      </p:sp>
-      <p:sp>
-        <p:nvSpPr>
-          <p:cNvPr id="9" name="Online Image Placeholder 8">
-            <a:extLst>
-              <a:ext uri="{FF2B5EF4-FFF2-40B4-BE49-F238E27FC236}">
-                <a16:creationId xmlns:a16="http://schemas.microsoft.com/office/drawing/2014/main" id="{19DB8543-DBEE-8B47-EA11-844AF8D88A1F}"/>
-              </a:ext>
-            </a:extLst>
-          </p:cNvPr>
-          <p:cNvSpPr>
-            <a:spLocks noGrp="1"/>
-          </p:cNvSpPr>
-          <p:nvPr>
-            <p:ph type="clipArt" sz="quarter" idx="34"/>
-          </p:nvPr>
-        </p:nvSpPr>
-        <p:spPr/>
-        <p:txBody>
-          <a:bodyPr/>
-          <a:lstStyle/>
-          <a:p>
-            <a:endParaRPr lang="en-US"/>
-          </a:p>
-        </p:txBody>
-      </p:sp>
-      <p:sp>
-        <p:nvSpPr>
-          <p:cNvPr id="10" name="Text Placeholder 9">
-            <a:extLst>
-              <a:ext uri="{FF2B5EF4-FFF2-40B4-BE49-F238E27FC236}">
-                <a16:creationId xmlns:a16="http://schemas.microsoft.com/office/drawing/2014/main" id="{A40DBDE8-9B9B-2D7F-76C4-F9F71513C5F6}"/>
-              </a:ext>
-            </a:extLst>
-          </p:cNvPr>
-          <p:cNvSpPr>
-            <a:spLocks noGrp="1"/>
-          </p:cNvSpPr>
-          <p:nvPr>
-            <p:ph type="body" sz="quarter" idx="35"/>
-          </p:nvPr>
-        </p:nvSpPr>
-        <p:spPr/>
-        <p:txBody>
-          <a:bodyPr/>
-          <a:lstStyle/>
-          <a:p>
-            <a:endParaRPr lang="en-US"/>
-          </a:p>
-        </p:txBody>
-      </p:sp>
-      <p:sp>
-        <p:nvSpPr>
-          <p:cNvPr id="11" name="Text Placeholder 10">
-            <a:extLst>
-              <a:ext uri="{FF2B5EF4-FFF2-40B4-BE49-F238E27FC236}">
-                <a16:creationId xmlns:a16="http://schemas.microsoft.com/office/drawing/2014/main" id="{0D68A213-6F94-C5B5-69E3-20C5FD43308F}"/>
-              </a:ext>
-            </a:extLst>
-          </p:cNvPr>
-          <p:cNvSpPr>
-            <a:spLocks noGrp="1"/>
-          </p:cNvSpPr>
-          <p:nvPr>
-            <p:ph type="body" sz="quarter" idx="36"/>
-          </p:nvPr>
-        </p:nvSpPr>
-        <p:spPr/>
-        <p:txBody>
-          <a:bodyPr/>
-          <a:lstStyle/>
-          <a:p>
-            <a:endParaRPr lang="en-US"/>
-          </a:p>
-        </p:txBody>
-      </p:sp>
-      <p:sp>
-        <p:nvSpPr>
-          <p:cNvPr id="12" name="Online Image Placeholder 11">
-            <a:extLst>
-              <a:ext uri="{FF2B5EF4-FFF2-40B4-BE49-F238E27FC236}">
-                <a16:creationId xmlns:a16="http://schemas.microsoft.com/office/drawing/2014/main" id="{75355793-989D-85E4-86C3-70ACA398EF42}"/>
-              </a:ext>
-            </a:extLst>
-          </p:cNvPr>
-          <p:cNvSpPr>
-            <a:spLocks noGrp="1"/>
-          </p:cNvSpPr>
-          <p:nvPr>
-            <p:ph type="clipArt" sz="quarter" idx="37"/>
-          </p:nvPr>
-        </p:nvSpPr>
-        <p:spPr/>
-        <p:txBody>
-          <a:bodyPr/>
-          <a:lstStyle/>
-          <a:p>
-            <a:endParaRPr lang="en-US"/>
-          </a:p>
-        </p:txBody>
-      </p:sp>
-      <p:sp>
-        <p:nvSpPr>
-          <p:cNvPr id="13" name="Text Placeholder 12">
-            <a:extLst>
-              <a:ext uri="{FF2B5EF4-FFF2-40B4-BE49-F238E27FC236}">
-                <a16:creationId xmlns:a16="http://schemas.microsoft.com/office/drawing/2014/main" id="{36B79838-3E8E-B3A5-DD0D-B2AB716936A0}"/>
-              </a:ext>
-            </a:extLst>
-          </p:cNvPr>
-          <p:cNvSpPr>
-            <a:spLocks noGrp="1"/>
-          </p:cNvSpPr>
-          <p:nvPr>
-            <p:ph type="body" sz="quarter" idx="38"/>
-          </p:nvPr>
-        </p:nvSpPr>
-        <p:spPr/>
-        <p:txBody>
-          <a:bodyPr/>
-          <a:lstStyle/>
-          <a:p>
-            <a:endParaRPr lang="en-US"/>
-          </a:p>
-        </p:txBody>
-      </p:sp>
-      <p:sp>
-        <p:nvSpPr>
-          <p:cNvPr id="14" name="Text Placeholder 13">
-            <a:extLst>
-              <a:ext uri="{FF2B5EF4-FFF2-40B4-BE49-F238E27FC236}">
-                <a16:creationId xmlns:a16="http://schemas.microsoft.com/office/drawing/2014/main" id="{A3919977-D23A-8691-5874-A08434BDAEC6}"/>
-              </a:ext>
-            </a:extLst>
-          </p:cNvPr>
-          <p:cNvSpPr>
-            <a:spLocks noGrp="1"/>
-          </p:cNvSpPr>
-          <p:nvPr>
-            <p:ph type="body" sz="quarter" idx="39"/>
-          </p:nvPr>
-        </p:nvSpPr>
-        <p:spPr/>
-        <p:txBody>
-          <a:bodyPr/>
-          <a:lstStyle/>
-          <a:p>
-            <a:endParaRPr lang="en-US"/>
-          </a:p>
-        </p:txBody>
-      </p:sp>
-      <p:sp>
-        <p:nvSpPr>
-          <p:cNvPr id="15" name="Text Placeholder 14">
-            <a:extLst>
-              <a:ext uri="{FF2B5EF4-FFF2-40B4-BE49-F238E27FC236}">
-                <a16:creationId xmlns:a16="http://schemas.microsoft.com/office/drawing/2014/main" id="{1E655378-DCD0-A852-8B81-8A3C36957933}"/>
-              </a:ext>
-            </a:extLst>
-          </p:cNvPr>
-          <p:cNvSpPr>
-            <a:spLocks noGrp="1"/>
-          </p:cNvSpPr>
-          <p:nvPr>
-            <p:ph type="body" sz="quarter" idx="43"/>
-          </p:nvPr>
-        </p:nvSpPr>
-        <p:spPr/>
-        <p:txBody>
-          <a:bodyPr/>
-          <a:lstStyle/>
-          <a:p>
-            <a:endParaRPr lang="en-US"/>
-          </a:p>
-        </p:txBody>
-      </p:sp>
-      <p:sp>
-        <p:nvSpPr>
-          <p:cNvPr id="16" name="Text Placeholder 15">
-            <a:extLst>
-              <a:ext uri="{FF2B5EF4-FFF2-40B4-BE49-F238E27FC236}">
-                <a16:creationId xmlns:a16="http://schemas.microsoft.com/office/drawing/2014/main" id="{044C32A7-E10A-CB59-4D11-1831D7B2AA36}"/>
-              </a:ext>
-            </a:extLst>
-          </p:cNvPr>
-          <p:cNvSpPr>
-            <a:spLocks noGrp="1"/>
-          </p:cNvSpPr>
-          <p:nvPr>
-            <p:ph type="body" sz="quarter" idx="44"/>
-          </p:nvPr>
-        </p:nvSpPr>
-        <p:spPr/>
-        <p:txBody>
-          <a:bodyPr/>
-          <a:lstStyle/>
-          <a:p>
-            <a:endParaRPr lang="en-US"/>
-          </a:p>
-        </p:txBody>
-      </p:sp>
-    </p:spTree>
-    <p:extLst>
-      <p:ext uri="{BB962C8B-B14F-4D97-AF65-F5344CB8AC3E}">
-        <p14:creationId xmlns:p14="http://schemas.microsoft.com/office/powerpoint/2010/main" val="584588521"/>
-      </p:ext>
-    </p:extLst>
-  </p:cSld>
-  <p:clrMapOvr>
-    <a:masterClrMapping/>
-  </p:clrMapOvr>
-</p:sld>
-</file>
-
-<file path=ppt/slides/slide9.xml><?xml version="1.0" encoding="utf-8"?>
-<p:sld xmlns:a="http://schemas.openxmlformats.org/drawingml/2006/main" xmlns:r="http://schemas.openxmlformats.org/officeDocument/2006/relationships" xmlns:p="http://schemas.openxmlformats.org/presentationml/2006/main">
-  <p:cSld>
-    <p:spTree>
-      <p:nvGrpSpPr>
-        <p:cNvPr id="1" name=""/>
-        <p:cNvGrpSpPr/>
-        <p:nvPr/>
-      </p:nvGrpSpPr>
-      <p:grpSpPr>
-        <a:xfrm>
-          <a:off x="0" y="0"/>
-          <a:ext cx="0" cy="0"/>
-          <a:chOff x="0" y="0"/>
-          <a:chExt cx="0" cy="0"/>
-        </a:xfrm>
-      </p:grpSpPr>
-      <p:sp>
-        <p:nvSpPr>
-          <p:cNvPr id="2" name="Online Image Placeholder 1">
-            <a:extLst>
-              <a:ext uri="{FF2B5EF4-FFF2-40B4-BE49-F238E27FC236}">
-                <a16:creationId xmlns:a16="http://schemas.microsoft.com/office/drawing/2014/main" id="{D2FF5A4D-9472-3287-C226-D58B884E443A}"/>
-              </a:ext>
-            </a:extLst>
-          </p:cNvPr>
-          <p:cNvSpPr>
-            <a:spLocks noGrp="1"/>
-          </p:cNvSpPr>
-          <p:nvPr>
-            <p:ph type="clipArt" sz="quarter" idx="22"/>
-          </p:nvPr>
-        </p:nvSpPr>
-        <p:spPr/>
-        <p:txBody>
-          <a:bodyPr/>
-          <a:lstStyle/>
-          <a:p>
-            <a:endParaRPr lang="en-US"/>
-          </a:p>
-        </p:txBody>
-      </p:sp>
-      <p:sp>
-        <p:nvSpPr>
-          <p:cNvPr id="3" name="Text Placeholder 2">
-            <a:extLst>
-              <a:ext uri="{FF2B5EF4-FFF2-40B4-BE49-F238E27FC236}">
-                <a16:creationId xmlns:a16="http://schemas.microsoft.com/office/drawing/2014/main" id="{425CE123-839D-33C5-14AE-00B92594FA27}"/>
-              </a:ext>
-            </a:extLst>
-          </p:cNvPr>
-          <p:cNvSpPr>
-            <a:spLocks noGrp="1"/>
-          </p:cNvSpPr>
-          <p:nvPr>
-            <p:ph type="body" sz="quarter" idx="26"/>
-          </p:nvPr>
-        </p:nvSpPr>
-        <p:spPr/>
-        <p:txBody>
-          <a:bodyPr/>
-          <a:lstStyle/>
-          <a:p>
-            <a:endParaRPr lang="en-US"/>
-          </a:p>
-        </p:txBody>
-      </p:sp>
-      <p:sp>
-        <p:nvSpPr>
-          <p:cNvPr id="4" name="Text Placeholder 3">
-            <a:extLst>
-              <a:ext uri="{FF2B5EF4-FFF2-40B4-BE49-F238E27FC236}">
-                <a16:creationId xmlns:a16="http://schemas.microsoft.com/office/drawing/2014/main" id="{25BA4D3D-5ECD-8D98-A9A0-F1624EB4A6DE}"/>
-              </a:ext>
-            </a:extLst>
-          </p:cNvPr>
-          <p:cNvSpPr>
-            <a:spLocks noGrp="1"/>
-          </p:cNvSpPr>
-          <p:nvPr>
-            <p:ph type="body" sz="quarter" idx="29"/>
-          </p:nvPr>
-        </p:nvSpPr>
-        <p:spPr/>
-        <p:txBody>
-          <a:bodyPr/>
-          <a:lstStyle/>
-          <a:p>
-            <a:endParaRPr lang="en-US"/>
-          </a:p>
-        </p:txBody>
-      </p:sp>
-      <p:sp>
-        <p:nvSpPr>
-          <p:cNvPr id="5" name="Text Placeholder 4">
-            <a:extLst>
-              <a:ext uri="{FF2B5EF4-FFF2-40B4-BE49-F238E27FC236}">
-                <a16:creationId xmlns:a16="http://schemas.microsoft.com/office/drawing/2014/main" id="{719BDE0D-FD62-D060-04E6-2C9E3F18BBC5}"/>
-              </a:ext>
-            </a:extLst>
-          </p:cNvPr>
-          <p:cNvSpPr>
-            <a:spLocks noGrp="1"/>
-          </p:cNvSpPr>
-          <p:nvPr>
-            <p:ph type="body" sz="quarter" idx="30"/>
-          </p:nvPr>
-        </p:nvSpPr>
-        <p:spPr/>
-        <p:txBody>
-          <a:bodyPr/>
-          <a:lstStyle/>
-          <a:p>
-            <a:endParaRPr lang="en-US"/>
-          </a:p>
-        </p:txBody>
-      </p:sp>
-      <p:sp>
-        <p:nvSpPr>
-          <p:cNvPr id="6" name="Online Image Placeholder 5">
-            <a:extLst>
-              <a:ext uri="{FF2B5EF4-FFF2-40B4-BE49-F238E27FC236}">
-                <a16:creationId xmlns:a16="http://schemas.microsoft.com/office/drawing/2014/main" id="{3021018B-59AB-A934-8241-4D7B439EF683}"/>
-              </a:ext>
-            </a:extLst>
-          </p:cNvPr>
-          <p:cNvSpPr>
-            <a:spLocks noGrp="1"/>
-          </p:cNvSpPr>
-          <p:nvPr>
-            <p:ph type="clipArt" sz="quarter" idx="31"/>
-          </p:nvPr>
-        </p:nvSpPr>
-        <p:spPr/>
-        <p:txBody>
-          <a:bodyPr/>
-          <a:lstStyle/>
-          <a:p>
-            <a:endParaRPr lang="en-US"/>
-          </a:p>
-        </p:txBody>
-      </p:sp>
-      <p:sp>
-        <p:nvSpPr>
-          <p:cNvPr id="7" name="Text Placeholder 6">
-            <a:extLst>
-              <a:ext uri="{FF2B5EF4-FFF2-40B4-BE49-F238E27FC236}">
-                <a16:creationId xmlns:a16="http://schemas.microsoft.com/office/drawing/2014/main" id="{224079A9-8B50-EFE1-04C3-2A565D9CCD67}"/>
-              </a:ext>
-            </a:extLst>
-          </p:cNvPr>
-          <p:cNvSpPr>
-            <a:spLocks noGrp="1"/>
-          </p:cNvSpPr>
-          <p:nvPr>
-            <p:ph type="body" sz="quarter" idx="32"/>
-          </p:nvPr>
-        </p:nvSpPr>
-        <p:spPr/>
-        <p:txBody>
-          <a:bodyPr/>
-          <a:lstStyle/>
-          <a:p>
-            <a:endParaRPr lang="en-US"/>
-          </a:p>
-        </p:txBody>
-      </p:sp>
-      <p:sp>
-        <p:nvSpPr>
-          <p:cNvPr id="8" name="Text Placeholder 7">
-            <a:extLst>
-              <a:ext uri="{FF2B5EF4-FFF2-40B4-BE49-F238E27FC236}">
-                <a16:creationId xmlns:a16="http://schemas.microsoft.com/office/drawing/2014/main" id="{1F0FDFB3-AB9A-716B-A003-AB69C7E567AE}"/>
-              </a:ext>
-            </a:extLst>
-          </p:cNvPr>
-          <p:cNvSpPr>
-            <a:spLocks noGrp="1"/>
-          </p:cNvSpPr>
-          <p:nvPr>
-            <p:ph type="body" sz="quarter" idx="33"/>
-          </p:nvPr>
-        </p:nvSpPr>
-        <p:spPr/>
-        <p:txBody>
-          <a:bodyPr/>
-          <a:lstStyle/>
-          <a:p>
-            <a:endParaRPr lang="en-US"/>
-          </a:p>
-        </p:txBody>
-      </p:sp>
-      <p:sp>
-        <p:nvSpPr>
-          <p:cNvPr id="9" name="Online Image Placeholder 8">
-            <a:extLst>
-              <a:ext uri="{FF2B5EF4-FFF2-40B4-BE49-F238E27FC236}">
-                <a16:creationId xmlns:a16="http://schemas.microsoft.com/office/drawing/2014/main" id="{66FA131C-ADC7-B426-B2C3-8183E8C2C893}"/>
-              </a:ext>
-            </a:extLst>
-          </p:cNvPr>
-          <p:cNvSpPr>
-            <a:spLocks noGrp="1"/>
-          </p:cNvSpPr>
-          <p:nvPr>
-            <p:ph type="clipArt" sz="quarter" idx="34"/>
-          </p:nvPr>
-        </p:nvSpPr>
-        <p:spPr/>
-        <p:txBody>
-          <a:bodyPr/>
-          <a:lstStyle/>
-          <a:p>
-            <a:endParaRPr lang="en-US"/>
-          </a:p>
-        </p:txBody>
-      </p:sp>
-      <p:sp>
-        <p:nvSpPr>
-          <p:cNvPr id="10" name="Text Placeholder 9">
-            <a:extLst>
-              <a:ext uri="{FF2B5EF4-FFF2-40B4-BE49-F238E27FC236}">
-                <a16:creationId xmlns:a16="http://schemas.microsoft.com/office/drawing/2014/main" id="{A1538224-72D5-57C9-37BA-194B1DF70C76}"/>
-              </a:ext>
-            </a:extLst>
-          </p:cNvPr>
-          <p:cNvSpPr>
-            <a:spLocks noGrp="1"/>
-          </p:cNvSpPr>
-          <p:nvPr>
-            <p:ph type="body" sz="quarter" idx="35"/>
-          </p:nvPr>
-        </p:nvSpPr>
-        <p:spPr/>
-        <p:txBody>
-          <a:bodyPr/>
-          <a:lstStyle/>
-          <a:p>
-            <a:endParaRPr lang="en-US" dirty="0"/>
-          </a:p>
-        </p:txBody>
-      </p:sp>
-      <p:sp>
-        <p:nvSpPr>
-          <p:cNvPr id="11" name="Text Placeholder 10">
-            <a:extLst>
-              <a:ext uri="{FF2B5EF4-FFF2-40B4-BE49-F238E27FC236}">
-                <a16:creationId xmlns:a16="http://schemas.microsoft.com/office/drawing/2014/main" id="{CBE7E950-9808-7AB3-5CD8-34939F630AD2}"/>
-              </a:ext>
-            </a:extLst>
-          </p:cNvPr>
-          <p:cNvSpPr>
-            <a:spLocks noGrp="1"/>
-          </p:cNvSpPr>
-          <p:nvPr>
-            <p:ph type="body" sz="quarter" idx="36"/>
-          </p:nvPr>
-        </p:nvSpPr>
-        <p:spPr/>
-        <p:txBody>
-          <a:bodyPr/>
-          <a:lstStyle/>
-          <a:p>
-            <a:endParaRPr lang="en-US"/>
-          </a:p>
-        </p:txBody>
-      </p:sp>
-      <p:sp>
-        <p:nvSpPr>
-          <p:cNvPr id="12" name="Online Image Placeholder 11">
-            <a:extLst>
-              <a:ext uri="{FF2B5EF4-FFF2-40B4-BE49-F238E27FC236}">
-                <a16:creationId xmlns:a16="http://schemas.microsoft.com/office/drawing/2014/main" id="{B6876782-A95C-5967-2F42-FD609BDE5BDA}"/>
-              </a:ext>
-            </a:extLst>
-          </p:cNvPr>
-          <p:cNvSpPr>
-            <a:spLocks noGrp="1"/>
-          </p:cNvSpPr>
-          <p:nvPr>
-            <p:ph type="clipArt" sz="quarter" idx="37"/>
-          </p:nvPr>
-        </p:nvSpPr>
-        <p:spPr/>
-        <p:txBody>
-          <a:bodyPr/>
-          <a:lstStyle/>
-          <a:p>
-            <a:endParaRPr lang="en-US"/>
-          </a:p>
-        </p:txBody>
-      </p:sp>
-      <p:sp>
-        <p:nvSpPr>
-          <p:cNvPr id="13" name="Text Placeholder 12">
-            <a:extLst>
-              <a:ext uri="{FF2B5EF4-FFF2-40B4-BE49-F238E27FC236}">
-                <a16:creationId xmlns:a16="http://schemas.microsoft.com/office/drawing/2014/main" id="{24558327-22DF-8224-1362-EE8AA1FC7677}"/>
-              </a:ext>
-            </a:extLst>
-          </p:cNvPr>
-          <p:cNvSpPr>
-            <a:spLocks noGrp="1"/>
-          </p:cNvSpPr>
-          <p:nvPr>
-            <p:ph type="body" sz="quarter" idx="38"/>
-          </p:nvPr>
-        </p:nvSpPr>
-        <p:spPr/>
-        <p:txBody>
-          <a:bodyPr/>
-          <a:lstStyle/>
-          <a:p>
-            <a:endParaRPr lang="en-US"/>
-          </a:p>
-        </p:txBody>
-      </p:sp>
-      <p:sp>
-        <p:nvSpPr>
-          <p:cNvPr id="14" name="Text Placeholder 13">
-            <a:extLst>
-              <a:ext uri="{FF2B5EF4-FFF2-40B4-BE49-F238E27FC236}">
-                <a16:creationId xmlns:a16="http://schemas.microsoft.com/office/drawing/2014/main" id="{BBFECC32-8A67-C97B-82B4-58BA9437D874}"/>
-              </a:ext>
-            </a:extLst>
-          </p:cNvPr>
-          <p:cNvSpPr>
-            <a:spLocks noGrp="1"/>
-          </p:cNvSpPr>
-          <p:nvPr>
-            <p:ph type="body" sz="quarter" idx="39"/>
-          </p:nvPr>
-        </p:nvSpPr>
-        <p:spPr/>
-        <p:txBody>
-          <a:bodyPr/>
-          <a:lstStyle/>
-          <a:p>
-            <a:endParaRPr lang="en-US"/>
-          </a:p>
-        </p:txBody>
-      </p:sp>
-      <p:sp>
-        <p:nvSpPr>
-          <p:cNvPr id="15" name="Online Image Placeholder 14">
-            <a:extLst>
-              <a:ext uri="{FF2B5EF4-FFF2-40B4-BE49-F238E27FC236}">
-                <a16:creationId xmlns:a16="http://schemas.microsoft.com/office/drawing/2014/main" id="{138B05C2-E199-D024-BE82-1197B3F78744}"/>
-              </a:ext>
-            </a:extLst>
-          </p:cNvPr>
-          <p:cNvSpPr>
-            <a:spLocks noGrp="1"/>
-          </p:cNvSpPr>
-          <p:nvPr>
-            <p:ph type="clipArt" sz="quarter" idx="40"/>
-          </p:nvPr>
-        </p:nvSpPr>
-        <p:spPr/>
-        <p:txBody>
-          <a:bodyPr/>
-          <a:lstStyle/>
-          <a:p>
-            <a:endParaRPr lang="en-US"/>
-          </a:p>
-        </p:txBody>
-      </p:sp>
-      <p:sp>
-        <p:nvSpPr>
-          <p:cNvPr id="16" name="Text Placeholder 15">
-            <a:extLst>
-              <a:ext uri="{FF2B5EF4-FFF2-40B4-BE49-F238E27FC236}">
-                <a16:creationId xmlns:a16="http://schemas.microsoft.com/office/drawing/2014/main" id="{87DC7C54-0337-E499-58FB-1E3DFF4A540C}"/>
-              </a:ext>
-            </a:extLst>
-          </p:cNvPr>
-          <p:cNvSpPr>
-            <a:spLocks noGrp="1"/>
-          </p:cNvSpPr>
-          <p:nvPr>
-            <p:ph type="body" sz="quarter" idx="41"/>
-          </p:nvPr>
-        </p:nvSpPr>
-        <p:spPr/>
-        <p:txBody>
-          <a:bodyPr/>
-          <a:lstStyle/>
-          <a:p>
-            <a:endParaRPr lang="en-US"/>
-          </a:p>
-        </p:txBody>
-      </p:sp>
-      <p:sp>
-        <p:nvSpPr>
-          <p:cNvPr id="17" name="Text Placeholder 16">
-            <a:extLst>
-              <a:ext uri="{FF2B5EF4-FFF2-40B4-BE49-F238E27FC236}">
-                <a16:creationId xmlns:a16="http://schemas.microsoft.com/office/drawing/2014/main" id="{41979205-8187-192E-C7AB-41B8C1AE7FF5}"/>
-              </a:ext>
-            </a:extLst>
-          </p:cNvPr>
-          <p:cNvSpPr>
-            <a:spLocks noGrp="1"/>
-          </p:cNvSpPr>
-          <p:nvPr>
-            <p:ph type="body" sz="quarter" idx="42"/>
-          </p:nvPr>
-        </p:nvSpPr>
-        <p:spPr/>
-        <p:txBody>
-          <a:bodyPr/>
-          <a:lstStyle/>
-          <a:p>
-            <a:endParaRPr lang="en-US"/>
-          </a:p>
-        </p:txBody>
-      </p:sp>
-      <p:sp>
-        <p:nvSpPr>
-          <p:cNvPr id="18" name="Text Placeholder 17">
-            <a:extLst>
-              <a:ext uri="{FF2B5EF4-FFF2-40B4-BE49-F238E27FC236}">
-                <a16:creationId xmlns:a16="http://schemas.microsoft.com/office/drawing/2014/main" id="{456EDD2E-BD64-68EE-86DC-402B5D280BF0}"/>
-              </a:ext>
-            </a:extLst>
-          </p:cNvPr>
-          <p:cNvSpPr>
-            <a:spLocks noGrp="1"/>
-          </p:cNvSpPr>
-          <p:nvPr>
-            <p:ph type="body" sz="quarter" idx="43"/>
-          </p:nvPr>
-        </p:nvSpPr>
-        <p:spPr/>
-        <p:txBody>
-          <a:bodyPr/>
-          <a:lstStyle/>
-          <a:p>
-            <a:endParaRPr lang="en-US"/>
-          </a:p>
-        </p:txBody>
-      </p:sp>
-      <p:sp>
-        <p:nvSpPr>
-          <p:cNvPr id="19" name="Text Placeholder 18">
-            <a:extLst>
-              <a:ext uri="{FF2B5EF4-FFF2-40B4-BE49-F238E27FC236}">
-                <a16:creationId xmlns:a16="http://schemas.microsoft.com/office/drawing/2014/main" id="{C8D13ACB-DEAE-13E7-14EF-820025710169}"/>
-              </a:ext>
-            </a:extLst>
-          </p:cNvPr>
-          <p:cNvSpPr>
-            <a:spLocks noGrp="1"/>
-          </p:cNvSpPr>
-          <p:nvPr>
-            <p:ph type="body" sz="quarter" idx="44"/>
-          </p:nvPr>
-        </p:nvSpPr>
-        <p:spPr/>
-        <p:txBody>
-          <a:bodyPr/>
-          <a:lstStyle/>
-          <a:p>
-            <a:endParaRPr lang="en-US"/>
-          </a:p>
-        </p:txBody>
-      </p:sp>
-    </p:spTree>
-    <p:extLst>
-      <p:ext uri="{BB962C8B-B14F-4D97-AF65-F5344CB8AC3E}">
-        <p14:creationId xmlns:p14="http://schemas.microsoft.com/office/powerpoint/2010/main" val="1757201325"/>
       </p:ext>
     </p:extLst>
   </p:cSld>
@@ -39323,4 +35825,319 @@
     </a:ext>
   </a:extLst>
 </a:theme>
+</file>
+
+<file path=ppt/theme/theme3.xml><?xml version="1.0" encoding="utf-8"?>
+<a:theme xmlns:a="http://schemas.openxmlformats.org/drawingml/2006/main" name="Office Theme">
+  <a:themeElements>
+    <a:clrScheme name="Office">
+      <a:dk1>
+        <a:sysClr val="windowText" lastClr="000000"/>
+      </a:dk1>
+      <a:lt1>
+        <a:sysClr val="window" lastClr="FFFFFF"/>
+      </a:lt1>
+      <a:dk2>
+        <a:srgbClr val="0E2841"/>
+      </a:dk2>
+      <a:lt2>
+        <a:srgbClr val="E8E8E8"/>
+      </a:lt2>
+      <a:accent1>
+        <a:srgbClr val="156082"/>
+      </a:accent1>
+      <a:accent2>
+        <a:srgbClr val="E97132"/>
+      </a:accent2>
+      <a:accent3>
+        <a:srgbClr val="196B24"/>
+      </a:accent3>
+      <a:accent4>
+        <a:srgbClr val="0F9ED5"/>
+      </a:accent4>
+      <a:accent5>
+        <a:srgbClr val="A02B93"/>
+      </a:accent5>
+      <a:accent6>
+        <a:srgbClr val="4EA72E"/>
+      </a:accent6>
+      <a:hlink>
+        <a:srgbClr val="467886"/>
+      </a:hlink>
+      <a:folHlink>
+        <a:srgbClr val="96607D"/>
+      </a:folHlink>
+    </a:clrScheme>
+    <a:fontScheme name="Office">
+      <a:majorFont>
+        <a:latin typeface="Aptos Display" panose="02110004020202020204"/>
+        <a:ea typeface=""/>
+        <a:cs typeface=""/>
+        <a:font script="Jpan" typeface="游ゴシック Light"/>
+        <a:font script="Hang" typeface="맑은 고딕"/>
+        <a:font script="Hans" typeface="等线 Light"/>
+        <a:font script="Hant" typeface="新細明體"/>
+        <a:font script="Arab" typeface="Times New Roman"/>
+        <a:font script="Hebr" typeface="Times New Roman"/>
+        <a:font script="Thai" typeface="Angsana New"/>
+        <a:font script="Ethi" typeface="Nyala"/>
+        <a:font script="Beng" typeface="Vrinda"/>
+        <a:font script="Gujr" typeface="Shruti"/>
+        <a:font script="Khmr" typeface="MoolBoran"/>
+        <a:font script="Knda" typeface="Tunga"/>
+        <a:font script="Guru" typeface="Raavi"/>
+        <a:font script="Cans" typeface="Euphemia"/>
+        <a:font script="Cher" typeface="Plantagenet Cherokee"/>
+        <a:font script="Yiii" typeface="Microsoft Yi Baiti"/>
+        <a:font script="Tibt" typeface="Microsoft Himalaya"/>
+        <a:font script="Thaa" typeface="MV Boli"/>
+        <a:font script="Deva" typeface="Mangal"/>
+        <a:font script="Telu" typeface="Gautami"/>
+        <a:font script="Taml" typeface="Latha"/>
+        <a:font script="Syrc" typeface="Estrangelo Edessa"/>
+        <a:font script="Orya" typeface="Kalinga"/>
+        <a:font script="Mlym" typeface="Kartika"/>
+        <a:font script="Laoo" typeface="DokChampa"/>
+        <a:font script="Sinh" typeface="Iskoola Pota"/>
+        <a:font script="Mong" typeface="Mongolian Baiti"/>
+        <a:font script="Viet" typeface="Times New Roman"/>
+        <a:font script="Uigh" typeface="Microsoft Uighur"/>
+        <a:font script="Geor" typeface="Sylfaen"/>
+        <a:font script="Armn" typeface="Arial"/>
+        <a:font script="Bugi" typeface="Leelawadee UI"/>
+        <a:font script="Bopo" typeface="Microsoft JhengHei"/>
+        <a:font script="Java" typeface="Javanese Text"/>
+        <a:font script="Lisu" typeface="Segoe UI"/>
+        <a:font script="Mymr" typeface="Myanmar Text"/>
+        <a:font script="Nkoo" typeface="Ebrima"/>
+        <a:font script="Olck" typeface="Nirmala UI"/>
+        <a:font script="Osma" typeface="Ebrima"/>
+        <a:font script="Phag" typeface="Phagspa"/>
+        <a:font script="Syrn" typeface="Estrangelo Edessa"/>
+        <a:font script="Syrj" typeface="Estrangelo Edessa"/>
+        <a:font script="Syre" typeface="Estrangelo Edessa"/>
+        <a:font script="Sora" typeface="Nirmala UI"/>
+        <a:font script="Tale" typeface="Microsoft Tai Le"/>
+        <a:font script="Talu" typeface="Microsoft New Tai Lue"/>
+        <a:font script="Tfng" typeface="Ebrima"/>
+      </a:majorFont>
+      <a:minorFont>
+        <a:latin typeface="Aptos" panose="02110004020202020204"/>
+        <a:ea typeface=""/>
+        <a:cs typeface=""/>
+        <a:font script="Jpan" typeface="游ゴシック"/>
+        <a:font script="Hang" typeface="맑은 고딕"/>
+        <a:font script="Hans" typeface="等线"/>
+        <a:font script="Hant" typeface="新細明體"/>
+        <a:font script="Arab" typeface="Arial"/>
+        <a:font script="Hebr" typeface="Arial"/>
+        <a:font script="Thai" typeface="Cordia New"/>
+        <a:font script="Ethi" typeface="Nyala"/>
+        <a:font script="Beng" typeface="Vrinda"/>
+        <a:font script="Gujr" typeface="Shruti"/>
+        <a:font script="Khmr" typeface="DaunPenh"/>
+        <a:font script="Knda" typeface="Tunga"/>
+        <a:font script="Guru" typeface="Raavi"/>
+        <a:font script="Cans" typeface="Euphemia"/>
+        <a:font script="Cher" typeface="Plantagenet Cherokee"/>
+        <a:font script="Yiii" typeface="Microsoft Yi Baiti"/>
+        <a:font script="Tibt" typeface="Microsoft Himalaya"/>
+        <a:font script="Thaa" typeface="MV Boli"/>
+        <a:font script="Deva" typeface="Mangal"/>
+        <a:font script="Telu" typeface="Gautami"/>
+        <a:font script="Taml" typeface="Latha"/>
+        <a:font script="Syrc" typeface="Estrangelo Edessa"/>
+        <a:font script="Orya" typeface="Kalinga"/>
+        <a:font script="Mlym" typeface="Kartika"/>
+        <a:font script="Laoo" typeface="DokChampa"/>
+        <a:font script="Sinh" typeface="Iskoola Pota"/>
+        <a:font script="Mong" typeface="Mongolian Baiti"/>
+        <a:font script="Viet" typeface="Arial"/>
+        <a:font script="Uigh" typeface="Microsoft Uighur"/>
+        <a:font script="Geor" typeface="Sylfaen"/>
+        <a:font script="Armn" typeface="Arial"/>
+        <a:font script="Bugi" typeface="Leelawadee UI"/>
+        <a:font script="Bopo" typeface="Microsoft JhengHei"/>
+        <a:font script="Java" typeface="Javanese Text"/>
+        <a:font script="Lisu" typeface="Segoe UI"/>
+        <a:font script="Mymr" typeface="Myanmar Text"/>
+        <a:font script="Nkoo" typeface="Ebrima"/>
+        <a:font script="Olck" typeface="Nirmala UI"/>
+        <a:font script="Osma" typeface="Ebrima"/>
+        <a:font script="Phag" typeface="Phagspa"/>
+        <a:font script="Syrn" typeface="Estrangelo Edessa"/>
+        <a:font script="Syrj" typeface="Estrangelo Edessa"/>
+        <a:font script="Syre" typeface="Estrangelo Edessa"/>
+        <a:font script="Sora" typeface="Nirmala UI"/>
+        <a:font script="Tale" typeface="Microsoft Tai Le"/>
+        <a:font script="Talu" typeface="Microsoft New Tai Lue"/>
+        <a:font script="Tfng" typeface="Ebrima"/>
+      </a:minorFont>
+    </a:fontScheme>
+    <a:fmtScheme name="Office">
+      <a:fillStyleLst>
+        <a:solidFill>
+          <a:schemeClr val="phClr"/>
+        </a:solidFill>
+        <a:gradFill rotWithShape="1">
+          <a:gsLst>
+            <a:gs pos="0">
+              <a:schemeClr val="phClr">
+                <a:lumMod val="110000"/>
+                <a:satMod val="105000"/>
+                <a:tint val="67000"/>
+              </a:schemeClr>
+            </a:gs>
+            <a:gs pos="50000">
+              <a:schemeClr val="phClr">
+                <a:lumMod val="105000"/>
+                <a:satMod val="103000"/>
+                <a:tint val="73000"/>
+              </a:schemeClr>
+            </a:gs>
+            <a:gs pos="100000">
+              <a:schemeClr val="phClr">
+                <a:lumMod val="105000"/>
+                <a:satMod val="109000"/>
+                <a:tint val="81000"/>
+              </a:schemeClr>
+            </a:gs>
+          </a:gsLst>
+          <a:lin ang="5400000" scaled="0"/>
+        </a:gradFill>
+        <a:gradFill rotWithShape="1">
+          <a:gsLst>
+            <a:gs pos="0">
+              <a:schemeClr val="phClr">
+                <a:satMod val="103000"/>
+                <a:lumMod val="102000"/>
+                <a:tint val="94000"/>
+              </a:schemeClr>
+            </a:gs>
+            <a:gs pos="50000">
+              <a:schemeClr val="phClr">
+                <a:satMod val="110000"/>
+                <a:lumMod val="100000"/>
+                <a:shade val="100000"/>
+              </a:schemeClr>
+            </a:gs>
+            <a:gs pos="100000">
+              <a:schemeClr val="phClr">
+                <a:lumMod val="99000"/>
+                <a:satMod val="120000"/>
+                <a:shade val="78000"/>
+              </a:schemeClr>
+            </a:gs>
+          </a:gsLst>
+          <a:lin ang="5400000" scaled="0"/>
+        </a:gradFill>
+      </a:fillStyleLst>
+      <a:lnStyleLst>
+        <a:ln w="12700" cap="flat" cmpd="sng" algn="ctr">
+          <a:solidFill>
+            <a:schemeClr val="phClr"/>
+          </a:solidFill>
+          <a:prstDash val="solid"/>
+          <a:miter lim="800000"/>
+        </a:ln>
+        <a:ln w="19050" cap="flat" cmpd="sng" algn="ctr">
+          <a:solidFill>
+            <a:schemeClr val="phClr"/>
+          </a:solidFill>
+          <a:prstDash val="solid"/>
+          <a:miter lim="800000"/>
+        </a:ln>
+        <a:ln w="25400" cap="flat" cmpd="sng" algn="ctr">
+          <a:solidFill>
+            <a:schemeClr val="phClr"/>
+          </a:solidFill>
+          <a:prstDash val="solid"/>
+          <a:miter lim="800000"/>
+        </a:ln>
+      </a:lnStyleLst>
+      <a:effectStyleLst>
+        <a:effectStyle>
+          <a:effectLst/>
+        </a:effectStyle>
+        <a:effectStyle>
+          <a:effectLst/>
+        </a:effectStyle>
+        <a:effectStyle>
+          <a:effectLst>
+            <a:outerShdw blurRad="57150" dist="19050" dir="5400000" algn="ctr" rotWithShape="0">
+              <a:srgbClr val="000000">
+                <a:alpha val="63000"/>
+              </a:srgbClr>
+            </a:outerShdw>
+          </a:effectLst>
+        </a:effectStyle>
+      </a:effectStyleLst>
+      <a:bgFillStyleLst>
+        <a:solidFill>
+          <a:schemeClr val="phClr"/>
+        </a:solidFill>
+        <a:solidFill>
+          <a:schemeClr val="phClr">
+            <a:tint val="95000"/>
+            <a:satMod val="170000"/>
+          </a:schemeClr>
+        </a:solidFill>
+        <a:gradFill rotWithShape="1">
+          <a:gsLst>
+            <a:gs pos="0">
+              <a:schemeClr val="phClr">
+                <a:tint val="93000"/>
+                <a:satMod val="150000"/>
+                <a:shade val="98000"/>
+                <a:lumMod val="102000"/>
+              </a:schemeClr>
+            </a:gs>
+            <a:gs pos="50000">
+              <a:schemeClr val="phClr">
+                <a:tint val="98000"/>
+                <a:satMod val="130000"/>
+                <a:shade val="90000"/>
+                <a:lumMod val="103000"/>
+              </a:schemeClr>
+            </a:gs>
+            <a:gs pos="100000">
+              <a:schemeClr val="phClr">
+                <a:shade val="63000"/>
+                <a:satMod val="120000"/>
+              </a:schemeClr>
+            </a:gs>
+          </a:gsLst>
+          <a:lin ang="5400000" scaled="0"/>
+        </a:gradFill>
+      </a:bgFillStyleLst>
+    </a:fmtScheme>
+  </a:themeElements>
+  <a:objectDefaults>
+    <a:lnDef>
+      <a:spPr/>
+      <a:bodyPr/>
+      <a:lstStyle/>
+      <a:style>
+        <a:lnRef idx="2">
+          <a:schemeClr val="accent1"/>
+        </a:lnRef>
+        <a:fillRef idx="0">
+          <a:schemeClr val="accent1"/>
+        </a:fillRef>
+        <a:effectRef idx="1">
+          <a:schemeClr val="accent1"/>
+        </a:effectRef>
+        <a:fontRef idx="minor">
+          <a:schemeClr val="tx1"/>
+        </a:fontRef>
+      </a:style>
+    </a:lnDef>
+  </a:objectDefaults>
+  <a:extraClrSchemeLst/>
+  <a:extLst>
+    <a:ext uri="{05A4C25C-085E-4340-85A3-A5531E510DB2}">
+      <thm15:themeFamily xmlns:thm15="http://schemas.microsoft.com/office/thememl/2012/main" name="Office Theme" id="{2E142A2C-CD16-42D6-873A-C26D2A0506FA}" vid="{1BDDFF52-6CD6-40A5-AB3C-68EB2F1E4D0A}"/>
+    </a:ext>
+  </a:extLst>
+</a:theme>
 </file>
--- a/Asset Solution Brief Template.pptx
+++ b/Asset Solution Brief Template.pptx
@@ -137,6 +137,9 @@
         </p15:guide>
       </p15:sldGuideLst>
     </p:ext>
+    <p:ext uri="{2D200454-40CA-4A62-9FC3-DE9A4176ACB9}">
+      <p15:notesGuideLst xmlns:p15="http://schemas.microsoft.com/office/powerpoint/2012/main"/>
+    </p:ext>
   </p:extLst>
 </p:presentation>
 </file>
@@ -235,7 +238,7 @@
           <a:p>
             <a:fld id="{46EA407C-5CB9-47CF-BBBB-3982928850A3}" type="datetimeFigureOut">
               <a:rPr lang="en-US" smtClean="0"/>
-              <a:t>9/21/2026</a:t>
+              <a:t>9/22/2026</a:t>
             </a:fld>
             <a:endParaRPr lang="en-US"/>
           </a:p>
@@ -412,7 +415,7 @@
           <a:p>
             <a:fld id="{CC9BF9C6-C4C5-429D-953C-A412904A62EE}" type="datetimeFigureOut">
               <a:rPr lang="en-US" smtClean="0"/>
-              <a:t>9/21/2026</a:t>
+              <a:t>9/22/2026</a:t>
             </a:fld>
             <a:endParaRPr lang="en-US"/>
           </a:p>
@@ -1353,7 +1356,7 @@
         <p:txBody>
           <a:bodyPr/>
           <a:lstStyle>
-            <a:lvl1pPr>
+            <a:lvl1pPr marL="0" indent="0">
               <a:buNone/>
               <a:defRPr sz="1400">
                 <a:latin typeface="IBM Plex Sans" panose="020B0503050203000203" pitchFamily="34" charset="0"/>
@@ -5718,7 +5721,7 @@
         </p:nvSpPr>
         <p:spPr>
           <a:xfrm>
-            <a:off x="382681" y="1501101"/>
+            <a:off x="382681" y="1393530"/>
             <a:ext cx="429768" cy="429768"/>
           </a:xfrm>
           <a:prstGeom prst="rect">
@@ -5963,7 +5966,7 @@
         </p:nvSpPr>
         <p:spPr>
           <a:xfrm>
-            <a:off x="382681" y="2948402"/>
+            <a:off x="382681" y="2840831"/>
             <a:ext cx="429768" cy="429768"/>
           </a:xfrm>
           <a:prstGeom prst="rect">
@@ -6093,7 +6096,7 @@
         </p:nvSpPr>
         <p:spPr>
           <a:xfrm>
-            <a:off x="382681" y="4395703"/>
+            <a:off x="382681" y="4288132"/>
             <a:ext cx="429768" cy="429768"/>
           </a:xfrm>
           <a:prstGeom prst="rect">
@@ -6223,7 +6226,7 @@
         </p:nvSpPr>
         <p:spPr>
           <a:xfrm>
-            <a:off x="382681" y="5843003"/>
+            <a:off x="382681" y="5735432"/>
             <a:ext cx="429768" cy="429768"/>
           </a:xfrm>
           <a:prstGeom prst="rect">
@@ -6353,7 +6356,7 @@
         </p:nvSpPr>
         <p:spPr>
           <a:xfrm>
-            <a:off x="382681" y="7290303"/>
+            <a:off x="382681" y="7182732"/>
             <a:ext cx="429768" cy="429768"/>
           </a:xfrm>
           <a:prstGeom prst="rect">
@@ -6501,8 +6504,10 @@
                 <a:spcPts val="600"/>
               </a:spcBef>
               <a:buNone/>
-              <a:defRPr lang="en-US" sz="900" smtClean="0">
+              <a:defRPr lang="en-US" sz="900" b="1" smtClean="0">
                 <a:effectLst/>
+                <a:latin typeface="IBM Plex Sans" panose="020B0503050203000203" pitchFamily="34" charset="0"/>
+                <a:ea typeface="IBM Plex Sans JP ExtLt" panose="020B0303050203000203" pitchFamily="34" charset="-128"/>
               </a:defRPr>
             </a:lvl1pPr>
           </a:lstStyle>
@@ -6604,6 +6609,7 @@
               <a:buNone/>
               <a:defRPr lang="en-US" sz="900" smtClean="0">
                 <a:effectLst/>
+                <a:latin typeface="IBM Plex Sans" panose="020B0503050203000203" pitchFamily="34" charset="0"/>
               </a:defRPr>
             </a:lvl1pPr>
           </a:lstStyle>
@@ -6678,7 +6684,7 @@
         </p:nvSpPr>
         <p:spPr>
           <a:xfrm>
-            <a:off x="382681" y="1501101"/>
+            <a:off x="382681" y="1393528"/>
             <a:ext cx="429768" cy="429768"/>
           </a:xfrm>
           <a:prstGeom prst="rect">
@@ -6689,7 +6695,7 @@
           <a:bodyPr lIns="0" tIns="0" rIns="0" bIns="0"/>
           <a:lstStyle/>
           <a:p>
-            <a:endParaRPr lang="en-US"/>
+            <a:endParaRPr lang="en-US" dirty="0"/>
           </a:p>
         </p:txBody>
       </p:sp>
@@ -6923,7 +6929,7 @@
         </p:nvSpPr>
         <p:spPr>
           <a:xfrm>
-            <a:off x="382681" y="3020116"/>
+            <a:off x="382681" y="2912543"/>
             <a:ext cx="429768" cy="429768"/>
           </a:xfrm>
           <a:prstGeom prst="rect">
@@ -7053,7 +7059,7 @@
         </p:nvSpPr>
         <p:spPr>
           <a:xfrm>
-            <a:off x="382681" y="4533154"/>
+            <a:off x="382681" y="4425581"/>
             <a:ext cx="429768" cy="429768"/>
           </a:xfrm>
           <a:prstGeom prst="rect">
@@ -7183,7 +7189,7 @@
         </p:nvSpPr>
         <p:spPr>
           <a:xfrm>
-            <a:off x="382681" y="6052168"/>
+            <a:off x="382681" y="5944595"/>
             <a:ext cx="429768" cy="429768"/>
           </a:xfrm>
           <a:prstGeom prst="rect">
@@ -7372,8 +7378,9 @@
                 <a:spcPts val="600"/>
               </a:spcBef>
               <a:buNone/>
-              <a:defRPr lang="en-US" sz="900" smtClean="0">
+              <a:defRPr lang="en-US" sz="900" b="1" smtClean="0">
                 <a:effectLst/>
+                <a:latin typeface="IBM Plex Sans" panose="020B0503050203000203" pitchFamily="34" charset="0"/>
               </a:defRPr>
             </a:lvl1pPr>
           </a:lstStyle>
@@ -7434,6 +7441,7 @@
               <a:buNone/>
               <a:defRPr lang="en-US" sz="900" smtClean="0">
                 <a:effectLst/>
+                <a:latin typeface="IBM Plex Sans" panose="020B0503050203000203" pitchFamily="34" charset="0"/>
               </a:defRPr>
             </a:lvl1pPr>
           </a:lstStyle>
@@ -7508,7 +7516,7 @@
         </p:nvSpPr>
         <p:spPr>
           <a:xfrm>
-            <a:off x="460373" y="501650"/>
+            <a:off x="322918" y="991432"/>
             <a:ext cx="2055719" cy="502397"/>
           </a:xfrm>
           <a:prstGeom prst="rect">
@@ -7575,7 +7583,7 @@
         </p:nvSpPr>
         <p:spPr>
           <a:xfrm>
-            <a:off x="2976562" y="501368"/>
+            <a:off x="2976562" y="949573"/>
             <a:ext cx="4500003" cy="233736"/>
           </a:xfrm>
           <a:prstGeom prst="rect">
@@ -7649,7 +7657,7 @@
         </p:nvSpPr>
         <p:spPr>
           <a:xfrm>
-            <a:off x="2976562" y="770311"/>
+            <a:off x="2976562" y="1218516"/>
             <a:ext cx="4500003" cy="233736"/>
           </a:xfrm>
           <a:prstGeom prst="rect">
@@ -7723,7 +7731,7 @@
         </p:nvSpPr>
         <p:spPr>
           <a:xfrm>
-            <a:off x="2976562" y="1039254"/>
+            <a:off x="2976562" y="1487459"/>
             <a:ext cx="4500003" cy="968840"/>
           </a:xfrm>
           <a:prstGeom prst="rect">
@@ -7797,7 +7805,7 @@
         </p:nvSpPr>
         <p:spPr>
           <a:xfrm>
-            <a:off x="460375" y="1039254"/>
+            <a:off x="322920" y="1529036"/>
             <a:ext cx="2055720" cy="371193"/>
           </a:xfrm>
           <a:prstGeom prst="rect">
@@ -7865,7 +7873,7 @@
         </p:nvSpPr>
         <p:spPr>
           <a:xfrm>
-            <a:off x="460370" y="1670050"/>
+            <a:off x="322915" y="2159832"/>
             <a:ext cx="2055719" cy="502397"/>
           </a:xfrm>
           <a:prstGeom prst="rect">
@@ -7932,7 +7940,7 @@
         </p:nvSpPr>
         <p:spPr>
           <a:xfrm>
-            <a:off x="460372" y="2207654"/>
+            <a:off x="322917" y="2697718"/>
             <a:ext cx="2055720" cy="371193"/>
           </a:xfrm>
           <a:prstGeom prst="rect">
@@ -8000,7 +8008,7 @@
         </p:nvSpPr>
         <p:spPr>
           <a:xfrm>
-            <a:off x="460367" y="2838450"/>
+            <a:off x="322912" y="3328514"/>
             <a:ext cx="2055719" cy="502397"/>
           </a:xfrm>
           <a:prstGeom prst="rect">
@@ -8067,7 +8075,7 @@
         </p:nvSpPr>
         <p:spPr>
           <a:xfrm>
-            <a:off x="460369" y="3376054"/>
+            <a:off x="322914" y="3866118"/>
             <a:ext cx="2055720" cy="371193"/>
           </a:xfrm>
           <a:prstGeom prst="rect">
@@ -8135,7 +8143,7 @@
         </p:nvSpPr>
         <p:spPr>
           <a:xfrm>
-            <a:off x="460364" y="4006850"/>
+            <a:off x="322909" y="4496914"/>
             <a:ext cx="2055719" cy="502397"/>
           </a:xfrm>
           <a:prstGeom prst="rect">
@@ -8202,7 +8210,7 @@
         </p:nvSpPr>
         <p:spPr>
           <a:xfrm>
-            <a:off x="460366" y="4544454"/>
+            <a:off x="322911" y="5034518"/>
             <a:ext cx="2055720" cy="371193"/>
           </a:xfrm>
           <a:prstGeom prst="rect">
@@ -8270,7 +8278,7 @@
         </p:nvSpPr>
         <p:spPr>
           <a:xfrm>
-            <a:off x="2976562" y="2353748"/>
+            <a:off x="2976562" y="2700359"/>
             <a:ext cx="4500003" cy="233736"/>
           </a:xfrm>
           <a:prstGeom prst="rect">
@@ -8344,7 +8352,7 @@
         </p:nvSpPr>
         <p:spPr>
           <a:xfrm>
-            <a:off x="2976562" y="2622691"/>
+            <a:off x="2976562" y="2969302"/>
             <a:ext cx="4500003" cy="233736"/>
           </a:xfrm>
           <a:prstGeom prst="rect">
@@ -8418,7 +8426,7 @@
         </p:nvSpPr>
         <p:spPr>
           <a:xfrm>
-            <a:off x="2976562" y="2891634"/>
+            <a:off x="2976562" y="3238245"/>
             <a:ext cx="4500003" cy="968840"/>
           </a:xfrm>
           <a:prstGeom prst="rect">
@@ -8492,7 +8500,7 @@
         </p:nvSpPr>
         <p:spPr>
           <a:xfrm>
-            <a:off x="2976562" y="4209442"/>
+            <a:off x="2976562" y="4460436"/>
             <a:ext cx="4500003" cy="233736"/>
           </a:xfrm>
           <a:prstGeom prst="rect">
@@ -8566,7 +8574,7 @@
         </p:nvSpPr>
         <p:spPr>
           <a:xfrm>
-            <a:off x="2976562" y="4478385"/>
+            <a:off x="2976562" y="4729379"/>
             <a:ext cx="4500003" cy="233736"/>
           </a:xfrm>
           <a:prstGeom prst="rect">
@@ -8640,7 +8648,7 @@
         </p:nvSpPr>
         <p:spPr>
           <a:xfrm>
-            <a:off x="2976562" y="4747328"/>
+            <a:off x="2976562" y="4998322"/>
             <a:ext cx="4500003" cy="968840"/>
           </a:xfrm>
           <a:prstGeom prst="rect">
@@ -8714,7 +8722,7 @@
         </p:nvSpPr>
         <p:spPr>
           <a:xfrm>
-            <a:off x="2976562" y="6065136"/>
+            <a:off x="2976562" y="6214536"/>
             <a:ext cx="4500003" cy="233736"/>
           </a:xfrm>
           <a:prstGeom prst="rect">
@@ -8788,7 +8796,7 @@
         </p:nvSpPr>
         <p:spPr>
           <a:xfrm>
-            <a:off x="2976562" y="6334079"/>
+            <a:off x="2976562" y="6483479"/>
             <a:ext cx="4500003" cy="233736"/>
           </a:xfrm>
           <a:prstGeom prst="rect">
@@ -8862,7 +8870,7 @@
         </p:nvSpPr>
         <p:spPr>
           <a:xfrm>
-            <a:off x="2976562" y="6603022"/>
+            <a:off x="2976562" y="6752422"/>
             <a:ext cx="4500003" cy="968840"/>
           </a:xfrm>
           <a:prstGeom prst="rect">
@@ -8936,7 +8944,7 @@
         </p:nvSpPr>
         <p:spPr>
           <a:xfrm>
-            <a:off x="2976562" y="7920830"/>
+            <a:off x="2976562" y="7980590"/>
             <a:ext cx="4500003" cy="233736"/>
           </a:xfrm>
           <a:prstGeom prst="rect">
@@ -9010,7 +9018,7 @@
         </p:nvSpPr>
         <p:spPr>
           <a:xfrm>
-            <a:off x="2976562" y="8189773"/>
+            <a:off x="2976562" y="8249533"/>
             <a:ext cx="4500003" cy="233736"/>
           </a:xfrm>
           <a:prstGeom prst="rect">
@@ -9084,7 +9092,7 @@
         </p:nvSpPr>
         <p:spPr>
           <a:xfrm>
-            <a:off x="2976562" y="8458716"/>
+            <a:off x="2976562" y="8518476"/>
             <a:ext cx="4500003" cy="968840"/>
           </a:xfrm>
           <a:prstGeom prst="rect">
@@ -9209,6 +9217,48 @@
             <a:r>
               <a:rPr lang="en-US" dirty="0"/>
               <a:t>Asset Name</a:t>
+            </a:r>
+          </a:p>
+        </p:txBody>
+      </p:sp>
+      <p:sp>
+        <p:nvSpPr>
+          <p:cNvPr id="3" name="TextBox 2">
+            <a:extLst>
+              <a:ext uri="{FF2B5EF4-FFF2-40B4-BE49-F238E27FC236}">
+                <a16:creationId xmlns:a16="http://schemas.microsoft.com/office/drawing/2014/main" id="{3FFD70F0-85ED-1050-B369-5DDBA88E0F9E}"/>
+              </a:ext>
+            </a:extLst>
+          </p:cNvPr>
+          <p:cNvSpPr txBox="1"/>
+          <p:nvPr userDrawn="1"/>
+        </p:nvSpPr>
+        <p:spPr>
+          <a:xfrm>
+            <a:off x="382681" y="450515"/>
+            <a:ext cx="1983714" cy="246221"/>
+          </a:xfrm>
+          <a:prstGeom prst="rect">
+            <a:avLst/>
+          </a:prstGeom>
+          <a:noFill/>
+        </p:spPr>
+        <p:txBody>
+          <a:bodyPr wrap="square" lIns="0" tIns="0" rIns="0" bIns="0" rtlCol="0">
+            <a:spAutoFit/>
+          </a:bodyPr>
+          <a:lstStyle/>
+          <a:p>
+            <a:pPr>
+              <a:lnSpc>
+                <a:spcPct val="100000"/>
+              </a:lnSpc>
+            </a:pPr>
+            <a:r>
+              <a:rPr lang="en-US" sz="1600" b="0" dirty="0">
+                <a:latin typeface="IBM Plex Sans" panose="020B0503050203000203" pitchFamily="34" charset="0"/>
+              </a:rPr>
+              <a:t>Key capabilities</a:t>
             </a:r>
           </a:p>
         </p:txBody>
@@ -10426,6 +10476,48 @@
           </a:p>
         </p:txBody>
       </p:sp>
+      <p:sp>
+        <p:nvSpPr>
+          <p:cNvPr id="3" name="TextBox 2">
+            <a:extLst>
+              <a:ext uri="{FF2B5EF4-FFF2-40B4-BE49-F238E27FC236}">
+                <a16:creationId xmlns:a16="http://schemas.microsoft.com/office/drawing/2014/main" id="{845F09BB-90F9-44EA-6BB1-D47D6DB6B14C}"/>
+              </a:ext>
+            </a:extLst>
+          </p:cNvPr>
+          <p:cNvSpPr txBox="1"/>
+          <p:nvPr userDrawn="1"/>
+        </p:nvSpPr>
+        <p:spPr>
+          <a:xfrm>
+            <a:off x="382681" y="450515"/>
+            <a:ext cx="1983714" cy="246221"/>
+          </a:xfrm>
+          <a:prstGeom prst="rect">
+            <a:avLst/>
+          </a:prstGeom>
+          <a:noFill/>
+        </p:spPr>
+        <p:txBody>
+          <a:bodyPr wrap="square" lIns="0" tIns="0" rIns="0" bIns="0" rtlCol="0">
+            <a:spAutoFit/>
+          </a:bodyPr>
+          <a:lstStyle/>
+          <a:p>
+            <a:pPr>
+              <a:lnSpc>
+                <a:spcPct val="100000"/>
+              </a:lnSpc>
+            </a:pPr>
+            <a:r>
+              <a:rPr lang="en-US" sz="1600" b="0" dirty="0">
+                <a:latin typeface="IBM Plex Sans" panose="020B0503050203000203" pitchFamily="34" charset="0"/>
+              </a:rPr>
+              <a:t>Key capabilities</a:t>
+            </a:r>
+          </a:p>
+        </p:txBody>
+      </p:sp>
     </p:spTree>
     <p:extLst>
       <p:ext uri="{BB962C8B-B14F-4D97-AF65-F5344CB8AC3E}">
@@ -11431,8 +11523,8 @@
         </p:nvSpPr>
         <p:spPr>
           <a:xfrm>
-            <a:off x="352612" y="372877"/>
-            <a:ext cx="1264770" cy="215444"/>
+            <a:off x="352612" y="390805"/>
+            <a:ext cx="1444306" cy="246221"/>
           </a:xfrm>
           <a:prstGeom prst="rect">
             <a:avLst/>
@@ -11446,7 +11538,7 @@
           <a:lstStyle/>
           <a:p>
             <a:r>
-              <a:rPr lang="en-US" sz="1400" dirty="0">
+              <a:rPr lang="en-US" sz="1600" dirty="0">
                 <a:latin typeface="IBM Plex Sans" panose="020B0503050203000203" pitchFamily="34" charset="0"/>
               </a:rPr>
               <a:t>Key capabilities</a:t>
@@ -11925,8 +12017,8 @@
         </p:nvSpPr>
         <p:spPr>
           <a:xfrm>
-            <a:off x="352612" y="372877"/>
-            <a:ext cx="1264770" cy="215444"/>
+            <a:off x="352612" y="414710"/>
+            <a:ext cx="1444306" cy="246221"/>
           </a:xfrm>
           <a:prstGeom prst="rect">
             <a:avLst/>
@@ -11940,7 +12032,7 @@
           <a:lstStyle/>
           <a:p>
             <a:r>
-              <a:rPr lang="en-US" sz="1400" dirty="0">
+              <a:rPr lang="en-US" sz="1600" dirty="0">
                 <a:latin typeface="IBM Plex Sans" panose="020B0503050203000203" pitchFamily="34" charset="0"/>
               </a:rPr>
               <a:t>Key capabilities</a:t>
@@ -13011,8 +13103,8 @@
         </p:nvSpPr>
         <p:spPr>
           <a:xfrm>
-            <a:off x="352612" y="372877"/>
-            <a:ext cx="1264770" cy="215444"/>
+            <a:off x="352612" y="378853"/>
+            <a:ext cx="1444306" cy="246221"/>
           </a:xfrm>
           <a:prstGeom prst="rect">
             <a:avLst/>
@@ -13026,7 +13118,7 @@
           <a:lstStyle/>
           <a:p>
             <a:r>
-              <a:rPr lang="en-US" sz="1400" dirty="0">
+              <a:rPr lang="en-US" sz="1600" dirty="0">
                 <a:latin typeface="IBM Plex Sans" panose="020B0503050203000203" pitchFamily="34" charset="0"/>
               </a:rPr>
               <a:t>Key capabilities</a:t>
@@ -14200,7 +14292,8 @@
           <a:bodyPr/>
           <a:lstStyle/>
           <a:p>
-            <a:endParaRPr lang="en-US"/>
+            <a:pPr marL="0" indent="0"/>
+            <a:endParaRPr lang="en-US" dirty="0"/>
           </a:p>
         </p:txBody>
       </p:sp>

--- a/Asset Solution Brief Template.pptx
+++ b/Asset Solution Brief Template.pptx
@@ -238,7 +238,7 @@
           <a:p>
             <a:fld id="{46EA407C-5CB9-47CF-BBBB-3982928850A3}" type="datetimeFigureOut">
               <a:rPr lang="en-US" smtClean="0"/>
-              <a:t>9/22/2026</a:t>
+              <a:t>9/23/2026</a:t>
             </a:fld>
             <a:endParaRPr lang="en-US"/>
           </a:p>
@@ -415,7 +415,7 @@
           <a:p>
             <a:fld id="{CC9BF9C6-C4C5-429D-953C-A412904A62EE}" type="datetimeFigureOut">
               <a:rPr lang="en-US" smtClean="0"/>
-              <a:t>9/22/2026</a:t>
+              <a:t>9/23/2026</a:t>
             </a:fld>
             <a:endParaRPr lang="en-US"/>
           </a:p>
@@ -2513,14 +2513,16 @@
         <p:spPr>
           <a:xfrm>
             <a:off x="3045486" y="605123"/>
-            <a:ext cx="4439753" cy="1474048"/>
+            <a:ext cx="4439753" cy="553998"/>
           </a:xfrm>
           <a:prstGeom prst="rect">
             <a:avLst/>
           </a:prstGeom>
         </p:spPr>
         <p:txBody>
-          <a:bodyPr lIns="0" tIns="0" rIns="0" bIns="0"/>
+          <a:bodyPr lIns="0" tIns="0" rIns="0" bIns="0">
+            <a:spAutoFit/>
+          </a:bodyPr>
           <a:lstStyle>
             <a:lvl1pPr marL="0" indent="0">
               <a:lnSpc>
@@ -2560,14 +2562,16 @@
         <p:spPr>
           <a:xfrm>
             <a:off x="3045483" y="2280775"/>
-            <a:ext cx="4439753" cy="295755"/>
+            <a:ext cx="4439753" cy="276999"/>
           </a:xfrm>
           <a:prstGeom prst="rect">
             <a:avLst/>
           </a:prstGeom>
         </p:spPr>
         <p:txBody>
-          <a:bodyPr lIns="0" tIns="0" rIns="0" bIns="0"/>
+          <a:bodyPr lIns="0" tIns="0" rIns="0" bIns="0">
+            <a:spAutoFit/>
+          </a:bodyPr>
           <a:lstStyle>
             <a:lvl1pPr marL="0" indent="0">
               <a:lnSpc>
@@ -5107,7 +5111,7 @@
         <p:spPr>
           <a:xfrm>
             <a:off x="3043238" y="3238499"/>
-            <a:ext cx="4422274" cy="1082401"/>
+            <a:ext cx="4422274" cy="276999"/>
           </a:xfrm>
           <a:prstGeom prst="rect">
             <a:avLst/>
@@ -5115,7 +5119,7 @@
         </p:spPr>
         <p:txBody>
           <a:bodyPr lIns="0" tIns="0" rIns="0" bIns="0">
-            <a:noAutofit/>
+            <a:spAutoFit/>
           </a:bodyPr>
           <a:lstStyle>
             <a:lvl1pPr marL="0" indent="0">
@@ -5185,7 +5189,7 @@
         <p:spPr>
           <a:xfrm>
             <a:off x="3043238" y="4431795"/>
-            <a:ext cx="4422274" cy="432726"/>
+            <a:ext cx="4422274" cy="415498"/>
           </a:xfrm>
           <a:prstGeom prst="rect">
             <a:avLst/>
@@ -5193,7 +5197,7 @@
         </p:spPr>
         <p:txBody>
           <a:bodyPr lIns="0" tIns="0" rIns="0" bIns="0">
-            <a:noAutofit/>
+            <a:spAutoFit/>
           </a:bodyPr>
           <a:lstStyle>
             <a:lvl1pPr marL="0" indent="0">
@@ -5271,7 +5275,7 @@
         <p:spPr>
           <a:xfrm>
             <a:off x="3043238" y="4975415"/>
-            <a:ext cx="4422274" cy="1867644"/>
+            <a:ext cx="4422274" cy="415498"/>
           </a:xfrm>
           <a:prstGeom prst="rect">
             <a:avLst/>
@@ -5279,7 +5283,7 @@
         </p:spPr>
         <p:txBody>
           <a:bodyPr lIns="0" tIns="0" rIns="0" bIns="0">
-            <a:noAutofit/>
+            <a:spAutoFit/>
           </a:bodyPr>
           <a:lstStyle>
             <a:lvl1pPr marL="0" indent="0">
@@ -5348,7 +5352,7 @@
         <p:spPr>
           <a:xfrm>
             <a:off x="3043238" y="1415471"/>
-            <a:ext cx="4422274" cy="700200"/>
+            <a:ext cx="4422274" cy="369332"/>
           </a:xfrm>
           <a:prstGeom prst="rect">
             <a:avLst/>
@@ -5356,7 +5360,7 @@
         </p:spPr>
         <p:txBody>
           <a:bodyPr lIns="0" tIns="0" rIns="0" bIns="0">
-            <a:noAutofit/>
+            <a:spAutoFit/>
           </a:bodyPr>
           <a:lstStyle>
             <a:lvl1pPr marL="0" indent="0">
@@ -5598,7 +5602,7 @@
         <p:spPr>
           <a:xfrm>
             <a:off x="3043238" y="2252302"/>
-            <a:ext cx="4422274" cy="636250"/>
+            <a:ext cx="4422274" cy="646331"/>
           </a:xfrm>
           <a:prstGeom prst="rect">
             <a:avLst/>
@@ -5606,7 +5610,7 @@
         </p:spPr>
         <p:txBody>
           <a:bodyPr lIns="0" tIns="0" rIns="0" bIns="0">
-            <a:noAutofit/>
+            <a:spAutoFit/>
           </a:bodyPr>
           <a:lstStyle>
             <a:lvl1pPr marL="0" indent="0">
@@ -5797,14 +5801,16 @@
         <p:spPr>
           <a:xfrm>
             <a:off x="3045486" y="961836"/>
-            <a:ext cx="4439753" cy="1039910"/>
+            <a:ext cx="4439753" cy="138499"/>
           </a:xfrm>
           <a:prstGeom prst="rect">
             <a:avLst/>
           </a:prstGeom>
         </p:spPr>
         <p:txBody>
-          <a:bodyPr lIns="0" tIns="0" rIns="0" bIns="0"/>
+          <a:bodyPr lIns="0" tIns="0" rIns="0" bIns="0">
+            <a:spAutoFit/>
+          </a:bodyPr>
           <a:lstStyle>
             <a:lvl1pPr marL="0" indent="0">
               <a:lnSpc>
@@ -5920,14 +5926,16 @@
         <p:spPr>
           <a:xfrm>
             <a:off x="382680" y="961836"/>
-            <a:ext cx="2278457" cy="457201"/>
+            <a:ext cx="2278457" cy="215444"/>
           </a:xfrm>
           <a:prstGeom prst="rect">
             <a:avLst/>
           </a:prstGeom>
         </p:spPr>
         <p:txBody>
-          <a:bodyPr lIns="0" tIns="0" rIns="0" bIns="0"/>
+          <a:bodyPr lIns="0" tIns="0" rIns="0" bIns="0">
+            <a:spAutoFit/>
+          </a:bodyPr>
           <a:lstStyle>
             <a:lvl1pPr marL="0" indent="0">
               <a:lnSpc>
@@ -6000,14 +6008,16 @@
         <p:spPr>
           <a:xfrm>
             <a:off x="3045486" y="2429659"/>
-            <a:ext cx="4439753" cy="1039910"/>
+            <a:ext cx="4439753" cy="138499"/>
           </a:xfrm>
           <a:prstGeom prst="rect">
             <a:avLst/>
           </a:prstGeom>
         </p:spPr>
         <p:txBody>
-          <a:bodyPr lIns="0" tIns="0" rIns="0" bIns="0"/>
+          <a:bodyPr lIns="0" tIns="0" rIns="0" bIns="0">
+            <a:spAutoFit/>
+          </a:bodyPr>
           <a:lstStyle>
             <a:lvl1pPr marL="0" indent="0">
               <a:lnSpc>
@@ -6050,14 +6060,16 @@
         <p:spPr>
           <a:xfrm>
             <a:off x="382680" y="2429659"/>
-            <a:ext cx="2278457" cy="457201"/>
+            <a:ext cx="2278457" cy="215444"/>
           </a:xfrm>
           <a:prstGeom prst="rect">
             <a:avLst/>
           </a:prstGeom>
         </p:spPr>
         <p:txBody>
-          <a:bodyPr lIns="0" tIns="0" rIns="0" bIns="0"/>
+          <a:bodyPr lIns="0" tIns="0" rIns="0" bIns="0">
+            <a:spAutoFit/>
+          </a:bodyPr>
           <a:lstStyle>
             <a:lvl1pPr marL="0" indent="0">
               <a:lnSpc>
@@ -6130,14 +6142,16 @@
         <p:spPr>
           <a:xfrm>
             <a:off x="3045486" y="3862685"/>
-            <a:ext cx="4439753" cy="1039910"/>
+            <a:ext cx="4439753" cy="138499"/>
           </a:xfrm>
           <a:prstGeom prst="rect">
             <a:avLst/>
           </a:prstGeom>
         </p:spPr>
         <p:txBody>
-          <a:bodyPr lIns="0" tIns="0" rIns="0" bIns="0"/>
+          <a:bodyPr lIns="0" tIns="0" rIns="0" bIns="0">
+            <a:spAutoFit/>
+          </a:bodyPr>
           <a:lstStyle>
             <a:lvl1pPr marL="0" indent="0">
               <a:lnSpc>
@@ -6180,14 +6194,16 @@
         <p:spPr>
           <a:xfrm>
             <a:off x="382680" y="3862685"/>
-            <a:ext cx="2278457" cy="457201"/>
+            <a:ext cx="2278457" cy="215444"/>
           </a:xfrm>
           <a:prstGeom prst="rect">
             <a:avLst/>
           </a:prstGeom>
         </p:spPr>
         <p:txBody>
-          <a:bodyPr lIns="0" tIns="0" rIns="0" bIns="0"/>
+          <a:bodyPr lIns="0" tIns="0" rIns="0" bIns="0">
+            <a:spAutoFit/>
+          </a:bodyPr>
           <a:lstStyle>
             <a:lvl1pPr marL="0" indent="0">
               <a:lnSpc>
@@ -6260,14 +6276,16 @@
         <p:spPr>
           <a:xfrm>
             <a:off x="3045486" y="5309949"/>
-            <a:ext cx="4439753" cy="1039910"/>
+            <a:ext cx="4439753" cy="138499"/>
           </a:xfrm>
           <a:prstGeom prst="rect">
             <a:avLst/>
           </a:prstGeom>
         </p:spPr>
         <p:txBody>
-          <a:bodyPr lIns="0" tIns="0" rIns="0" bIns="0"/>
+          <a:bodyPr lIns="0" tIns="0" rIns="0" bIns="0">
+            <a:spAutoFit/>
+          </a:bodyPr>
           <a:lstStyle>
             <a:lvl1pPr marL="0" indent="0">
               <a:lnSpc>
@@ -6310,14 +6328,16 @@
         <p:spPr>
           <a:xfrm>
             <a:off x="382680" y="5309949"/>
-            <a:ext cx="2278457" cy="457201"/>
+            <a:ext cx="2278457" cy="215444"/>
           </a:xfrm>
           <a:prstGeom prst="rect">
             <a:avLst/>
           </a:prstGeom>
         </p:spPr>
         <p:txBody>
-          <a:bodyPr lIns="0" tIns="0" rIns="0" bIns="0"/>
+          <a:bodyPr lIns="0" tIns="0" rIns="0" bIns="0">
+            <a:spAutoFit/>
+          </a:bodyPr>
           <a:lstStyle>
             <a:lvl1pPr marL="0" indent="0">
               <a:lnSpc>
@@ -6390,14 +6410,16 @@
         <p:spPr>
           <a:xfrm>
             <a:off x="3045486" y="6751038"/>
-            <a:ext cx="4439753" cy="1039910"/>
+            <a:ext cx="4439753" cy="138499"/>
           </a:xfrm>
           <a:prstGeom prst="rect">
             <a:avLst/>
           </a:prstGeom>
         </p:spPr>
         <p:txBody>
-          <a:bodyPr lIns="0" tIns="0" rIns="0" bIns="0"/>
+          <a:bodyPr lIns="0" tIns="0" rIns="0" bIns="0">
+            <a:spAutoFit/>
+          </a:bodyPr>
           <a:lstStyle>
             <a:lvl1pPr marL="0" indent="0">
               <a:lnSpc>
@@ -6440,14 +6462,16 @@
         <p:spPr>
           <a:xfrm>
             <a:off x="382680" y="6751038"/>
-            <a:ext cx="2278457" cy="457201"/>
+            <a:ext cx="2278457" cy="215444"/>
           </a:xfrm>
           <a:prstGeom prst="rect">
             <a:avLst/>
           </a:prstGeom>
         </p:spPr>
         <p:txBody>
-          <a:bodyPr lIns="0" tIns="0" rIns="0" bIns="0"/>
+          <a:bodyPr lIns="0" tIns="0" rIns="0" bIns="0">
+            <a:spAutoFit/>
+          </a:bodyPr>
           <a:lstStyle>
             <a:lvl1pPr marL="0" indent="0">
               <a:lnSpc>
@@ -6487,14 +6511,16 @@
         <p:spPr>
           <a:xfrm>
             <a:off x="3045485" y="8412714"/>
-            <a:ext cx="4439753" cy="312931"/>
+            <a:ext cx="4439753" cy="276999"/>
           </a:xfrm>
           <a:prstGeom prst="rect">
             <a:avLst/>
           </a:prstGeom>
         </p:spPr>
         <p:txBody>
-          <a:bodyPr lIns="0" tIns="0" rIns="0" bIns="0"/>
+          <a:bodyPr lIns="0" tIns="0" rIns="0" bIns="0">
+            <a:spAutoFit/>
+          </a:bodyPr>
           <a:lstStyle>
             <a:lvl1pPr marL="0" indent="0">
               <a:lnSpc>
@@ -6590,14 +6616,16 @@
         <p:spPr>
           <a:xfrm>
             <a:off x="3045484" y="8760318"/>
-            <a:ext cx="4439753" cy="640670"/>
+            <a:ext cx="4439753" cy="276999"/>
           </a:xfrm>
           <a:prstGeom prst="rect">
             <a:avLst/>
           </a:prstGeom>
         </p:spPr>
         <p:txBody>
-          <a:bodyPr lIns="0" tIns="0" rIns="0" bIns="0"/>
+          <a:bodyPr lIns="0" tIns="0" rIns="0" bIns="0">
+            <a:spAutoFit/>
+          </a:bodyPr>
           <a:lstStyle>
             <a:lvl1pPr marL="0" indent="0">
               <a:lnSpc>
@@ -6760,14 +6788,16 @@
         <p:spPr>
           <a:xfrm>
             <a:off x="3045486" y="961836"/>
-            <a:ext cx="4439753" cy="1039910"/>
+            <a:ext cx="4439753" cy="138499"/>
           </a:xfrm>
           <a:prstGeom prst="rect">
             <a:avLst/>
           </a:prstGeom>
         </p:spPr>
         <p:txBody>
-          <a:bodyPr lIns="0" tIns="0" rIns="0" bIns="0"/>
+          <a:bodyPr lIns="0" tIns="0" rIns="0" bIns="0">
+            <a:spAutoFit/>
+          </a:bodyPr>
           <a:lstStyle>
             <a:lvl1pPr marL="0" indent="0">
               <a:lnSpc>
@@ -6883,14 +6913,16 @@
         <p:spPr>
           <a:xfrm>
             <a:off x="382680" y="961836"/>
-            <a:ext cx="2278457" cy="457201"/>
+            <a:ext cx="2278457" cy="215444"/>
           </a:xfrm>
           <a:prstGeom prst="rect">
             <a:avLst/>
           </a:prstGeom>
         </p:spPr>
         <p:txBody>
-          <a:bodyPr lIns="0" tIns="0" rIns="0" bIns="0"/>
+          <a:bodyPr lIns="0" tIns="0" rIns="0" bIns="0">
+            <a:spAutoFit/>
+          </a:bodyPr>
           <a:lstStyle>
             <a:lvl1pPr marL="0" indent="0">
               <a:lnSpc>
@@ -6963,14 +6995,16 @@
         <p:spPr>
           <a:xfrm>
             <a:off x="3045486" y="2501373"/>
-            <a:ext cx="4439753" cy="1039910"/>
+            <a:ext cx="4439753" cy="138499"/>
           </a:xfrm>
           <a:prstGeom prst="rect">
             <a:avLst/>
           </a:prstGeom>
         </p:spPr>
         <p:txBody>
-          <a:bodyPr lIns="0" tIns="0" rIns="0" bIns="0"/>
+          <a:bodyPr lIns="0" tIns="0" rIns="0" bIns="0">
+            <a:spAutoFit/>
+          </a:bodyPr>
           <a:lstStyle>
             <a:lvl1pPr marL="0" indent="0">
               <a:lnSpc>
@@ -7013,14 +7047,16 @@
         <p:spPr>
           <a:xfrm>
             <a:off x="382680" y="2501373"/>
-            <a:ext cx="2278457" cy="457201"/>
+            <a:ext cx="2278457" cy="215444"/>
           </a:xfrm>
           <a:prstGeom prst="rect">
             <a:avLst/>
           </a:prstGeom>
         </p:spPr>
         <p:txBody>
-          <a:bodyPr lIns="0" tIns="0" rIns="0" bIns="0"/>
+          <a:bodyPr lIns="0" tIns="0" rIns="0" bIns="0">
+            <a:spAutoFit/>
+          </a:bodyPr>
           <a:lstStyle>
             <a:lvl1pPr marL="0" indent="0">
               <a:lnSpc>
@@ -7093,14 +7129,16 @@
         <p:spPr>
           <a:xfrm>
             <a:off x="3045486" y="4000136"/>
-            <a:ext cx="4439753" cy="1039910"/>
+            <a:ext cx="4439753" cy="138499"/>
           </a:xfrm>
           <a:prstGeom prst="rect">
             <a:avLst/>
           </a:prstGeom>
         </p:spPr>
         <p:txBody>
-          <a:bodyPr lIns="0" tIns="0" rIns="0" bIns="0"/>
+          <a:bodyPr lIns="0" tIns="0" rIns="0" bIns="0">
+            <a:spAutoFit/>
+          </a:bodyPr>
           <a:lstStyle>
             <a:lvl1pPr marL="0" indent="0">
               <a:lnSpc>
@@ -7143,14 +7181,16 @@
         <p:spPr>
           <a:xfrm>
             <a:off x="382680" y="4000136"/>
-            <a:ext cx="2278457" cy="457201"/>
+            <a:ext cx="2278457" cy="215444"/>
           </a:xfrm>
           <a:prstGeom prst="rect">
             <a:avLst/>
           </a:prstGeom>
         </p:spPr>
         <p:txBody>
-          <a:bodyPr lIns="0" tIns="0" rIns="0" bIns="0"/>
+          <a:bodyPr lIns="0" tIns="0" rIns="0" bIns="0">
+            <a:spAutoFit/>
+          </a:bodyPr>
           <a:lstStyle>
             <a:lvl1pPr marL="0" indent="0">
               <a:lnSpc>
@@ -7223,14 +7263,16 @@
         <p:spPr>
           <a:xfrm>
             <a:off x="3045486" y="5519114"/>
-            <a:ext cx="4439753" cy="1039910"/>
+            <a:ext cx="4439753" cy="138499"/>
           </a:xfrm>
           <a:prstGeom prst="rect">
             <a:avLst/>
           </a:prstGeom>
         </p:spPr>
         <p:txBody>
-          <a:bodyPr lIns="0" tIns="0" rIns="0" bIns="0"/>
+          <a:bodyPr lIns="0" tIns="0" rIns="0" bIns="0">
+            <a:spAutoFit/>
+          </a:bodyPr>
           <a:lstStyle>
             <a:lvl1pPr marL="0" indent="0">
               <a:lnSpc>
@@ -7273,14 +7315,16 @@
         <p:spPr>
           <a:xfrm>
             <a:off x="382680" y="5519114"/>
-            <a:ext cx="2278457" cy="457201"/>
+            <a:ext cx="2278457" cy="215444"/>
           </a:xfrm>
           <a:prstGeom prst="rect">
             <a:avLst/>
           </a:prstGeom>
         </p:spPr>
         <p:txBody>
-          <a:bodyPr lIns="0" tIns="0" rIns="0" bIns="0"/>
+          <a:bodyPr lIns="0" tIns="0" rIns="0" bIns="0">
+            <a:spAutoFit/>
+          </a:bodyPr>
           <a:lstStyle>
             <a:lvl1pPr marL="0" indent="0">
               <a:lnSpc>
@@ -7361,14 +7405,16 @@
         <p:spPr>
           <a:xfrm>
             <a:off x="3045485" y="7552105"/>
-            <a:ext cx="4439753" cy="312931"/>
+            <a:ext cx="4439753" cy="276999"/>
           </a:xfrm>
           <a:prstGeom prst="rect">
             <a:avLst/>
           </a:prstGeom>
         </p:spPr>
         <p:txBody>
-          <a:bodyPr lIns="0" tIns="0" rIns="0" bIns="0"/>
+          <a:bodyPr lIns="0" tIns="0" rIns="0" bIns="0">
+            <a:spAutoFit/>
+          </a:bodyPr>
           <a:lstStyle>
             <a:lvl1pPr marL="0" indent="0">
               <a:lnSpc>
@@ -7422,14 +7468,16 @@
         <p:spPr>
           <a:xfrm>
             <a:off x="3045484" y="7899709"/>
-            <a:ext cx="4439753" cy="652620"/>
+            <a:ext cx="4439753" cy="276999"/>
           </a:xfrm>
           <a:prstGeom prst="rect">
             <a:avLst/>
           </a:prstGeom>
         </p:spPr>
         <p:txBody>
-          <a:bodyPr lIns="0" tIns="0" rIns="0" bIns="0"/>
+          <a:bodyPr lIns="0" tIns="0" rIns="0" bIns="0">
+            <a:spAutoFit/>
+          </a:bodyPr>
           <a:lstStyle>
             <a:lvl1pPr marL="0" indent="0">
               <a:lnSpc>
@@ -7584,14 +7632,16 @@
         <p:spPr>
           <a:xfrm>
             <a:off x="2976562" y="949573"/>
-            <a:ext cx="4500003" cy="233736"/>
+            <a:ext cx="4500003" cy="261610"/>
           </a:xfrm>
           <a:prstGeom prst="rect">
             <a:avLst/>
           </a:prstGeom>
         </p:spPr>
         <p:txBody>
-          <a:bodyPr/>
+          <a:bodyPr>
+            <a:spAutoFit/>
+          </a:bodyPr>
           <a:lstStyle>
             <a:lvl1pPr marL="0" indent="0">
               <a:lnSpc>
@@ -7658,14 +7708,16 @@
         <p:spPr>
           <a:xfrm>
             <a:off x="2976562" y="1218516"/>
-            <a:ext cx="4500003" cy="233736"/>
+            <a:ext cx="4500003" cy="261610"/>
           </a:xfrm>
           <a:prstGeom prst="rect">
             <a:avLst/>
           </a:prstGeom>
         </p:spPr>
         <p:txBody>
-          <a:bodyPr/>
+          <a:bodyPr>
+            <a:spAutoFit/>
+          </a:bodyPr>
           <a:lstStyle>
             <a:lvl1pPr marL="0" indent="0">
               <a:lnSpc>
@@ -7732,14 +7784,16 @@
         <p:spPr>
           <a:xfrm>
             <a:off x="2976562" y="1487459"/>
-            <a:ext cx="4500003" cy="968840"/>
+            <a:ext cx="4500003" cy="230832"/>
           </a:xfrm>
           <a:prstGeom prst="rect">
             <a:avLst/>
           </a:prstGeom>
         </p:spPr>
         <p:txBody>
-          <a:bodyPr/>
+          <a:bodyPr>
+            <a:spAutoFit/>
+          </a:bodyPr>
           <a:lstStyle>
             <a:lvl1pPr marL="0" indent="0">
               <a:lnSpc>
@@ -7806,14 +7860,16 @@
         <p:spPr>
           <a:xfrm>
             <a:off x="322920" y="1529036"/>
-            <a:ext cx="2055720" cy="371193"/>
+            <a:ext cx="2055720" cy="216982"/>
           </a:xfrm>
           <a:prstGeom prst="rect">
             <a:avLst/>
           </a:prstGeom>
         </p:spPr>
         <p:txBody>
-          <a:bodyPr/>
+          <a:bodyPr>
+            <a:spAutoFit/>
+          </a:bodyPr>
           <a:lstStyle>
             <a:lvl1pPr marL="0" indent="0">
               <a:buNone/>
@@ -7941,14 +7997,16 @@
         <p:spPr>
           <a:xfrm>
             <a:off x="322917" y="2697718"/>
-            <a:ext cx="2055720" cy="371193"/>
+            <a:ext cx="2055720" cy="216982"/>
           </a:xfrm>
           <a:prstGeom prst="rect">
             <a:avLst/>
           </a:prstGeom>
         </p:spPr>
         <p:txBody>
-          <a:bodyPr/>
+          <a:bodyPr>
+            <a:spAutoFit/>
+          </a:bodyPr>
           <a:lstStyle>
             <a:lvl1pPr marL="0" indent="0">
               <a:buNone/>
@@ -8076,14 +8134,16 @@
         <p:spPr>
           <a:xfrm>
             <a:off x="322914" y="3866118"/>
-            <a:ext cx="2055720" cy="371193"/>
+            <a:ext cx="2055720" cy="216982"/>
           </a:xfrm>
           <a:prstGeom prst="rect">
             <a:avLst/>
           </a:prstGeom>
         </p:spPr>
         <p:txBody>
-          <a:bodyPr/>
+          <a:bodyPr>
+            <a:spAutoFit/>
+          </a:bodyPr>
           <a:lstStyle>
             <a:lvl1pPr marL="0" indent="0">
               <a:buNone/>
@@ -8211,14 +8271,16 @@
         <p:spPr>
           <a:xfrm>
             <a:off x="322911" y="5034518"/>
-            <a:ext cx="2055720" cy="371193"/>
+            <a:ext cx="2055720" cy="216982"/>
           </a:xfrm>
           <a:prstGeom prst="rect">
             <a:avLst/>
           </a:prstGeom>
         </p:spPr>
         <p:txBody>
-          <a:bodyPr/>
+          <a:bodyPr>
+            <a:spAutoFit/>
+          </a:bodyPr>
           <a:lstStyle>
             <a:lvl1pPr marL="0" indent="0">
               <a:buNone/>
@@ -8279,14 +8341,16 @@
         <p:spPr>
           <a:xfrm>
             <a:off x="2976562" y="2700359"/>
-            <a:ext cx="4500003" cy="233736"/>
+            <a:ext cx="4500003" cy="261610"/>
           </a:xfrm>
           <a:prstGeom prst="rect">
             <a:avLst/>
           </a:prstGeom>
         </p:spPr>
         <p:txBody>
-          <a:bodyPr/>
+          <a:bodyPr>
+            <a:spAutoFit/>
+          </a:bodyPr>
           <a:lstStyle>
             <a:lvl1pPr marL="0" indent="0">
               <a:lnSpc>
@@ -8353,14 +8417,16 @@
         <p:spPr>
           <a:xfrm>
             <a:off x="2976562" y="2969302"/>
-            <a:ext cx="4500003" cy="233736"/>
+            <a:ext cx="4500003" cy="261610"/>
           </a:xfrm>
           <a:prstGeom prst="rect">
             <a:avLst/>
           </a:prstGeom>
         </p:spPr>
         <p:txBody>
-          <a:bodyPr/>
+          <a:bodyPr>
+            <a:spAutoFit/>
+          </a:bodyPr>
           <a:lstStyle>
             <a:lvl1pPr marL="0" indent="0">
               <a:lnSpc>
@@ -8427,14 +8493,16 @@
         <p:spPr>
           <a:xfrm>
             <a:off x="2976562" y="3238245"/>
-            <a:ext cx="4500003" cy="968840"/>
+            <a:ext cx="4500003" cy="230832"/>
           </a:xfrm>
           <a:prstGeom prst="rect">
             <a:avLst/>
           </a:prstGeom>
         </p:spPr>
         <p:txBody>
-          <a:bodyPr/>
+          <a:bodyPr>
+            <a:spAutoFit/>
+          </a:bodyPr>
           <a:lstStyle>
             <a:lvl1pPr marL="0" indent="0">
               <a:lnSpc>
@@ -8501,14 +8569,16 @@
         <p:spPr>
           <a:xfrm>
             <a:off x="2976562" y="4460436"/>
-            <a:ext cx="4500003" cy="233736"/>
+            <a:ext cx="4500003" cy="261610"/>
           </a:xfrm>
           <a:prstGeom prst="rect">
             <a:avLst/>
           </a:prstGeom>
         </p:spPr>
         <p:txBody>
-          <a:bodyPr/>
+          <a:bodyPr>
+            <a:spAutoFit/>
+          </a:bodyPr>
           <a:lstStyle>
             <a:lvl1pPr marL="0" indent="0">
               <a:lnSpc>
@@ -8575,14 +8645,16 @@
         <p:spPr>
           <a:xfrm>
             <a:off x="2976562" y="4729379"/>
-            <a:ext cx="4500003" cy="233736"/>
+            <a:ext cx="4500003" cy="261610"/>
           </a:xfrm>
           <a:prstGeom prst="rect">
             <a:avLst/>
           </a:prstGeom>
         </p:spPr>
         <p:txBody>
-          <a:bodyPr/>
+          <a:bodyPr>
+            <a:spAutoFit/>
+          </a:bodyPr>
           <a:lstStyle>
             <a:lvl1pPr marL="0" indent="0">
               <a:lnSpc>
@@ -8649,14 +8721,16 @@
         <p:spPr>
           <a:xfrm>
             <a:off x="2976562" y="4998322"/>
-            <a:ext cx="4500003" cy="968840"/>
+            <a:ext cx="4500003" cy="230832"/>
           </a:xfrm>
           <a:prstGeom prst="rect">
             <a:avLst/>
           </a:prstGeom>
         </p:spPr>
         <p:txBody>
-          <a:bodyPr/>
+          <a:bodyPr>
+            <a:spAutoFit/>
+          </a:bodyPr>
           <a:lstStyle>
             <a:lvl1pPr marL="0" indent="0">
               <a:lnSpc>
@@ -8723,14 +8797,16 @@
         <p:spPr>
           <a:xfrm>
             <a:off x="2976562" y="6214536"/>
-            <a:ext cx="4500003" cy="233736"/>
+            <a:ext cx="4500003" cy="261610"/>
           </a:xfrm>
           <a:prstGeom prst="rect">
             <a:avLst/>
           </a:prstGeom>
         </p:spPr>
         <p:txBody>
-          <a:bodyPr/>
+          <a:bodyPr>
+            <a:spAutoFit/>
+          </a:bodyPr>
           <a:lstStyle>
             <a:lvl1pPr marL="0" indent="0">
               <a:lnSpc>
@@ -8797,14 +8873,16 @@
         <p:spPr>
           <a:xfrm>
             <a:off x="2976562" y="6483479"/>
-            <a:ext cx="4500003" cy="233736"/>
+            <a:ext cx="4500003" cy="261610"/>
           </a:xfrm>
           <a:prstGeom prst="rect">
             <a:avLst/>
           </a:prstGeom>
         </p:spPr>
         <p:txBody>
-          <a:bodyPr/>
+          <a:bodyPr>
+            <a:spAutoFit/>
+          </a:bodyPr>
           <a:lstStyle>
             <a:lvl1pPr marL="0" indent="0">
               <a:lnSpc>
@@ -8871,14 +8949,16 @@
         <p:spPr>
           <a:xfrm>
             <a:off x="2976562" y="6752422"/>
-            <a:ext cx="4500003" cy="968840"/>
+            <a:ext cx="4500003" cy="230832"/>
           </a:xfrm>
           <a:prstGeom prst="rect">
             <a:avLst/>
           </a:prstGeom>
         </p:spPr>
         <p:txBody>
-          <a:bodyPr/>
+          <a:bodyPr>
+            <a:spAutoFit/>
+          </a:bodyPr>
           <a:lstStyle>
             <a:lvl1pPr marL="0" indent="0">
               <a:lnSpc>
@@ -8945,14 +9025,16 @@
         <p:spPr>
           <a:xfrm>
             <a:off x="2976562" y="7980590"/>
-            <a:ext cx="4500003" cy="233736"/>
+            <a:ext cx="4500003" cy="261610"/>
           </a:xfrm>
           <a:prstGeom prst="rect">
             <a:avLst/>
           </a:prstGeom>
         </p:spPr>
         <p:txBody>
-          <a:bodyPr/>
+          <a:bodyPr>
+            <a:spAutoFit/>
+          </a:bodyPr>
           <a:lstStyle>
             <a:lvl1pPr marL="0" indent="0">
               <a:lnSpc>
@@ -9019,14 +9101,16 @@
         <p:spPr>
           <a:xfrm>
             <a:off x="2976562" y="8249533"/>
-            <a:ext cx="4500003" cy="233736"/>
+            <a:ext cx="4500003" cy="261610"/>
           </a:xfrm>
           <a:prstGeom prst="rect">
             <a:avLst/>
           </a:prstGeom>
         </p:spPr>
         <p:txBody>
-          <a:bodyPr/>
+          <a:bodyPr>
+            <a:spAutoFit/>
+          </a:bodyPr>
           <a:lstStyle>
             <a:lvl1pPr marL="0" indent="0">
               <a:lnSpc>
@@ -9093,14 +9177,16 @@
         <p:spPr>
           <a:xfrm>
             <a:off x="2976562" y="8518476"/>
-            <a:ext cx="4500003" cy="968840"/>
+            <a:ext cx="4500003" cy="230832"/>
           </a:xfrm>
           <a:prstGeom prst="rect">
             <a:avLst/>
           </a:prstGeom>
         </p:spPr>
         <p:txBody>
-          <a:bodyPr/>
+          <a:bodyPr>
+            <a:spAutoFit/>
+          </a:bodyPr>
           <a:lstStyle>
             <a:lvl1pPr marL="0" indent="0">
               <a:lnSpc>
@@ -9312,14 +9398,16 @@
         <p:spPr>
           <a:xfrm>
             <a:off x="2976562" y="501368"/>
-            <a:ext cx="4500003" cy="233736"/>
+            <a:ext cx="4500003" cy="261610"/>
           </a:xfrm>
           <a:prstGeom prst="rect">
             <a:avLst/>
           </a:prstGeom>
         </p:spPr>
         <p:txBody>
-          <a:bodyPr/>
+          <a:bodyPr>
+            <a:spAutoFit/>
+          </a:bodyPr>
           <a:lstStyle>
             <a:lvl1pPr marL="0" indent="0">
               <a:lnSpc>
@@ -9386,14 +9474,16 @@
         <p:spPr>
           <a:xfrm>
             <a:off x="2976562" y="770311"/>
-            <a:ext cx="4500003" cy="233736"/>
+            <a:ext cx="4500003" cy="261610"/>
           </a:xfrm>
           <a:prstGeom prst="rect">
             <a:avLst/>
           </a:prstGeom>
         </p:spPr>
         <p:txBody>
-          <a:bodyPr/>
+          <a:bodyPr>
+            <a:spAutoFit/>
+          </a:bodyPr>
           <a:lstStyle>
             <a:lvl1pPr marL="0" indent="0">
               <a:lnSpc>
@@ -9460,14 +9550,16 @@
         <p:spPr>
           <a:xfrm>
             <a:off x="2976562" y="1039254"/>
-            <a:ext cx="4500003" cy="968840"/>
+            <a:ext cx="4500003" cy="230832"/>
           </a:xfrm>
           <a:prstGeom prst="rect">
             <a:avLst/>
           </a:prstGeom>
         </p:spPr>
         <p:txBody>
-          <a:bodyPr/>
+          <a:bodyPr>
+            <a:spAutoFit/>
+          </a:bodyPr>
           <a:lstStyle>
             <a:lvl1pPr marL="0" indent="0">
               <a:lnSpc>
@@ -9534,14 +9626,16 @@
         <p:spPr>
           <a:xfrm>
             <a:off x="2976562" y="2353748"/>
-            <a:ext cx="4500003" cy="233736"/>
+            <a:ext cx="4500003" cy="261610"/>
           </a:xfrm>
           <a:prstGeom prst="rect">
             <a:avLst/>
           </a:prstGeom>
         </p:spPr>
         <p:txBody>
-          <a:bodyPr/>
+          <a:bodyPr>
+            <a:spAutoFit/>
+          </a:bodyPr>
           <a:lstStyle>
             <a:lvl1pPr marL="0" indent="0">
               <a:lnSpc>
@@ -9608,14 +9702,16 @@
         <p:spPr>
           <a:xfrm>
             <a:off x="2976562" y="2622691"/>
-            <a:ext cx="4500003" cy="233736"/>
+            <a:ext cx="4500003" cy="261610"/>
           </a:xfrm>
           <a:prstGeom prst="rect">
             <a:avLst/>
           </a:prstGeom>
         </p:spPr>
         <p:txBody>
-          <a:bodyPr/>
+          <a:bodyPr>
+            <a:spAutoFit/>
+          </a:bodyPr>
           <a:lstStyle>
             <a:lvl1pPr marL="0" indent="0">
               <a:lnSpc>
@@ -9682,14 +9778,16 @@
         <p:spPr>
           <a:xfrm>
             <a:off x="2976562" y="2891634"/>
-            <a:ext cx="4500003" cy="968840"/>
+            <a:ext cx="4500003" cy="230832"/>
           </a:xfrm>
           <a:prstGeom prst="rect">
             <a:avLst/>
           </a:prstGeom>
         </p:spPr>
         <p:txBody>
-          <a:bodyPr/>
+          <a:bodyPr>
+            <a:spAutoFit/>
+          </a:bodyPr>
           <a:lstStyle>
             <a:lvl1pPr marL="0" indent="0">
               <a:lnSpc>
@@ -9756,14 +9854,16 @@
         <p:spPr>
           <a:xfrm>
             <a:off x="2976562" y="4209442"/>
-            <a:ext cx="4500003" cy="233736"/>
+            <a:ext cx="4500003" cy="261610"/>
           </a:xfrm>
           <a:prstGeom prst="rect">
             <a:avLst/>
           </a:prstGeom>
         </p:spPr>
         <p:txBody>
-          <a:bodyPr/>
+          <a:bodyPr>
+            <a:spAutoFit/>
+          </a:bodyPr>
           <a:lstStyle>
             <a:lvl1pPr marL="0" indent="0">
               <a:lnSpc>
@@ -9830,14 +9930,16 @@
         <p:spPr>
           <a:xfrm>
             <a:off x="2976562" y="4478385"/>
-            <a:ext cx="4500003" cy="233736"/>
+            <a:ext cx="4500003" cy="261610"/>
           </a:xfrm>
           <a:prstGeom prst="rect">
             <a:avLst/>
           </a:prstGeom>
         </p:spPr>
         <p:txBody>
-          <a:bodyPr/>
+          <a:bodyPr>
+            <a:spAutoFit/>
+          </a:bodyPr>
           <a:lstStyle>
             <a:lvl1pPr marL="0" indent="0">
               <a:lnSpc>
@@ -9904,14 +10006,16 @@
         <p:spPr>
           <a:xfrm>
             <a:off x="2976562" y="4747328"/>
-            <a:ext cx="4500003" cy="968840"/>
+            <a:ext cx="4500003" cy="230832"/>
           </a:xfrm>
           <a:prstGeom prst="rect">
             <a:avLst/>
           </a:prstGeom>
         </p:spPr>
         <p:txBody>
-          <a:bodyPr/>
+          <a:bodyPr>
+            <a:spAutoFit/>
+          </a:bodyPr>
           <a:lstStyle>
             <a:lvl1pPr marL="0" indent="0">
               <a:lnSpc>
@@ -9978,14 +10082,16 @@
         <p:spPr>
           <a:xfrm>
             <a:off x="2976562" y="6065136"/>
-            <a:ext cx="4500003" cy="233736"/>
+            <a:ext cx="4500003" cy="261610"/>
           </a:xfrm>
           <a:prstGeom prst="rect">
             <a:avLst/>
           </a:prstGeom>
         </p:spPr>
         <p:txBody>
-          <a:bodyPr/>
+          <a:bodyPr>
+            <a:spAutoFit/>
+          </a:bodyPr>
           <a:lstStyle>
             <a:lvl1pPr marL="0" indent="0">
               <a:lnSpc>
@@ -10052,14 +10158,16 @@
         <p:spPr>
           <a:xfrm>
             <a:off x="2976562" y="6334079"/>
-            <a:ext cx="4500003" cy="233736"/>
+            <a:ext cx="4500003" cy="261610"/>
           </a:xfrm>
           <a:prstGeom prst="rect">
             <a:avLst/>
           </a:prstGeom>
         </p:spPr>
         <p:txBody>
-          <a:bodyPr/>
+          <a:bodyPr>
+            <a:spAutoFit/>
+          </a:bodyPr>
           <a:lstStyle>
             <a:lvl1pPr marL="0" indent="0">
               <a:lnSpc>
@@ -10126,14 +10234,16 @@
         <p:spPr>
           <a:xfrm>
             <a:off x="2976562" y="6603022"/>
-            <a:ext cx="4500003" cy="968840"/>
+            <a:ext cx="4500003" cy="230832"/>
           </a:xfrm>
           <a:prstGeom prst="rect">
             <a:avLst/>
           </a:prstGeom>
         </p:spPr>
         <p:txBody>
-          <a:bodyPr/>
+          <a:bodyPr>
+            <a:spAutoFit/>
+          </a:bodyPr>
           <a:lstStyle>
             <a:lvl1pPr marL="0" indent="0">
               <a:lnSpc>
@@ -10200,14 +10310,16 @@
         <p:spPr>
           <a:xfrm>
             <a:off x="2976562" y="7920830"/>
-            <a:ext cx="4500003" cy="233736"/>
+            <a:ext cx="4500003" cy="261610"/>
           </a:xfrm>
           <a:prstGeom prst="rect">
             <a:avLst/>
           </a:prstGeom>
         </p:spPr>
         <p:txBody>
-          <a:bodyPr/>
+          <a:bodyPr>
+            <a:spAutoFit/>
+          </a:bodyPr>
           <a:lstStyle>
             <a:lvl1pPr marL="0" indent="0">
               <a:lnSpc>
@@ -10274,14 +10386,16 @@
         <p:spPr>
           <a:xfrm>
             <a:off x="2976562" y="8189773"/>
-            <a:ext cx="4500003" cy="233736"/>
+            <a:ext cx="4500003" cy="261610"/>
           </a:xfrm>
           <a:prstGeom prst="rect">
             <a:avLst/>
           </a:prstGeom>
         </p:spPr>
         <p:txBody>
-          <a:bodyPr/>
+          <a:bodyPr>
+            <a:spAutoFit/>
+          </a:bodyPr>
           <a:lstStyle>
             <a:lvl1pPr marL="0" indent="0">
               <a:lnSpc>
@@ -10348,14 +10462,16 @@
         <p:spPr>
           <a:xfrm>
             <a:off x="2976562" y="8458716"/>
-            <a:ext cx="4500003" cy="968840"/>
+            <a:ext cx="4500003" cy="230832"/>
           </a:xfrm>
           <a:prstGeom prst="rect">
             <a:avLst/>
           </a:prstGeom>
         </p:spPr>
         <p:txBody>
-          <a:bodyPr/>
+          <a:bodyPr>
+            <a:spAutoFit/>
+          </a:bodyPr>
           <a:lstStyle>
             <a:lvl1pPr marL="0" indent="0">
               <a:lnSpc>
@@ -10567,14 +10683,16 @@
         <p:spPr>
           <a:xfrm>
             <a:off x="3430494" y="812133"/>
-            <a:ext cx="4046071" cy="233736"/>
+            <a:ext cx="4046071" cy="261610"/>
           </a:xfrm>
           <a:prstGeom prst="rect">
             <a:avLst/>
           </a:prstGeom>
         </p:spPr>
         <p:txBody>
-          <a:bodyPr/>
+          <a:bodyPr>
+            <a:spAutoFit/>
+          </a:bodyPr>
           <a:lstStyle>
             <a:lvl1pPr marL="0" indent="0">
               <a:lnSpc>
@@ -10641,14 +10759,16 @@
         <p:spPr>
           <a:xfrm>
             <a:off x="3430494" y="1110957"/>
-            <a:ext cx="4046071" cy="233736"/>
+            <a:ext cx="4046071" cy="261610"/>
           </a:xfrm>
           <a:prstGeom prst="rect">
             <a:avLst/>
           </a:prstGeom>
         </p:spPr>
         <p:txBody>
-          <a:bodyPr/>
+          <a:bodyPr>
+            <a:spAutoFit/>
+          </a:bodyPr>
           <a:lstStyle>
             <a:lvl1pPr marL="0" indent="0">
               <a:lnSpc>
@@ -10715,14 +10835,16 @@
         <p:spPr>
           <a:xfrm>
             <a:off x="3430494" y="1487473"/>
-            <a:ext cx="4046071" cy="1079067"/>
+            <a:ext cx="4046071" cy="230832"/>
           </a:xfrm>
           <a:prstGeom prst="rect">
             <a:avLst/>
           </a:prstGeom>
         </p:spPr>
         <p:txBody>
-          <a:bodyPr/>
+          <a:bodyPr>
+            <a:spAutoFit/>
+          </a:bodyPr>
           <a:lstStyle>
             <a:lvl1pPr marL="0" indent="0">
               <a:lnSpc>
@@ -10862,14 +10984,16 @@
         <p:spPr>
           <a:xfrm>
             <a:off x="3430494" y="2884884"/>
-            <a:ext cx="4046071" cy="233736"/>
+            <a:ext cx="4046071" cy="261610"/>
           </a:xfrm>
           <a:prstGeom prst="rect">
             <a:avLst/>
           </a:prstGeom>
         </p:spPr>
         <p:txBody>
-          <a:bodyPr/>
+          <a:bodyPr>
+            <a:spAutoFit/>
+          </a:bodyPr>
           <a:lstStyle>
             <a:lvl1pPr marL="0" indent="0">
               <a:lnSpc>
@@ -10936,14 +11060,16 @@
         <p:spPr>
           <a:xfrm>
             <a:off x="3430494" y="3183708"/>
-            <a:ext cx="4046071" cy="233736"/>
+            <a:ext cx="4046071" cy="261610"/>
           </a:xfrm>
           <a:prstGeom prst="rect">
             <a:avLst/>
           </a:prstGeom>
         </p:spPr>
         <p:txBody>
-          <a:bodyPr/>
+          <a:bodyPr>
+            <a:spAutoFit/>
+          </a:bodyPr>
           <a:lstStyle>
             <a:lvl1pPr marL="0" indent="0">
               <a:lnSpc>
@@ -11010,14 +11136,16 @@
         <p:spPr>
           <a:xfrm>
             <a:off x="3430494" y="3560224"/>
-            <a:ext cx="4046071" cy="1079067"/>
+            <a:ext cx="4046071" cy="230832"/>
           </a:xfrm>
           <a:prstGeom prst="rect">
             <a:avLst/>
           </a:prstGeom>
         </p:spPr>
         <p:txBody>
-          <a:bodyPr/>
+          <a:bodyPr>
+            <a:spAutoFit/>
+          </a:bodyPr>
           <a:lstStyle>
             <a:lvl1pPr marL="0" indent="0">
               <a:lnSpc>
@@ -11084,14 +11212,16 @@
         <p:spPr>
           <a:xfrm>
             <a:off x="3424518" y="4975520"/>
-            <a:ext cx="4046071" cy="233736"/>
+            <a:ext cx="4046071" cy="261610"/>
           </a:xfrm>
           <a:prstGeom prst="rect">
             <a:avLst/>
           </a:prstGeom>
         </p:spPr>
         <p:txBody>
-          <a:bodyPr/>
+          <a:bodyPr>
+            <a:spAutoFit/>
+          </a:bodyPr>
           <a:lstStyle>
             <a:lvl1pPr marL="0" indent="0">
               <a:lnSpc>
@@ -11158,14 +11288,16 @@
         <p:spPr>
           <a:xfrm>
             <a:off x="3424518" y="5274344"/>
-            <a:ext cx="4046071" cy="233736"/>
+            <a:ext cx="4046071" cy="261610"/>
           </a:xfrm>
           <a:prstGeom prst="rect">
             <a:avLst/>
           </a:prstGeom>
         </p:spPr>
         <p:txBody>
-          <a:bodyPr/>
+          <a:bodyPr>
+            <a:spAutoFit/>
+          </a:bodyPr>
           <a:lstStyle>
             <a:lvl1pPr marL="0" indent="0">
               <a:lnSpc>
@@ -11232,14 +11364,16 @@
         <p:spPr>
           <a:xfrm>
             <a:off x="3424518" y="5650860"/>
-            <a:ext cx="4046071" cy="1079067"/>
+            <a:ext cx="4046071" cy="230832"/>
           </a:xfrm>
           <a:prstGeom prst="rect">
             <a:avLst/>
           </a:prstGeom>
         </p:spPr>
         <p:txBody>
-          <a:bodyPr/>
+          <a:bodyPr>
+            <a:spAutoFit/>
+          </a:bodyPr>
           <a:lstStyle>
             <a:lvl1pPr marL="0" indent="0">
               <a:lnSpc>
@@ -11306,14 +11440,16 @@
         <p:spPr>
           <a:xfrm>
             <a:off x="3424518" y="7048271"/>
-            <a:ext cx="4046071" cy="233736"/>
+            <a:ext cx="4046071" cy="261610"/>
           </a:xfrm>
           <a:prstGeom prst="rect">
             <a:avLst/>
           </a:prstGeom>
         </p:spPr>
         <p:txBody>
-          <a:bodyPr/>
+          <a:bodyPr>
+            <a:spAutoFit/>
+          </a:bodyPr>
           <a:lstStyle>
             <a:lvl1pPr marL="0" indent="0">
               <a:lnSpc>
@@ -11380,14 +11516,16 @@
         <p:spPr>
           <a:xfrm>
             <a:off x="3424518" y="7347095"/>
-            <a:ext cx="4046071" cy="233736"/>
+            <a:ext cx="4046071" cy="261610"/>
           </a:xfrm>
           <a:prstGeom prst="rect">
             <a:avLst/>
           </a:prstGeom>
         </p:spPr>
         <p:txBody>
-          <a:bodyPr/>
+          <a:bodyPr>
+            <a:spAutoFit/>
+          </a:bodyPr>
           <a:lstStyle>
             <a:lvl1pPr marL="0" indent="0">
               <a:lnSpc>
@@ -11454,14 +11592,16 @@
         <p:spPr>
           <a:xfrm>
             <a:off x="3424518" y="7723611"/>
-            <a:ext cx="4046071" cy="1079067"/>
+            <a:ext cx="4046071" cy="230832"/>
           </a:xfrm>
           <a:prstGeom prst="rect">
             <a:avLst/>
           </a:prstGeom>
         </p:spPr>
         <p:txBody>
-          <a:bodyPr/>
+          <a:bodyPr>
+            <a:spAutoFit/>
+          </a:bodyPr>
           <a:lstStyle>
             <a:lvl1pPr marL="0" indent="0">
               <a:lnSpc>
@@ -11727,14 +11867,16 @@
         <p:spPr>
           <a:xfrm>
             <a:off x="352613" y="954913"/>
-            <a:ext cx="3281082" cy="233736"/>
+            <a:ext cx="3281082" cy="261610"/>
           </a:xfrm>
           <a:prstGeom prst="rect">
             <a:avLst/>
           </a:prstGeom>
         </p:spPr>
         <p:txBody>
-          <a:bodyPr/>
+          <a:bodyPr>
+            <a:spAutoFit/>
+          </a:bodyPr>
           <a:lstStyle>
             <a:lvl1pPr marL="0" indent="0">
               <a:lnSpc>
@@ -11801,14 +11943,16 @@
         <p:spPr>
           <a:xfrm>
             <a:off x="352613" y="1253737"/>
-            <a:ext cx="3281082" cy="233736"/>
+            <a:ext cx="3281082" cy="261610"/>
           </a:xfrm>
           <a:prstGeom prst="rect">
             <a:avLst/>
           </a:prstGeom>
         </p:spPr>
         <p:txBody>
-          <a:bodyPr/>
+          <a:bodyPr>
+            <a:spAutoFit/>
+          </a:bodyPr>
           <a:lstStyle>
             <a:lvl1pPr marL="0" indent="0">
               <a:lnSpc>
@@ -11874,15 +12018,17 @@
         </p:nvSpPr>
         <p:spPr>
           <a:xfrm>
-            <a:off x="352613" y="3955851"/>
-            <a:ext cx="3281082" cy="1079067"/>
+            <a:off x="352611" y="3955851"/>
+            <a:ext cx="3281082" cy="230832"/>
           </a:xfrm>
           <a:prstGeom prst="rect">
             <a:avLst/>
           </a:prstGeom>
         </p:spPr>
         <p:txBody>
-          <a:bodyPr/>
+          <a:bodyPr>
+            <a:spAutoFit/>
+          </a:bodyPr>
           <a:lstStyle>
             <a:lvl1pPr marL="0" indent="0">
               <a:lnSpc>
@@ -12092,14 +12238,16 @@
         <p:spPr>
           <a:xfrm>
             <a:off x="4138705" y="954913"/>
-            <a:ext cx="3281082" cy="233736"/>
+            <a:ext cx="3281082" cy="261610"/>
           </a:xfrm>
           <a:prstGeom prst="rect">
             <a:avLst/>
           </a:prstGeom>
         </p:spPr>
         <p:txBody>
-          <a:bodyPr/>
+          <a:bodyPr>
+            <a:spAutoFit/>
+          </a:bodyPr>
           <a:lstStyle>
             <a:lvl1pPr marL="0" indent="0">
               <a:lnSpc>
@@ -12166,14 +12314,16 @@
         <p:spPr>
           <a:xfrm>
             <a:off x="4138705" y="1253737"/>
-            <a:ext cx="3281082" cy="233736"/>
+            <a:ext cx="3281082" cy="261610"/>
           </a:xfrm>
           <a:prstGeom prst="rect">
             <a:avLst/>
           </a:prstGeom>
         </p:spPr>
         <p:txBody>
-          <a:bodyPr/>
+          <a:bodyPr>
+            <a:spAutoFit/>
+          </a:bodyPr>
           <a:lstStyle>
             <a:lvl1pPr marL="0" indent="0">
               <a:lnSpc>
@@ -12239,15 +12389,17 @@
         </p:nvSpPr>
         <p:spPr>
           <a:xfrm>
-            <a:off x="4138705" y="3955851"/>
-            <a:ext cx="3281082" cy="1079067"/>
+            <a:off x="4138703" y="3955851"/>
+            <a:ext cx="3281082" cy="230832"/>
           </a:xfrm>
           <a:prstGeom prst="rect">
             <a:avLst/>
           </a:prstGeom>
         </p:spPr>
         <p:txBody>
-          <a:bodyPr/>
+          <a:bodyPr>
+            <a:spAutoFit/>
+          </a:bodyPr>
           <a:lstStyle>
             <a:lvl1pPr marL="0" indent="0">
               <a:lnSpc>
@@ -12313,7 +12465,7 @@
         </p:nvSpPr>
         <p:spPr>
           <a:xfrm>
-            <a:off x="4138704" y="1678816"/>
+            <a:off x="4138702" y="1678816"/>
             <a:ext cx="3281082" cy="2104290"/>
           </a:xfrm>
           <a:prstGeom prst="rect">
@@ -12346,15 +12498,17 @@
         </p:nvSpPr>
         <p:spPr>
           <a:xfrm>
-            <a:off x="352613" y="5418153"/>
-            <a:ext cx="3281082" cy="233736"/>
+            <a:off x="352611" y="5418153"/>
+            <a:ext cx="3281082" cy="261610"/>
           </a:xfrm>
           <a:prstGeom prst="rect">
             <a:avLst/>
           </a:prstGeom>
         </p:spPr>
         <p:txBody>
-          <a:bodyPr/>
+          <a:bodyPr>
+            <a:spAutoFit/>
+          </a:bodyPr>
           <a:lstStyle>
             <a:lvl1pPr marL="0" indent="0">
               <a:lnSpc>
@@ -12420,15 +12574,17 @@
         </p:nvSpPr>
         <p:spPr>
           <a:xfrm>
-            <a:off x="352613" y="5716977"/>
-            <a:ext cx="3281082" cy="233736"/>
+            <a:off x="352611" y="5716977"/>
+            <a:ext cx="3281082" cy="261610"/>
           </a:xfrm>
           <a:prstGeom prst="rect">
             <a:avLst/>
           </a:prstGeom>
         </p:spPr>
         <p:txBody>
-          <a:bodyPr/>
+          <a:bodyPr>
+            <a:spAutoFit/>
+          </a:bodyPr>
           <a:lstStyle>
             <a:lvl1pPr marL="0" indent="0">
               <a:lnSpc>
@@ -12494,15 +12650,17 @@
         </p:nvSpPr>
         <p:spPr>
           <a:xfrm>
-            <a:off x="352613" y="8419091"/>
-            <a:ext cx="3281082" cy="1079067"/>
+            <a:off x="352611" y="8419091"/>
+            <a:ext cx="3281082" cy="230832"/>
           </a:xfrm>
           <a:prstGeom prst="rect">
             <a:avLst/>
           </a:prstGeom>
         </p:spPr>
         <p:txBody>
-          <a:bodyPr/>
+          <a:bodyPr>
+            <a:spAutoFit/>
+          </a:bodyPr>
           <a:lstStyle>
             <a:lvl1pPr marL="0" indent="0">
               <a:lnSpc>
@@ -12601,15 +12759,17 @@
         </p:nvSpPr>
         <p:spPr>
           <a:xfrm>
-            <a:off x="4138704" y="5418153"/>
-            <a:ext cx="3281082" cy="233736"/>
+            <a:off x="4138702" y="5418153"/>
+            <a:ext cx="3281082" cy="261610"/>
           </a:xfrm>
           <a:prstGeom prst="rect">
             <a:avLst/>
           </a:prstGeom>
         </p:spPr>
         <p:txBody>
-          <a:bodyPr/>
+          <a:bodyPr>
+            <a:spAutoFit/>
+          </a:bodyPr>
           <a:lstStyle>
             <a:lvl1pPr marL="0" indent="0">
               <a:lnSpc>
@@ -12675,15 +12835,17 @@
         </p:nvSpPr>
         <p:spPr>
           <a:xfrm>
-            <a:off x="4138704" y="5716977"/>
-            <a:ext cx="3281082" cy="233736"/>
+            <a:off x="4138702" y="5716977"/>
+            <a:ext cx="3281082" cy="261610"/>
           </a:xfrm>
           <a:prstGeom prst="rect">
             <a:avLst/>
           </a:prstGeom>
         </p:spPr>
         <p:txBody>
-          <a:bodyPr/>
+          <a:bodyPr>
+            <a:spAutoFit/>
+          </a:bodyPr>
           <a:lstStyle>
             <a:lvl1pPr marL="0" indent="0">
               <a:lnSpc>
@@ -12749,15 +12911,17 @@
         </p:nvSpPr>
         <p:spPr>
           <a:xfrm>
-            <a:off x="4138704" y="8419091"/>
-            <a:ext cx="3281082" cy="1079067"/>
+            <a:off x="4138702" y="8419091"/>
+            <a:ext cx="3281082" cy="230832"/>
           </a:xfrm>
           <a:prstGeom prst="rect">
             <a:avLst/>
           </a:prstGeom>
         </p:spPr>
         <p:txBody>
-          <a:bodyPr/>
+          <a:bodyPr>
+            <a:spAutoFit/>
+          </a:bodyPr>
           <a:lstStyle>
             <a:lvl1pPr marL="0" indent="0">
               <a:lnSpc>
@@ -12887,14 +13051,16 @@
         <p:spPr>
           <a:xfrm>
             <a:off x="352613" y="835386"/>
-            <a:ext cx="3281082" cy="233736"/>
+            <a:ext cx="3281082" cy="261610"/>
           </a:xfrm>
           <a:prstGeom prst="rect">
             <a:avLst/>
           </a:prstGeom>
         </p:spPr>
         <p:txBody>
-          <a:bodyPr/>
+          <a:bodyPr>
+            <a:spAutoFit/>
+          </a:bodyPr>
           <a:lstStyle>
             <a:lvl1pPr marL="0" indent="0">
               <a:lnSpc>
@@ -12961,14 +13127,16 @@
         <p:spPr>
           <a:xfrm>
             <a:off x="352613" y="1236558"/>
-            <a:ext cx="3281082" cy="1229928"/>
+            <a:ext cx="3281082" cy="230832"/>
           </a:xfrm>
           <a:prstGeom prst="rect">
             <a:avLst/>
           </a:prstGeom>
         </p:spPr>
         <p:txBody>
-          <a:bodyPr/>
+          <a:bodyPr>
+            <a:spAutoFit/>
+          </a:bodyPr>
           <a:lstStyle>
             <a:lvl1pPr marL="0" indent="0">
               <a:lnSpc>
@@ -13145,14 +13313,16 @@
         <p:spPr>
           <a:xfrm>
             <a:off x="4138705" y="835386"/>
-            <a:ext cx="3281082" cy="233736"/>
+            <a:ext cx="3281082" cy="261610"/>
           </a:xfrm>
           <a:prstGeom prst="rect">
             <a:avLst/>
           </a:prstGeom>
         </p:spPr>
         <p:txBody>
-          <a:bodyPr/>
+          <a:bodyPr>
+            <a:spAutoFit/>
+          </a:bodyPr>
           <a:lstStyle>
             <a:lvl1pPr marL="0" indent="0">
               <a:lnSpc>
@@ -13219,14 +13389,16 @@
         <p:spPr>
           <a:xfrm>
             <a:off x="4138705" y="1236558"/>
-            <a:ext cx="3281082" cy="1229928"/>
+            <a:ext cx="3281082" cy="230832"/>
           </a:xfrm>
           <a:prstGeom prst="rect">
             <a:avLst/>
           </a:prstGeom>
         </p:spPr>
         <p:txBody>
-          <a:bodyPr/>
+          <a:bodyPr>
+            <a:spAutoFit/>
+          </a:bodyPr>
           <a:lstStyle>
             <a:lvl1pPr marL="0" indent="0">
               <a:lnSpc>
@@ -13293,14 +13465,16 @@
         <p:spPr>
           <a:xfrm>
             <a:off x="352613" y="2651048"/>
-            <a:ext cx="3281082" cy="233736"/>
+            <a:ext cx="3281082" cy="261610"/>
           </a:xfrm>
           <a:prstGeom prst="rect">
             <a:avLst/>
           </a:prstGeom>
         </p:spPr>
         <p:txBody>
-          <a:bodyPr/>
+          <a:bodyPr>
+            <a:spAutoFit/>
+          </a:bodyPr>
           <a:lstStyle>
             <a:lvl1pPr marL="0" indent="0">
               <a:lnSpc>
@@ -13367,14 +13541,16 @@
         <p:spPr>
           <a:xfrm>
             <a:off x="352613" y="3046246"/>
-            <a:ext cx="3281082" cy="1229928"/>
+            <a:ext cx="3281082" cy="230832"/>
           </a:xfrm>
           <a:prstGeom prst="rect">
             <a:avLst/>
           </a:prstGeom>
         </p:spPr>
         <p:txBody>
-          <a:bodyPr/>
+          <a:bodyPr>
+            <a:spAutoFit/>
+          </a:bodyPr>
           <a:lstStyle>
             <a:lvl1pPr marL="0" indent="0">
               <a:lnSpc>
@@ -13441,14 +13617,16 @@
         <p:spPr>
           <a:xfrm>
             <a:off x="4138704" y="2651048"/>
-            <a:ext cx="3281082" cy="233736"/>
+            <a:ext cx="3281082" cy="261610"/>
           </a:xfrm>
           <a:prstGeom prst="rect">
             <a:avLst/>
           </a:prstGeom>
         </p:spPr>
         <p:txBody>
-          <a:bodyPr/>
+          <a:bodyPr>
+            <a:spAutoFit/>
+          </a:bodyPr>
           <a:lstStyle>
             <a:lvl1pPr marL="0" indent="0">
               <a:lnSpc>
@@ -13515,14 +13693,16 @@
         <p:spPr>
           <a:xfrm>
             <a:off x="4138704" y="3046246"/>
-            <a:ext cx="3281082" cy="1229928"/>
+            <a:ext cx="3281082" cy="230832"/>
           </a:xfrm>
           <a:prstGeom prst="rect">
             <a:avLst/>
           </a:prstGeom>
         </p:spPr>
         <p:txBody>
-          <a:bodyPr/>
+          <a:bodyPr>
+            <a:spAutoFit/>
+          </a:bodyPr>
           <a:lstStyle>
             <a:lvl1pPr marL="0" indent="0">
               <a:lnSpc>
@@ -13589,14 +13769,16 @@
         <p:spPr>
           <a:xfrm>
             <a:off x="352613" y="4506743"/>
-            <a:ext cx="3281082" cy="233736"/>
+            <a:ext cx="3281082" cy="261610"/>
           </a:xfrm>
           <a:prstGeom prst="rect">
             <a:avLst/>
           </a:prstGeom>
         </p:spPr>
         <p:txBody>
-          <a:bodyPr/>
+          <a:bodyPr>
+            <a:spAutoFit/>
+          </a:bodyPr>
           <a:lstStyle>
             <a:lvl1pPr marL="0" indent="0">
               <a:lnSpc>
@@ -13663,14 +13845,16 @@
         <p:spPr>
           <a:xfrm>
             <a:off x="352613" y="4901941"/>
-            <a:ext cx="3281082" cy="1229928"/>
+            <a:ext cx="3281082" cy="230832"/>
           </a:xfrm>
           <a:prstGeom prst="rect">
             <a:avLst/>
           </a:prstGeom>
         </p:spPr>
         <p:txBody>
-          <a:bodyPr/>
+          <a:bodyPr>
+            <a:spAutoFit/>
+          </a:bodyPr>
           <a:lstStyle>
             <a:lvl1pPr marL="0" indent="0">
               <a:lnSpc>
@@ -13737,14 +13921,16 @@
         <p:spPr>
           <a:xfrm>
             <a:off x="4138704" y="4506743"/>
-            <a:ext cx="3281082" cy="233736"/>
+            <a:ext cx="3281082" cy="261610"/>
           </a:xfrm>
           <a:prstGeom prst="rect">
             <a:avLst/>
           </a:prstGeom>
         </p:spPr>
         <p:txBody>
-          <a:bodyPr/>
+          <a:bodyPr>
+            <a:spAutoFit/>
+          </a:bodyPr>
           <a:lstStyle>
             <a:lvl1pPr marL="0" indent="0">
               <a:lnSpc>
@@ -13811,14 +13997,16 @@
         <p:spPr>
           <a:xfrm>
             <a:off x="4138704" y="4901941"/>
-            <a:ext cx="3281082" cy="1229928"/>
+            <a:ext cx="3281082" cy="230832"/>
           </a:xfrm>
           <a:prstGeom prst="rect">
             <a:avLst/>
           </a:prstGeom>
         </p:spPr>
         <p:txBody>
-          <a:bodyPr/>
+          <a:bodyPr>
+            <a:spAutoFit/>
+          </a:bodyPr>
           <a:lstStyle>
             <a:lvl1pPr marL="0" indent="0">
               <a:lnSpc>
@@ -14525,7 +14713,7 @@
           </a:ln>
           <a:extLst>
             <a:ext uri="{C572A759-6A51-4108-AA02-DFA0A04FC94B}">
-              <ma14:wrappingTextBoxFlag xmlns:ma14="http://schemas.microsoft.com/office/mac/drawingml/2011/main" xmlns:a14="http://schemas.microsoft.com/office/drawing/2010/main" xmlns:m="http://schemas.openxmlformats.org/officeDocument/2006/math" xmlns="" val="1"/>
+              <ma14:wrappingTextBoxFlag xmlns="" xmlns:m="http://schemas.openxmlformats.org/officeDocument/2006/math" xmlns:a14="http://schemas.microsoft.com/office/drawing/2010/main" xmlns:ma14="http://schemas.microsoft.com/office/mac/drawingml/2011/main" val="1"/>
             </a:ext>
           </a:extLst>
         </p:spPr>
@@ -14573,7 +14761,7 @@
           </a:ln>
           <a:extLst>
             <a:ext uri="{C572A759-6A51-4108-AA02-DFA0A04FC94B}">
-              <ma14:wrappingTextBoxFlag xmlns:ma14="http://schemas.microsoft.com/office/mac/drawingml/2011/main" xmlns:a14="http://schemas.microsoft.com/office/drawing/2010/main" xmlns:m="http://schemas.openxmlformats.org/officeDocument/2006/math" xmlns="" val="1"/>
+              <ma14:wrappingTextBoxFlag xmlns="" xmlns:m="http://schemas.openxmlformats.org/officeDocument/2006/math" xmlns:a14="http://schemas.microsoft.com/office/drawing/2010/main" xmlns:ma14="http://schemas.microsoft.com/office/mac/drawingml/2011/main" val="1"/>
             </a:ext>
           </a:extLst>
         </p:spPr>
@@ -14650,7 +14838,7 @@
           </a:ln>
           <a:extLst>
             <a:ext uri="{C572A759-6A51-4108-AA02-DFA0A04FC94B}">
-              <ma14:wrappingTextBoxFlag xmlns:ma14="http://schemas.microsoft.com/office/mac/drawingml/2011/main" xmlns:a14="http://schemas.microsoft.com/office/drawing/2010/main" xmlns:m="http://schemas.openxmlformats.org/officeDocument/2006/math" xmlns="" val="1"/>
+              <ma14:wrappingTextBoxFlag xmlns="" xmlns:m="http://schemas.openxmlformats.org/officeDocument/2006/math" xmlns:a14="http://schemas.microsoft.com/office/drawing/2010/main" xmlns:ma14="http://schemas.microsoft.com/office/mac/drawingml/2011/main" val="1"/>
             </a:ext>
           </a:extLst>
         </p:spPr>
@@ -14727,7 +14915,7 @@
           </a:ln>
           <a:extLst>
             <a:ext uri="{C572A759-6A51-4108-AA02-DFA0A04FC94B}">
-              <ma14:wrappingTextBoxFlag xmlns:ma14="http://schemas.microsoft.com/office/mac/drawingml/2011/main" xmlns:a14="http://schemas.microsoft.com/office/drawing/2010/main" xmlns:m="http://schemas.openxmlformats.org/officeDocument/2006/math" xmlns="" val="1"/>
+              <ma14:wrappingTextBoxFlag xmlns="" xmlns:m="http://schemas.openxmlformats.org/officeDocument/2006/math" xmlns:a14="http://schemas.microsoft.com/office/drawing/2010/main" xmlns:ma14="http://schemas.microsoft.com/office/mac/drawingml/2011/main" val="1"/>
             </a:ext>
           </a:extLst>
         </p:spPr>
@@ -14804,7 +14992,7 @@
           </a:ln>
           <a:extLst>
             <a:ext uri="{C572A759-6A51-4108-AA02-DFA0A04FC94B}">
-              <ma14:wrappingTextBoxFlag xmlns:ma14="http://schemas.microsoft.com/office/mac/drawingml/2011/main" xmlns:a14="http://schemas.microsoft.com/office/drawing/2010/main" xmlns:m="http://schemas.openxmlformats.org/officeDocument/2006/math" xmlns="" val="1"/>
+              <ma14:wrappingTextBoxFlag xmlns="" xmlns:m="http://schemas.openxmlformats.org/officeDocument/2006/math" xmlns:a14="http://schemas.microsoft.com/office/drawing/2010/main" xmlns:ma14="http://schemas.microsoft.com/office/mac/drawingml/2011/main" val="1"/>
             </a:ext>
           </a:extLst>
         </p:spPr>
@@ -14890,7 +15078,7 @@
           </a:ln>
           <a:extLst>
             <a:ext uri="{C572A759-6A51-4108-AA02-DFA0A04FC94B}">
-              <ma14:wrappingTextBoxFlag xmlns:ma14="http://schemas.microsoft.com/office/mac/drawingml/2011/main" xmlns:a14="http://schemas.microsoft.com/office/drawing/2010/main" xmlns:m="http://schemas.openxmlformats.org/officeDocument/2006/math" xmlns="" val="1"/>
+              <ma14:wrappingTextBoxFlag xmlns="" xmlns:m="http://schemas.openxmlformats.org/officeDocument/2006/math" xmlns:a14="http://schemas.microsoft.com/office/drawing/2010/main" xmlns:ma14="http://schemas.microsoft.com/office/mac/drawingml/2011/main" val="1"/>
             </a:ext>
           </a:extLst>
         </p:spPr>
@@ -14955,7 +15143,7 @@
           </a:ln>
           <a:extLst>
             <a:ext uri="{C572A759-6A51-4108-AA02-DFA0A04FC94B}">
-              <ma14:wrappingTextBoxFlag xmlns:ma14="http://schemas.microsoft.com/office/mac/drawingml/2011/main" xmlns:a14="http://schemas.microsoft.com/office/drawing/2010/main" xmlns:m="http://schemas.openxmlformats.org/officeDocument/2006/math" xmlns="" val="1"/>
+              <ma14:wrappingTextBoxFlag xmlns="" xmlns:m="http://schemas.openxmlformats.org/officeDocument/2006/math" xmlns:a14="http://schemas.microsoft.com/office/drawing/2010/main" xmlns:ma14="http://schemas.microsoft.com/office/mac/drawingml/2011/main" val="1"/>
             </a:ext>
           </a:extLst>
         </p:spPr>
@@ -15425,7 +15613,7 @@
           </a:ln>
           <a:extLst>
             <a:ext uri="{C572A759-6A51-4108-AA02-DFA0A04FC94B}">
-              <ma14:wrappingTextBoxFlag xmlns:ma14="http://schemas.microsoft.com/office/mac/drawingml/2011/main" xmlns:a14="http://schemas.microsoft.com/office/drawing/2010/main" xmlns:m="http://schemas.openxmlformats.org/officeDocument/2006/math" xmlns="" val="1"/>
+              <ma14:wrappingTextBoxFlag xmlns="" xmlns:m="http://schemas.openxmlformats.org/officeDocument/2006/math" xmlns:a14="http://schemas.microsoft.com/office/drawing/2010/main" xmlns:ma14="http://schemas.microsoft.com/office/mac/drawingml/2011/main" val="1"/>
             </a:ext>
           </a:extLst>
         </p:spPr>
@@ -15473,7 +15661,7 @@
           </a:ln>
           <a:extLst>
             <a:ext uri="{C572A759-6A51-4108-AA02-DFA0A04FC94B}">
-              <ma14:wrappingTextBoxFlag xmlns:ma14="http://schemas.microsoft.com/office/mac/drawingml/2011/main" xmlns:a14="http://schemas.microsoft.com/office/drawing/2010/main" xmlns:m="http://schemas.openxmlformats.org/officeDocument/2006/math" xmlns="" val="1"/>
+              <ma14:wrappingTextBoxFlag xmlns="" xmlns:m="http://schemas.openxmlformats.org/officeDocument/2006/math" xmlns:a14="http://schemas.microsoft.com/office/drawing/2010/main" xmlns:ma14="http://schemas.microsoft.com/office/mac/drawingml/2011/main" val="1"/>
             </a:ext>
           </a:extLst>
         </p:spPr>
@@ -15557,7 +15745,7 @@
           </a:ln>
           <a:extLst>
             <a:ext uri="{C572A759-6A51-4108-AA02-DFA0A04FC94B}">
-              <ma14:wrappingTextBoxFlag xmlns:ma14="http://schemas.microsoft.com/office/mac/drawingml/2011/main" xmlns:a14="http://schemas.microsoft.com/office/drawing/2010/main" xmlns:m="http://schemas.openxmlformats.org/officeDocument/2006/math" xmlns="" val="1"/>
+              <ma14:wrappingTextBoxFlag xmlns="" xmlns:m="http://schemas.openxmlformats.org/officeDocument/2006/math" xmlns:a14="http://schemas.microsoft.com/office/drawing/2010/main" xmlns:ma14="http://schemas.microsoft.com/office/mac/drawingml/2011/main" val="1"/>
             </a:ext>
           </a:extLst>
         </p:spPr>
@@ -16591,7 +16779,7 @@
           </a:ln>
           <a:extLst>
             <a:ext uri="{C572A759-6A51-4108-AA02-DFA0A04FC94B}">
-              <ma14:wrappingTextBoxFlag xmlns:ma14="http://schemas.microsoft.com/office/mac/drawingml/2011/main" xmlns:a14="http://schemas.microsoft.com/office/drawing/2010/main" xmlns:m="http://schemas.openxmlformats.org/officeDocument/2006/math" xmlns="" val="1"/>
+              <ma14:wrappingTextBoxFlag xmlns="" xmlns:m="http://schemas.openxmlformats.org/officeDocument/2006/math" xmlns:a14="http://schemas.microsoft.com/office/drawing/2010/main" xmlns:ma14="http://schemas.microsoft.com/office/mac/drawingml/2011/main" val="1"/>
             </a:ext>
           </a:extLst>
         </p:spPr>
@@ -16674,7 +16862,7 @@
           </a:ln>
           <a:extLst>
             <a:ext uri="{C572A759-6A51-4108-AA02-DFA0A04FC94B}">
-              <ma14:wrappingTextBoxFlag xmlns:ma14="http://schemas.microsoft.com/office/mac/drawingml/2011/main" xmlns:a14="http://schemas.microsoft.com/office/drawing/2010/main" xmlns:m="http://schemas.openxmlformats.org/officeDocument/2006/math" xmlns="" val="1"/>
+              <ma14:wrappingTextBoxFlag xmlns="" xmlns:m="http://schemas.openxmlformats.org/officeDocument/2006/math" xmlns:a14="http://schemas.microsoft.com/office/drawing/2010/main" xmlns:ma14="http://schemas.microsoft.com/office/mac/drawingml/2011/main" val="1"/>
             </a:ext>
           </a:extLst>
         </p:spPr>
@@ -16762,7 +16950,7 @@
           </a:ln>
           <a:extLst>
             <a:ext uri="{C572A759-6A51-4108-AA02-DFA0A04FC94B}">
-              <ma14:wrappingTextBoxFlag xmlns:ma14="http://schemas.microsoft.com/office/mac/drawingml/2011/main" xmlns:a14="http://schemas.microsoft.com/office/drawing/2010/main" xmlns:m="http://schemas.openxmlformats.org/officeDocument/2006/math" xmlns="" val="1"/>
+              <ma14:wrappingTextBoxFlag xmlns="" xmlns:m="http://schemas.openxmlformats.org/officeDocument/2006/math" xmlns:a14="http://schemas.microsoft.com/office/drawing/2010/main" xmlns:ma14="http://schemas.microsoft.com/office/mac/drawingml/2011/main" val="1"/>
             </a:ext>
           </a:extLst>
         </p:spPr>
@@ -16850,7 +17038,7 @@
           </a:ln>
           <a:extLst>
             <a:ext uri="{C572A759-6A51-4108-AA02-DFA0A04FC94B}">
-              <ma14:wrappingTextBoxFlag xmlns:ma14="http://schemas.microsoft.com/office/mac/drawingml/2011/main" xmlns:a14="http://schemas.microsoft.com/office/drawing/2010/main" xmlns:m="http://schemas.openxmlformats.org/officeDocument/2006/math" xmlns="" val="1"/>
+              <ma14:wrappingTextBoxFlag xmlns="" xmlns:m="http://schemas.openxmlformats.org/officeDocument/2006/math" xmlns:a14="http://schemas.microsoft.com/office/drawing/2010/main" xmlns:ma14="http://schemas.microsoft.com/office/mac/drawingml/2011/main" val="1"/>
             </a:ext>
           </a:extLst>
         </p:spPr>
@@ -16933,7 +17121,7 @@
           </a:ln>
           <a:extLst>
             <a:ext uri="{C572A759-6A51-4108-AA02-DFA0A04FC94B}">
-              <ma14:wrappingTextBoxFlag xmlns:ma14="http://schemas.microsoft.com/office/mac/drawingml/2011/main" xmlns:a14="http://schemas.microsoft.com/office/drawing/2010/main" xmlns:m="http://schemas.openxmlformats.org/officeDocument/2006/math" xmlns="" val="1"/>
+              <ma14:wrappingTextBoxFlag xmlns="" xmlns:m="http://schemas.openxmlformats.org/officeDocument/2006/math" xmlns:a14="http://schemas.microsoft.com/office/drawing/2010/main" xmlns:ma14="http://schemas.microsoft.com/office/mac/drawingml/2011/main" val="1"/>
             </a:ext>
           </a:extLst>
         </p:spPr>
@@ -17021,7 +17209,7 @@
           </a:ln>
           <a:extLst>
             <a:ext uri="{C572A759-6A51-4108-AA02-DFA0A04FC94B}">
-              <ma14:wrappingTextBoxFlag xmlns:ma14="http://schemas.microsoft.com/office/mac/drawingml/2011/main" xmlns:a14="http://schemas.microsoft.com/office/drawing/2010/main" xmlns:m="http://schemas.openxmlformats.org/officeDocument/2006/math" xmlns="" val="1"/>
+              <ma14:wrappingTextBoxFlag xmlns="" xmlns:m="http://schemas.openxmlformats.org/officeDocument/2006/math" xmlns:a14="http://schemas.microsoft.com/office/drawing/2010/main" xmlns:ma14="http://schemas.microsoft.com/office/mac/drawingml/2011/main" val="1"/>
             </a:ext>
           </a:extLst>
         </p:spPr>
@@ -18450,7 +18638,7 @@
           </a:ln>
           <a:extLst>
             <a:ext uri="{C572A759-6A51-4108-AA02-DFA0A04FC94B}">
-              <ma14:wrappingTextBoxFlag xmlns:ma14="http://schemas.microsoft.com/office/mac/drawingml/2011/main" xmlns:a14="http://schemas.microsoft.com/office/drawing/2010/main" xmlns:m="http://schemas.openxmlformats.org/officeDocument/2006/math" xmlns="" val="1"/>
+              <ma14:wrappingTextBoxFlag xmlns="" xmlns:m="http://schemas.openxmlformats.org/officeDocument/2006/math" xmlns:a14="http://schemas.microsoft.com/office/drawing/2010/main" xmlns:ma14="http://schemas.microsoft.com/office/mac/drawingml/2011/main" val="1"/>
             </a:ext>
           </a:extLst>
         </p:spPr>
@@ -18502,7 +18690,7 @@
           </a:ln>
           <a:extLst>
             <a:ext uri="{C572A759-6A51-4108-AA02-DFA0A04FC94B}">
-              <ma14:wrappingTextBoxFlag xmlns:ma14="http://schemas.microsoft.com/office/mac/drawingml/2011/main" xmlns:a14="http://schemas.microsoft.com/office/drawing/2010/main" xmlns:m="http://schemas.openxmlformats.org/officeDocument/2006/math" xmlns="" val="1"/>
+              <ma14:wrappingTextBoxFlag xmlns="" xmlns:m="http://schemas.openxmlformats.org/officeDocument/2006/math" xmlns:a14="http://schemas.microsoft.com/office/drawing/2010/main" xmlns:ma14="http://schemas.microsoft.com/office/mac/drawingml/2011/main" val="1"/>
             </a:ext>
           </a:extLst>
         </p:spPr>
@@ -18790,7 +18978,7 @@
           </a:ln>
           <a:extLst>
             <a:ext uri="{C572A759-6A51-4108-AA02-DFA0A04FC94B}">
-              <ma14:wrappingTextBoxFlag xmlns:ma14="http://schemas.microsoft.com/office/mac/drawingml/2011/main" xmlns:a14="http://schemas.microsoft.com/office/drawing/2010/main" xmlns:m="http://schemas.openxmlformats.org/officeDocument/2006/math" xmlns="" val="1"/>
+              <ma14:wrappingTextBoxFlag xmlns="" xmlns:m="http://schemas.openxmlformats.org/officeDocument/2006/math" xmlns:a14="http://schemas.microsoft.com/office/drawing/2010/main" xmlns:ma14="http://schemas.microsoft.com/office/mac/drawingml/2011/main" val="1"/>
             </a:ext>
           </a:extLst>
         </p:spPr>
@@ -18878,7 +19066,7 @@
           </a:ln>
           <a:extLst>
             <a:ext uri="{C572A759-6A51-4108-AA02-DFA0A04FC94B}">
-              <ma14:wrappingTextBoxFlag xmlns:ma14="http://schemas.microsoft.com/office/mac/drawingml/2011/main" xmlns:a14="http://schemas.microsoft.com/office/drawing/2010/main" xmlns:m="http://schemas.openxmlformats.org/officeDocument/2006/math" xmlns="" val="1"/>
+              <ma14:wrappingTextBoxFlag xmlns="" xmlns:m="http://schemas.openxmlformats.org/officeDocument/2006/math" xmlns:a14="http://schemas.microsoft.com/office/drawing/2010/main" xmlns:ma14="http://schemas.microsoft.com/office/mac/drawingml/2011/main" val="1"/>
             </a:ext>
           </a:extLst>
         </p:spPr>
@@ -18930,7 +19118,7 @@
           </a:ln>
           <a:extLst>
             <a:ext uri="{C572A759-6A51-4108-AA02-DFA0A04FC94B}">
-              <ma14:wrappingTextBoxFlag xmlns:ma14="http://schemas.microsoft.com/office/mac/drawingml/2011/main" xmlns:a14="http://schemas.microsoft.com/office/drawing/2010/main" xmlns:m="http://schemas.openxmlformats.org/officeDocument/2006/math" xmlns="" val="1"/>
+              <ma14:wrappingTextBoxFlag xmlns="" xmlns:m="http://schemas.openxmlformats.org/officeDocument/2006/math" xmlns:a14="http://schemas.microsoft.com/office/drawing/2010/main" xmlns:ma14="http://schemas.microsoft.com/office/mac/drawingml/2011/main" val="1"/>
             </a:ext>
           </a:extLst>
         </p:spPr>
@@ -18975,7 +19163,7 @@
           </a:ln>
           <a:extLst>
             <a:ext uri="{C572A759-6A51-4108-AA02-DFA0A04FC94B}">
-              <ma14:wrappingTextBoxFlag xmlns:ma14="http://schemas.microsoft.com/office/mac/drawingml/2011/main" xmlns:a14="http://schemas.microsoft.com/office/drawing/2010/main" xmlns:m="http://schemas.openxmlformats.org/officeDocument/2006/math" xmlns="" val="1"/>
+              <ma14:wrappingTextBoxFlag xmlns="" xmlns:m="http://schemas.openxmlformats.org/officeDocument/2006/math" xmlns:a14="http://schemas.microsoft.com/office/drawing/2010/main" xmlns:ma14="http://schemas.microsoft.com/office/mac/drawingml/2011/main" val="1"/>
             </a:ext>
           </a:extLst>
         </p:spPr>
@@ -19027,7 +19215,7 @@
           </a:ln>
           <a:extLst>
             <a:ext uri="{C572A759-6A51-4108-AA02-DFA0A04FC94B}">
-              <ma14:wrappingTextBoxFlag xmlns:ma14="http://schemas.microsoft.com/office/mac/drawingml/2011/main" xmlns:a14="http://schemas.microsoft.com/office/drawing/2010/main" xmlns:m="http://schemas.openxmlformats.org/officeDocument/2006/math" xmlns="" val="1"/>
+              <ma14:wrappingTextBoxFlag xmlns="" xmlns:m="http://schemas.openxmlformats.org/officeDocument/2006/math" xmlns:a14="http://schemas.microsoft.com/office/drawing/2010/main" xmlns:ma14="http://schemas.microsoft.com/office/mac/drawingml/2011/main" val="1"/>
             </a:ext>
           </a:extLst>
         </p:spPr>
@@ -19079,7 +19267,7 @@
           </a:ln>
           <a:extLst>
             <a:ext uri="{C572A759-6A51-4108-AA02-DFA0A04FC94B}">
-              <ma14:wrappingTextBoxFlag xmlns:ma14="http://schemas.microsoft.com/office/mac/drawingml/2011/main" xmlns:a14="http://schemas.microsoft.com/office/drawing/2010/main" xmlns:m="http://schemas.openxmlformats.org/officeDocument/2006/math" xmlns="" val="1"/>
+              <ma14:wrappingTextBoxFlag xmlns="" xmlns:m="http://schemas.openxmlformats.org/officeDocument/2006/math" xmlns:a14="http://schemas.microsoft.com/office/drawing/2010/main" xmlns:ma14="http://schemas.microsoft.com/office/mac/drawingml/2011/main" val="1"/>
             </a:ext>
           </a:extLst>
         </p:spPr>
@@ -19131,7 +19319,7 @@
           </a:ln>
           <a:extLst>
             <a:ext uri="{C572A759-6A51-4108-AA02-DFA0A04FC94B}">
-              <ma14:wrappingTextBoxFlag xmlns:ma14="http://schemas.microsoft.com/office/mac/drawingml/2011/main" xmlns:a14="http://schemas.microsoft.com/office/drawing/2010/main" xmlns:m="http://schemas.openxmlformats.org/officeDocument/2006/math" xmlns="" val="1"/>
+              <ma14:wrappingTextBoxFlag xmlns="" xmlns:m="http://schemas.openxmlformats.org/officeDocument/2006/math" xmlns:a14="http://schemas.microsoft.com/office/drawing/2010/main" xmlns:ma14="http://schemas.microsoft.com/office/mac/drawingml/2011/main" val="1"/>
             </a:ext>
           </a:extLst>
         </p:spPr>
@@ -19183,7 +19371,7 @@
           </a:ln>
           <a:extLst>
             <a:ext uri="{C572A759-6A51-4108-AA02-DFA0A04FC94B}">
-              <ma14:wrappingTextBoxFlag xmlns:ma14="http://schemas.microsoft.com/office/mac/drawingml/2011/main" xmlns:a14="http://schemas.microsoft.com/office/drawing/2010/main" xmlns:m="http://schemas.openxmlformats.org/officeDocument/2006/math" xmlns="" val="1"/>
+              <ma14:wrappingTextBoxFlag xmlns="" xmlns:m="http://schemas.openxmlformats.org/officeDocument/2006/math" xmlns:a14="http://schemas.microsoft.com/office/drawing/2010/main" xmlns:ma14="http://schemas.microsoft.com/office/mac/drawingml/2011/main" val="1"/>
             </a:ext>
           </a:extLst>
         </p:spPr>
@@ -19235,7 +19423,7 @@
           </a:ln>
           <a:extLst>
             <a:ext uri="{C572A759-6A51-4108-AA02-DFA0A04FC94B}">
-              <ma14:wrappingTextBoxFlag xmlns:ma14="http://schemas.microsoft.com/office/mac/drawingml/2011/main" xmlns:a14="http://schemas.microsoft.com/office/drawing/2010/main" xmlns:m="http://schemas.openxmlformats.org/officeDocument/2006/math" xmlns="" val="1"/>
+              <ma14:wrappingTextBoxFlag xmlns="" xmlns:m="http://schemas.openxmlformats.org/officeDocument/2006/math" xmlns:a14="http://schemas.microsoft.com/office/drawing/2010/main" xmlns:ma14="http://schemas.microsoft.com/office/mac/drawingml/2011/main" val="1"/>
             </a:ext>
           </a:extLst>
         </p:spPr>
@@ -19294,7 +19482,7 @@
           </a:ln>
           <a:extLst>
             <a:ext uri="{C572A759-6A51-4108-AA02-DFA0A04FC94B}">
-              <ma14:wrappingTextBoxFlag xmlns:ma14="http://schemas.microsoft.com/office/mac/drawingml/2011/main" xmlns:a14="http://schemas.microsoft.com/office/drawing/2010/main" xmlns:m="http://schemas.openxmlformats.org/officeDocument/2006/math" xmlns="" val="1"/>
+              <ma14:wrappingTextBoxFlag xmlns="" xmlns:m="http://schemas.openxmlformats.org/officeDocument/2006/math" xmlns:a14="http://schemas.microsoft.com/office/drawing/2010/main" xmlns:ma14="http://schemas.microsoft.com/office/mac/drawingml/2011/main" val="1"/>
             </a:ext>
           </a:extLst>
         </p:spPr>
@@ -19346,7 +19534,7 @@
           </a:ln>
           <a:extLst>
             <a:ext uri="{C572A759-6A51-4108-AA02-DFA0A04FC94B}">
-              <ma14:wrappingTextBoxFlag xmlns:ma14="http://schemas.microsoft.com/office/mac/drawingml/2011/main" xmlns:a14="http://schemas.microsoft.com/office/drawing/2010/main" xmlns:m="http://schemas.openxmlformats.org/officeDocument/2006/math" xmlns="" val="1"/>
+              <ma14:wrappingTextBoxFlag xmlns="" xmlns:m="http://schemas.openxmlformats.org/officeDocument/2006/math" xmlns:a14="http://schemas.microsoft.com/office/drawing/2010/main" xmlns:ma14="http://schemas.microsoft.com/office/mac/drawingml/2011/main" val="1"/>
             </a:ext>
           </a:extLst>
         </p:spPr>
@@ -19398,7 +19586,7 @@
           </a:ln>
           <a:extLst>
             <a:ext uri="{C572A759-6A51-4108-AA02-DFA0A04FC94B}">
-              <ma14:wrappingTextBoxFlag xmlns:ma14="http://schemas.microsoft.com/office/mac/drawingml/2011/main" xmlns:a14="http://schemas.microsoft.com/office/drawing/2010/main" xmlns:m="http://schemas.openxmlformats.org/officeDocument/2006/math" xmlns="" val="1"/>
+              <ma14:wrappingTextBoxFlag xmlns="" xmlns:m="http://schemas.openxmlformats.org/officeDocument/2006/math" xmlns:a14="http://schemas.microsoft.com/office/drawing/2010/main" xmlns:ma14="http://schemas.microsoft.com/office/mac/drawingml/2011/main" val="1"/>
             </a:ext>
           </a:extLst>
         </p:spPr>
@@ -19450,7 +19638,7 @@
           </a:ln>
           <a:extLst>
             <a:ext uri="{C572A759-6A51-4108-AA02-DFA0A04FC94B}">
-              <ma14:wrappingTextBoxFlag xmlns:ma14="http://schemas.microsoft.com/office/mac/drawingml/2011/main" xmlns:a14="http://schemas.microsoft.com/office/drawing/2010/main" xmlns:m="http://schemas.openxmlformats.org/officeDocument/2006/math" xmlns="" val="1"/>
+              <ma14:wrappingTextBoxFlag xmlns="" xmlns:m="http://schemas.openxmlformats.org/officeDocument/2006/math" xmlns:a14="http://schemas.microsoft.com/office/drawing/2010/main" xmlns:ma14="http://schemas.microsoft.com/office/mac/drawingml/2011/main" val="1"/>
             </a:ext>
           </a:extLst>
         </p:spPr>
@@ -20725,7 +20913,7 @@
           </a:ln>
           <a:extLst>
             <a:ext uri="{C572A759-6A51-4108-AA02-DFA0A04FC94B}">
-              <ma14:wrappingTextBoxFlag xmlns:ma14="http://schemas.microsoft.com/office/mac/drawingml/2011/main" xmlns:a14="http://schemas.microsoft.com/office/drawing/2010/main" xmlns:m="http://schemas.openxmlformats.org/officeDocument/2006/math" xmlns="" val="1"/>
+              <ma14:wrappingTextBoxFlag xmlns="" xmlns:m="http://schemas.openxmlformats.org/officeDocument/2006/math" xmlns:a14="http://schemas.microsoft.com/office/drawing/2010/main" xmlns:ma14="http://schemas.microsoft.com/office/mac/drawingml/2011/main" val="1"/>
             </a:ext>
           </a:extLst>
         </p:spPr>
@@ -21674,7 +21862,7 @@
           </a:ln>
           <a:extLst>
             <a:ext uri="{C572A759-6A51-4108-AA02-DFA0A04FC94B}">
-              <ma14:wrappingTextBoxFlag xmlns:ma14="http://schemas.microsoft.com/office/mac/drawingml/2011/main" xmlns:a14="http://schemas.microsoft.com/office/drawing/2010/main" xmlns:m="http://schemas.openxmlformats.org/officeDocument/2006/math" xmlns="" val="1"/>
+              <ma14:wrappingTextBoxFlag xmlns="" xmlns:m="http://schemas.openxmlformats.org/officeDocument/2006/math" xmlns:a14="http://schemas.microsoft.com/office/drawing/2010/main" xmlns:ma14="http://schemas.microsoft.com/office/mac/drawingml/2011/main" val="1"/>
             </a:ext>
           </a:extLst>
         </p:spPr>
@@ -22972,7 +23160,7 @@
           </a:ln>
           <a:extLst>
             <a:ext uri="{C572A759-6A51-4108-AA02-DFA0A04FC94B}">
-              <ma14:wrappingTextBoxFlag xmlns:ma14="http://schemas.microsoft.com/office/mac/drawingml/2011/main" xmlns:a14="http://schemas.microsoft.com/office/drawing/2010/main" xmlns:m="http://schemas.openxmlformats.org/officeDocument/2006/math" xmlns="" val="1"/>
+              <ma14:wrappingTextBoxFlag xmlns="" xmlns:m="http://schemas.openxmlformats.org/officeDocument/2006/math" xmlns:a14="http://schemas.microsoft.com/office/drawing/2010/main" xmlns:ma14="http://schemas.microsoft.com/office/mac/drawingml/2011/main" val="1"/>
             </a:ext>
           </a:extLst>
         </p:spPr>
@@ -23059,7 +23247,7 @@
           </a:ln>
           <a:extLst>
             <a:ext uri="{C572A759-6A51-4108-AA02-DFA0A04FC94B}">
-              <ma14:wrappingTextBoxFlag xmlns:ma14="http://schemas.microsoft.com/office/mac/drawingml/2011/main" xmlns:a14="http://schemas.microsoft.com/office/drawing/2010/main" xmlns:m="http://schemas.openxmlformats.org/officeDocument/2006/math" xmlns="" val="1"/>
+              <ma14:wrappingTextBoxFlag xmlns="" xmlns:m="http://schemas.openxmlformats.org/officeDocument/2006/math" xmlns:a14="http://schemas.microsoft.com/office/drawing/2010/main" xmlns:ma14="http://schemas.microsoft.com/office/mac/drawingml/2011/main" val="1"/>
             </a:ext>
           </a:extLst>
         </p:spPr>
@@ -23147,7 +23335,7 @@
           </a:ln>
           <a:extLst>
             <a:ext uri="{C572A759-6A51-4108-AA02-DFA0A04FC94B}">
-              <ma14:wrappingTextBoxFlag xmlns:ma14="http://schemas.microsoft.com/office/mac/drawingml/2011/main" xmlns:a14="http://schemas.microsoft.com/office/drawing/2010/main" xmlns:m="http://schemas.openxmlformats.org/officeDocument/2006/math" xmlns="" val="1"/>
+              <ma14:wrappingTextBoxFlag xmlns="" xmlns:m="http://schemas.openxmlformats.org/officeDocument/2006/math" xmlns:a14="http://schemas.microsoft.com/office/drawing/2010/main" xmlns:ma14="http://schemas.microsoft.com/office/mac/drawingml/2011/main" val="1"/>
             </a:ext>
           </a:extLst>
         </p:spPr>
@@ -23234,7 +23422,7 @@
           </a:ln>
           <a:extLst>
             <a:ext uri="{C572A759-6A51-4108-AA02-DFA0A04FC94B}">
-              <ma14:wrappingTextBoxFlag xmlns:ma14="http://schemas.microsoft.com/office/mac/drawingml/2011/main" xmlns:a14="http://schemas.microsoft.com/office/drawing/2010/main" xmlns:m="http://schemas.openxmlformats.org/officeDocument/2006/math" xmlns="" val="1"/>
+              <ma14:wrappingTextBoxFlag xmlns="" xmlns:m="http://schemas.openxmlformats.org/officeDocument/2006/math" xmlns:a14="http://schemas.microsoft.com/office/drawing/2010/main" xmlns:ma14="http://schemas.microsoft.com/office/mac/drawingml/2011/main" val="1"/>
             </a:ext>
           </a:extLst>
         </p:spPr>
@@ -23566,7 +23754,7 @@
           </a:ln>
           <a:extLst>
             <a:ext uri="{C572A759-6A51-4108-AA02-DFA0A04FC94B}">
-              <ma14:wrappingTextBoxFlag xmlns:ma14="http://schemas.microsoft.com/office/mac/drawingml/2011/main" xmlns:a14="http://schemas.microsoft.com/office/drawing/2010/main" xmlns:m="http://schemas.openxmlformats.org/officeDocument/2006/math" xmlns="" val="1"/>
+              <ma14:wrappingTextBoxFlag xmlns="" xmlns:m="http://schemas.openxmlformats.org/officeDocument/2006/math" xmlns:a14="http://schemas.microsoft.com/office/drawing/2010/main" xmlns:ma14="http://schemas.microsoft.com/office/mac/drawingml/2011/main" val="1"/>
             </a:ext>
           </a:extLst>
         </p:spPr>
@@ -23618,7 +23806,7 @@
           </a:ln>
           <a:extLst>
             <a:ext uri="{C572A759-6A51-4108-AA02-DFA0A04FC94B}">
-              <ma14:wrappingTextBoxFlag xmlns:ma14="http://schemas.microsoft.com/office/mac/drawingml/2011/main" xmlns:a14="http://schemas.microsoft.com/office/drawing/2010/main" xmlns:m="http://schemas.openxmlformats.org/officeDocument/2006/math" xmlns="" val="1"/>
+              <ma14:wrappingTextBoxFlag xmlns="" xmlns:m="http://schemas.openxmlformats.org/officeDocument/2006/math" xmlns:a14="http://schemas.microsoft.com/office/drawing/2010/main" xmlns:ma14="http://schemas.microsoft.com/office/mac/drawingml/2011/main" val="1"/>
             </a:ext>
           </a:extLst>
         </p:spPr>
@@ -23670,7 +23858,7 @@
           </a:ln>
           <a:extLst>
             <a:ext uri="{C572A759-6A51-4108-AA02-DFA0A04FC94B}">
-              <ma14:wrappingTextBoxFlag xmlns:ma14="http://schemas.microsoft.com/office/mac/drawingml/2011/main" xmlns:a14="http://schemas.microsoft.com/office/drawing/2010/main" xmlns:m="http://schemas.openxmlformats.org/officeDocument/2006/math" xmlns="" val="1"/>
+              <ma14:wrappingTextBoxFlag xmlns="" xmlns:m="http://schemas.openxmlformats.org/officeDocument/2006/math" xmlns:a14="http://schemas.microsoft.com/office/drawing/2010/main" xmlns:ma14="http://schemas.microsoft.com/office/mac/drawingml/2011/main" val="1"/>
             </a:ext>
           </a:extLst>
         </p:spPr>
@@ -23722,7 +23910,7 @@
           </a:ln>
           <a:extLst>
             <a:ext uri="{C572A759-6A51-4108-AA02-DFA0A04FC94B}">
-              <ma14:wrappingTextBoxFlag xmlns:ma14="http://schemas.microsoft.com/office/mac/drawingml/2011/main" xmlns:a14="http://schemas.microsoft.com/office/drawing/2010/main" xmlns:m="http://schemas.openxmlformats.org/officeDocument/2006/math" xmlns="" val="1"/>
+              <ma14:wrappingTextBoxFlag xmlns="" xmlns:m="http://schemas.openxmlformats.org/officeDocument/2006/math" xmlns:a14="http://schemas.microsoft.com/office/drawing/2010/main" xmlns:ma14="http://schemas.microsoft.com/office/mac/drawingml/2011/main" val="1"/>
             </a:ext>
           </a:extLst>
         </p:spPr>
@@ -23774,7 +23962,7 @@
           </a:ln>
           <a:extLst>
             <a:ext uri="{C572A759-6A51-4108-AA02-DFA0A04FC94B}">
-              <ma14:wrappingTextBoxFlag xmlns:ma14="http://schemas.microsoft.com/office/mac/drawingml/2011/main" xmlns:a14="http://schemas.microsoft.com/office/drawing/2010/main" xmlns:m="http://schemas.openxmlformats.org/officeDocument/2006/math" xmlns="" val="1"/>
+              <ma14:wrappingTextBoxFlag xmlns="" xmlns:m="http://schemas.openxmlformats.org/officeDocument/2006/math" xmlns:a14="http://schemas.microsoft.com/office/drawing/2010/main" xmlns:ma14="http://schemas.microsoft.com/office/mac/drawingml/2011/main" val="1"/>
             </a:ext>
           </a:extLst>
         </p:spPr>
@@ -23826,7 +24014,7 @@
           </a:ln>
           <a:extLst>
             <a:ext uri="{C572A759-6A51-4108-AA02-DFA0A04FC94B}">
-              <ma14:wrappingTextBoxFlag xmlns:ma14="http://schemas.microsoft.com/office/mac/drawingml/2011/main" xmlns:a14="http://schemas.microsoft.com/office/drawing/2010/main" xmlns:m="http://schemas.openxmlformats.org/officeDocument/2006/math" xmlns="" val="1"/>
+              <ma14:wrappingTextBoxFlag xmlns="" xmlns:m="http://schemas.openxmlformats.org/officeDocument/2006/math" xmlns:a14="http://schemas.microsoft.com/office/drawing/2010/main" xmlns:ma14="http://schemas.microsoft.com/office/mac/drawingml/2011/main" val="1"/>
             </a:ext>
           </a:extLst>
         </p:spPr>
@@ -23878,7 +24066,7 @@
           </a:ln>
           <a:extLst>
             <a:ext uri="{C572A759-6A51-4108-AA02-DFA0A04FC94B}">
-              <ma14:wrappingTextBoxFlag xmlns:ma14="http://schemas.microsoft.com/office/mac/drawingml/2011/main" xmlns:a14="http://schemas.microsoft.com/office/drawing/2010/main" xmlns:m="http://schemas.openxmlformats.org/officeDocument/2006/math" xmlns="" val="1"/>
+              <ma14:wrappingTextBoxFlag xmlns="" xmlns:m="http://schemas.openxmlformats.org/officeDocument/2006/math" xmlns:a14="http://schemas.microsoft.com/office/drawing/2010/main" xmlns:ma14="http://schemas.microsoft.com/office/mac/drawingml/2011/main" val="1"/>
             </a:ext>
           </a:extLst>
         </p:spPr>
@@ -23930,7 +24118,7 @@
           </a:ln>
           <a:extLst>
             <a:ext uri="{C572A759-6A51-4108-AA02-DFA0A04FC94B}">
-              <ma14:wrappingTextBoxFlag xmlns:ma14="http://schemas.microsoft.com/office/mac/drawingml/2011/main" xmlns:a14="http://schemas.microsoft.com/office/drawing/2010/main" xmlns:m="http://schemas.openxmlformats.org/officeDocument/2006/math" xmlns="" val="1"/>
+              <ma14:wrappingTextBoxFlag xmlns="" xmlns:m="http://schemas.openxmlformats.org/officeDocument/2006/math" xmlns:a14="http://schemas.microsoft.com/office/drawing/2010/main" xmlns:ma14="http://schemas.microsoft.com/office/mac/drawingml/2011/main" val="1"/>
             </a:ext>
           </a:extLst>
         </p:spPr>
@@ -24017,7 +24205,7 @@
           </a:ln>
           <a:extLst>
             <a:ext uri="{C572A759-6A51-4108-AA02-DFA0A04FC94B}">
-              <ma14:wrappingTextBoxFlag xmlns:ma14="http://schemas.microsoft.com/office/mac/drawingml/2011/main" xmlns:a14="http://schemas.microsoft.com/office/drawing/2010/main" xmlns:m="http://schemas.openxmlformats.org/officeDocument/2006/math" xmlns="" val="1"/>
+              <ma14:wrappingTextBoxFlag xmlns="" xmlns:m="http://schemas.openxmlformats.org/officeDocument/2006/math" xmlns:a14="http://schemas.microsoft.com/office/drawing/2010/main" xmlns:ma14="http://schemas.microsoft.com/office/mac/drawingml/2011/main" val="1"/>
             </a:ext>
           </a:extLst>
         </p:spPr>
@@ -24104,7 +24292,7 @@
           </a:ln>
           <a:extLst>
             <a:ext uri="{C572A759-6A51-4108-AA02-DFA0A04FC94B}">
-              <ma14:wrappingTextBoxFlag xmlns:ma14="http://schemas.microsoft.com/office/mac/drawingml/2011/main" xmlns:a14="http://schemas.microsoft.com/office/drawing/2010/main" xmlns:m="http://schemas.openxmlformats.org/officeDocument/2006/math" xmlns="" val="1"/>
+              <ma14:wrappingTextBoxFlag xmlns="" xmlns:m="http://schemas.openxmlformats.org/officeDocument/2006/math" xmlns:a14="http://schemas.microsoft.com/office/drawing/2010/main" xmlns:ma14="http://schemas.microsoft.com/office/mac/drawingml/2011/main" val="1"/>
             </a:ext>
           </a:extLst>
         </p:spPr>
@@ -24187,7 +24375,7 @@
           </a:ln>
           <a:extLst>
             <a:ext uri="{C572A759-6A51-4108-AA02-DFA0A04FC94B}">
-              <ma14:wrappingTextBoxFlag xmlns:ma14="http://schemas.microsoft.com/office/mac/drawingml/2011/main" xmlns:a14="http://schemas.microsoft.com/office/drawing/2010/main" xmlns:m="http://schemas.openxmlformats.org/officeDocument/2006/math" xmlns="" val="1"/>
+              <ma14:wrappingTextBoxFlag xmlns="" xmlns:m="http://schemas.openxmlformats.org/officeDocument/2006/math" xmlns:a14="http://schemas.microsoft.com/office/drawing/2010/main" xmlns:ma14="http://schemas.microsoft.com/office/mac/drawingml/2011/main" val="1"/>
             </a:ext>
           </a:extLst>
         </p:spPr>
@@ -24239,7 +24427,7 @@
           </a:ln>
           <a:extLst>
             <a:ext uri="{C572A759-6A51-4108-AA02-DFA0A04FC94B}">
-              <ma14:wrappingTextBoxFlag xmlns:ma14="http://schemas.microsoft.com/office/mac/drawingml/2011/main" xmlns:a14="http://schemas.microsoft.com/office/drawing/2010/main" xmlns:m="http://schemas.openxmlformats.org/officeDocument/2006/math" xmlns="" val="1"/>
+              <ma14:wrappingTextBoxFlag xmlns="" xmlns:m="http://schemas.openxmlformats.org/officeDocument/2006/math" xmlns:a14="http://schemas.microsoft.com/office/drawing/2010/main" xmlns:ma14="http://schemas.microsoft.com/office/mac/drawingml/2011/main" val="1"/>
             </a:ext>
           </a:extLst>
         </p:spPr>
@@ -24287,7 +24475,7 @@
           </a:ln>
           <a:extLst>
             <a:ext uri="{C572A759-6A51-4108-AA02-DFA0A04FC94B}">
-              <ma14:wrappingTextBoxFlag xmlns:ma14="http://schemas.microsoft.com/office/mac/drawingml/2011/main" xmlns:a14="http://schemas.microsoft.com/office/drawing/2010/main" xmlns:m="http://schemas.openxmlformats.org/officeDocument/2006/math" xmlns="" val="1"/>
+              <ma14:wrappingTextBoxFlag xmlns="" xmlns:m="http://schemas.openxmlformats.org/officeDocument/2006/math" xmlns:a14="http://schemas.microsoft.com/office/drawing/2010/main" xmlns:ma14="http://schemas.microsoft.com/office/mac/drawingml/2011/main" val="1"/>
             </a:ext>
           </a:extLst>
         </p:spPr>
@@ -24472,7 +24660,7 @@
           </a:ln>
           <a:extLst>
             <a:ext uri="{C572A759-6A51-4108-AA02-DFA0A04FC94B}">
-              <ma14:wrappingTextBoxFlag xmlns="" xmlns:m="http://schemas.openxmlformats.org/officeDocument/2006/math" xmlns:a14="http://schemas.microsoft.com/office/drawing/2010/main" xmlns:ma14="http://schemas.microsoft.com/office/mac/drawingml/2011/main" val="1"/>
+              <ma14:wrappingTextBoxFlag xmlns:ma14="http://schemas.microsoft.com/office/mac/drawingml/2011/main" xmlns:a14="http://schemas.microsoft.com/office/drawing/2010/main" xmlns:m="http://schemas.openxmlformats.org/officeDocument/2006/math" xmlns="" val="1"/>
             </a:ext>
           </a:extLst>
         </p:spPr>
@@ -24549,7 +24737,7 @@
           </a:ln>
           <a:extLst>
             <a:ext uri="{C572A759-6A51-4108-AA02-DFA0A04FC94B}">
-              <ma14:wrappingTextBoxFlag xmlns="" xmlns:m="http://schemas.openxmlformats.org/officeDocument/2006/math" xmlns:a14="http://schemas.microsoft.com/office/drawing/2010/main" xmlns:ma14="http://schemas.microsoft.com/office/mac/drawingml/2011/main" val="1"/>
+              <ma14:wrappingTextBoxFlag xmlns:ma14="http://schemas.microsoft.com/office/mac/drawingml/2011/main" xmlns:a14="http://schemas.microsoft.com/office/drawing/2010/main" xmlns:m="http://schemas.openxmlformats.org/officeDocument/2006/math" xmlns="" val="1"/>
             </a:ext>
           </a:extLst>
         </p:spPr>
@@ -25547,7 +25735,7 @@
           </a:ln>
           <a:extLst>
             <a:ext uri="{C572A759-6A51-4108-AA02-DFA0A04FC94B}">
-              <ma14:wrappingTextBoxFlag xmlns="" xmlns:m="http://schemas.openxmlformats.org/officeDocument/2006/math" xmlns:a14="http://schemas.microsoft.com/office/drawing/2010/main" xmlns:ma14="http://schemas.microsoft.com/office/mac/drawingml/2011/main" val="1"/>
+              <ma14:wrappingTextBoxFlag xmlns:ma14="http://schemas.microsoft.com/office/mac/drawingml/2011/main" xmlns:a14="http://schemas.microsoft.com/office/drawing/2010/main" xmlns:m="http://schemas.openxmlformats.org/officeDocument/2006/math" xmlns="" val="1"/>
             </a:ext>
           </a:extLst>
         </p:spPr>
@@ -25635,7 +25823,7 @@
           </a:ln>
           <a:extLst>
             <a:ext uri="{C572A759-6A51-4108-AA02-DFA0A04FC94B}">
-              <ma14:wrappingTextBoxFlag xmlns="" xmlns:m="http://schemas.openxmlformats.org/officeDocument/2006/math" xmlns:a14="http://schemas.microsoft.com/office/drawing/2010/main" xmlns:ma14="http://schemas.microsoft.com/office/mac/drawingml/2011/main" val="1"/>
+              <ma14:wrappingTextBoxFlag xmlns:ma14="http://schemas.microsoft.com/office/mac/drawingml/2011/main" xmlns:a14="http://schemas.microsoft.com/office/drawing/2010/main" xmlns:m="http://schemas.openxmlformats.org/officeDocument/2006/math" xmlns="" val="1"/>
             </a:ext>
           </a:extLst>
         </p:spPr>
@@ -25714,7 +25902,7 @@
           </a:ln>
           <a:extLst>
             <a:ext uri="{C572A759-6A51-4108-AA02-DFA0A04FC94B}">
-              <ma14:wrappingTextBoxFlag xmlns="" xmlns:m="http://schemas.openxmlformats.org/officeDocument/2006/math" xmlns:a14="http://schemas.microsoft.com/office/drawing/2010/main" xmlns:ma14="http://schemas.microsoft.com/office/mac/drawingml/2011/main" val="1"/>
+              <ma14:wrappingTextBoxFlag xmlns:ma14="http://schemas.microsoft.com/office/mac/drawingml/2011/main" xmlns:a14="http://schemas.microsoft.com/office/drawing/2010/main" xmlns:m="http://schemas.openxmlformats.org/officeDocument/2006/math" xmlns="" val="1"/>
             </a:ext>
           </a:extLst>
         </p:spPr>
@@ -25798,7 +25986,7 @@
           </a:ln>
           <a:extLst>
             <a:ext uri="{C572A759-6A51-4108-AA02-DFA0A04FC94B}">
-              <ma14:wrappingTextBoxFlag xmlns="" xmlns:m="http://schemas.openxmlformats.org/officeDocument/2006/math" xmlns:a14="http://schemas.microsoft.com/office/drawing/2010/main" xmlns:ma14="http://schemas.microsoft.com/office/mac/drawingml/2011/main" val="1"/>
+              <ma14:wrappingTextBoxFlag xmlns:ma14="http://schemas.microsoft.com/office/mac/drawingml/2011/main" xmlns:a14="http://schemas.microsoft.com/office/drawing/2010/main" xmlns:m="http://schemas.openxmlformats.org/officeDocument/2006/math" xmlns="" val="1"/>
             </a:ext>
           </a:extLst>
         </p:spPr>
@@ -25877,7 +26065,7 @@
           </a:ln>
           <a:extLst>
             <a:ext uri="{C572A759-6A51-4108-AA02-DFA0A04FC94B}">
-              <ma14:wrappingTextBoxFlag xmlns="" xmlns:m="http://schemas.openxmlformats.org/officeDocument/2006/math" xmlns:a14="http://schemas.microsoft.com/office/drawing/2010/main" xmlns:ma14="http://schemas.microsoft.com/office/mac/drawingml/2011/main" val="1"/>
+              <ma14:wrappingTextBoxFlag xmlns:ma14="http://schemas.microsoft.com/office/mac/drawingml/2011/main" xmlns:a14="http://schemas.microsoft.com/office/drawing/2010/main" xmlns:m="http://schemas.openxmlformats.org/officeDocument/2006/math" xmlns="" val="1"/>
             </a:ext>
           </a:extLst>
         </p:spPr>
@@ -25954,7 +26142,7 @@
           </a:ln>
           <a:extLst>
             <a:ext uri="{C572A759-6A51-4108-AA02-DFA0A04FC94B}">
-              <ma14:wrappingTextBoxFlag xmlns="" xmlns:m="http://schemas.openxmlformats.org/officeDocument/2006/math" xmlns:a14="http://schemas.microsoft.com/office/drawing/2010/main" xmlns:ma14="http://schemas.microsoft.com/office/mac/drawingml/2011/main" val="1"/>
+              <ma14:wrappingTextBoxFlag xmlns:ma14="http://schemas.microsoft.com/office/mac/drawingml/2011/main" xmlns:a14="http://schemas.microsoft.com/office/drawing/2010/main" xmlns:m="http://schemas.openxmlformats.org/officeDocument/2006/math" xmlns="" val="1"/>
             </a:ext>
           </a:extLst>
         </p:spPr>
@@ -26033,7 +26221,7 @@
           </a:ln>
           <a:extLst>
             <a:ext uri="{C572A759-6A51-4108-AA02-DFA0A04FC94B}">
-              <ma14:wrappingTextBoxFlag xmlns="" xmlns:m="http://schemas.openxmlformats.org/officeDocument/2006/math" xmlns:a14="http://schemas.microsoft.com/office/drawing/2010/main" xmlns:ma14="http://schemas.microsoft.com/office/mac/drawingml/2011/main" val="1"/>
+              <ma14:wrappingTextBoxFlag xmlns:ma14="http://schemas.microsoft.com/office/mac/drawingml/2011/main" xmlns:a14="http://schemas.microsoft.com/office/drawing/2010/main" xmlns:m="http://schemas.openxmlformats.org/officeDocument/2006/math" xmlns="" val="1"/>
             </a:ext>
           </a:extLst>
         </p:spPr>
@@ -26116,7 +26304,7 @@
           </a:ln>
           <a:extLst>
             <a:ext uri="{C572A759-6A51-4108-AA02-DFA0A04FC94B}">
-              <ma14:wrappingTextBoxFlag xmlns="" xmlns:m="http://schemas.openxmlformats.org/officeDocument/2006/math" xmlns:a14="http://schemas.microsoft.com/office/drawing/2010/main" xmlns:ma14="http://schemas.microsoft.com/office/mac/drawingml/2011/main" val="1"/>
+              <ma14:wrappingTextBoxFlag xmlns:ma14="http://schemas.microsoft.com/office/mac/drawingml/2011/main" xmlns:a14="http://schemas.microsoft.com/office/drawing/2010/main" xmlns:m="http://schemas.openxmlformats.org/officeDocument/2006/math" xmlns="" val="1"/>
             </a:ext>
           </a:extLst>
         </p:spPr>
@@ -26164,7 +26352,7 @@
           </a:ln>
           <a:extLst>
             <a:ext uri="{C572A759-6A51-4108-AA02-DFA0A04FC94B}">
-              <ma14:wrappingTextBoxFlag xmlns="" xmlns:m="http://schemas.openxmlformats.org/officeDocument/2006/math" xmlns:a14="http://schemas.microsoft.com/office/drawing/2010/main" xmlns:ma14="http://schemas.microsoft.com/office/mac/drawingml/2011/main" val="1"/>
+              <ma14:wrappingTextBoxFlag xmlns:ma14="http://schemas.microsoft.com/office/mac/drawingml/2011/main" xmlns:a14="http://schemas.microsoft.com/office/drawing/2010/main" xmlns:m="http://schemas.openxmlformats.org/officeDocument/2006/math" xmlns="" val="1"/>
             </a:ext>
           </a:extLst>
         </p:spPr>
@@ -27633,7 +27821,7 @@
           </a:ln>
           <a:extLst>
             <a:ext uri="{C572A759-6A51-4108-AA02-DFA0A04FC94B}">
-              <ma14:wrappingTextBoxFlag xmlns="" xmlns:m="http://schemas.openxmlformats.org/officeDocument/2006/math" xmlns:a14="http://schemas.microsoft.com/office/drawing/2010/main" xmlns:ma14="http://schemas.microsoft.com/office/mac/drawingml/2011/main" val="1"/>
+              <ma14:wrappingTextBoxFlag xmlns:ma14="http://schemas.microsoft.com/office/mac/drawingml/2011/main" xmlns:a14="http://schemas.microsoft.com/office/drawing/2010/main" xmlns:m="http://schemas.openxmlformats.org/officeDocument/2006/math" xmlns="" val="1"/>
             </a:ext>
           </a:extLst>
         </p:spPr>
@@ -28142,7 +28330,7 @@
           </a:ln>
           <a:extLst>
             <a:ext uri="{C572A759-6A51-4108-AA02-DFA0A04FC94B}">
-              <ma14:wrappingTextBoxFlag xmlns="" xmlns:m="http://schemas.openxmlformats.org/officeDocument/2006/math" xmlns:a14="http://schemas.microsoft.com/office/drawing/2010/main" xmlns:ma14="http://schemas.microsoft.com/office/mac/drawingml/2011/main" val="1"/>
+              <ma14:wrappingTextBoxFlag xmlns:ma14="http://schemas.microsoft.com/office/mac/drawingml/2011/main" xmlns:a14="http://schemas.microsoft.com/office/drawing/2010/main" xmlns:m="http://schemas.openxmlformats.org/officeDocument/2006/math" xmlns="" val="1"/>
             </a:ext>
           </a:extLst>
         </p:spPr>
@@ -28230,7 +28418,7 @@
           </a:ln>
           <a:extLst>
             <a:ext uri="{C572A759-6A51-4108-AA02-DFA0A04FC94B}">
-              <ma14:wrappingTextBoxFlag xmlns="" xmlns:m="http://schemas.openxmlformats.org/officeDocument/2006/math" xmlns:a14="http://schemas.microsoft.com/office/drawing/2010/main" xmlns:ma14="http://schemas.microsoft.com/office/mac/drawingml/2011/main" val="1"/>
+              <ma14:wrappingTextBoxFlag xmlns:ma14="http://schemas.microsoft.com/office/mac/drawingml/2011/main" xmlns:a14="http://schemas.microsoft.com/office/drawing/2010/main" xmlns:m="http://schemas.openxmlformats.org/officeDocument/2006/math" xmlns="" val="1"/>
             </a:ext>
           </a:extLst>
         </p:spPr>
@@ -28282,7 +28470,7 @@
           </a:ln>
           <a:extLst>
             <a:ext uri="{C572A759-6A51-4108-AA02-DFA0A04FC94B}">
-              <ma14:wrappingTextBoxFlag xmlns="" xmlns:m="http://schemas.openxmlformats.org/officeDocument/2006/math" xmlns:a14="http://schemas.microsoft.com/office/drawing/2010/main" xmlns:ma14="http://schemas.microsoft.com/office/mac/drawingml/2011/main" val="1"/>
+              <ma14:wrappingTextBoxFlag xmlns:ma14="http://schemas.microsoft.com/office/mac/drawingml/2011/main" xmlns:a14="http://schemas.microsoft.com/office/drawing/2010/main" xmlns:m="http://schemas.openxmlformats.org/officeDocument/2006/math" xmlns="" val="1"/>
             </a:ext>
           </a:extLst>
         </p:spPr>
@@ -29459,7 +29647,7 @@
           </a:ln>
           <a:extLst>
             <a:ext uri="{C572A759-6A51-4108-AA02-DFA0A04FC94B}">
-              <ma14:wrappingTextBoxFlag xmlns="" xmlns:m="http://schemas.openxmlformats.org/officeDocument/2006/math" xmlns:a14="http://schemas.microsoft.com/office/drawing/2010/main" xmlns:ma14="http://schemas.microsoft.com/office/mac/drawingml/2011/main" val="1"/>
+              <ma14:wrappingTextBoxFlag xmlns:ma14="http://schemas.microsoft.com/office/mac/drawingml/2011/main" xmlns:a14="http://schemas.microsoft.com/office/drawing/2010/main" xmlns:m="http://schemas.openxmlformats.org/officeDocument/2006/math" xmlns="" val="1"/>
             </a:ext>
           </a:extLst>
         </p:spPr>
@@ -29511,7 +29699,7 @@
           </a:ln>
           <a:extLst>
             <a:ext uri="{C572A759-6A51-4108-AA02-DFA0A04FC94B}">
-              <ma14:wrappingTextBoxFlag xmlns="" xmlns:m="http://schemas.openxmlformats.org/officeDocument/2006/math" xmlns:a14="http://schemas.microsoft.com/office/drawing/2010/main" xmlns:ma14="http://schemas.microsoft.com/office/mac/drawingml/2011/main" val="1"/>
+              <ma14:wrappingTextBoxFlag xmlns:ma14="http://schemas.microsoft.com/office/mac/drawingml/2011/main" xmlns:a14="http://schemas.microsoft.com/office/drawing/2010/main" xmlns:m="http://schemas.openxmlformats.org/officeDocument/2006/math" xmlns="" val="1"/>
             </a:ext>
           </a:extLst>
         </p:spPr>
@@ -29563,7 +29751,7 @@
           </a:ln>
           <a:extLst>
             <a:ext uri="{C572A759-6A51-4108-AA02-DFA0A04FC94B}">
-              <ma14:wrappingTextBoxFlag xmlns="" xmlns:m="http://schemas.openxmlformats.org/officeDocument/2006/math" xmlns:a14="http://schemas.microsoft.com/office/drawing/2010/main" xmlns:ma14="http://schemas.microsoft.com/office/mac/drawingml/2011/main" val="1"/>
+              <ma14:wrappingTextBoxFlag xmlns:ma14="http://schemas.microsoft.com/office/mac/drawingml/2011/main" xmlns:a14="http://schemas.microsoft.com/office/drawing/2010/main" xmlns:m="http://schemas.openxmlformats.org/officeDocument/2006/math" xmlns="" val="1"/>
             </a:ext>
           </a:extLst>
         </p:spPr>
@@ -29615,7 +29803,7 @@
           </a:ln>
           <a:extLst>
             <a:ext uri="{C572A759-6A51-4108-AA02-DFA0A04FC94B}">
-              <ma14:wrappingTextBoxFlag xmlns="" xmlns:m="http://schemas.openxmlformats.org/officeDocument/2006/math" xmlns:a14="http://schemas.microsoft.com/office/drawing/2010/main" xmlns:ma14="http://schemas.microsoft.com/office/mac/drawingml/2011/main" val="1"/>
+              <ma14:wrappingTextBoxFlag xmlns:ma14="http://schemas.microsoft.com/office/mac/drawingml/2011/main" xmlns:a14="http://schemas.microsoft.com/office/drawing/2010/main" xmlns:m="http://schemas.openxmlformats.org/officeDocument/2006/math" xmlns="" val="1"/>
             </a:ext>
           </a:extLst>
         </p:spPr>
@@ -29667,7 +29855,7 @@
           </a:ln>
           <a:extLst>
             <a:ext uri="{C572A759-6A51-4108-AA02-DFA0A04FC94B}">
-              <ma14:wrappingTextBoxFlag xmlns="" xmlns:m="http://schemas.openxmlformats.org/officeDocument/2006/math" xmlns:a14="http://schemas.microsoft.com/office/drawing/2010/main" xmlns:ma14="http://schemas.microsoft.com/office/mac/drawingml/2011/main" val="1"/>
+              <ma14:wrappingTextBoxFlag xmlns:ma14="http://schemas.microsoft.com/office/mac/drawingml/2011/main" xmlns:a14="http://schemas.microsoft.com/office/drawing/2010/main" xmlns:m="http://schemas.openxmlformats.org/officeDocument/2006/math" xmlns="" val="1"/>
             </a:ext>
           </a:extLst>
         </p:spPr>
@@ -29719,7 +29907,7 @@
           </a:ln>
           <a:extLst>
             <a:ext uri="{C572A759-6A51-4108-AA02-DFA0A04FC94B}">
-              <ma14:wrappingTextBoxFlag xmlns="" xmlns:m="http://schemas.openxmlformats.org/officeDocument/2006/math" xmlns:a14="http://schemas.microsoft.com/office/drawing/2010/main" xmlns:ma14="http://schemas.microsoft.com/office/mac/drawingml/2011/main" val="1"/>
+              <ma14:wrappingTextBoxFlag xmlns:ma14="http://schemas.microsoft.com/office/mac/drawingml/2011/main" xmlns:a14="http://schemas.microsoft.com/office/drawing/2010/main" xmlns:m="http://schemas.openxmlformats.org/officeDocument/2006/math" xmlns="" val="1"/>
             </a:ext>
           </a:extLst>
         </p:spPr>
@@ -29771,7 +29959,7 @@
           </a:ln>
           <a:extLst>
             <a:ext uri="{C572A759-6A51-4108-AA02-DFA0A04FC94B}">
-              <ma14:wrappingTextBoxFlag xmlns="" xmlns:m="http://schemas.openxmlformats.org/officeDocument/2006/math" xmlns:a14="http://schemas.microsoft.com/office/drawing/2010/main" xmlns:ma14="http://schemas.microsoft.com/office/mac/drawingml/2011/main" val="1"/>
+              <ma14:wrappingTextBoxFlag xmlns:ma14="http://schemas.microsoft.com/office/mac/drawingml/2011/main" xmlns:a14="http://schemas.microsoft.com/office/drawing/2010/main" xmlns:m="http://schemas.openxmlformats.org/officeDocument/2006/math" xmlns="" val="1"/>
             </a:ext>
           </a:extLst>
         </p:spPr>
@@ -29823,7 +30011,7 @@
           </a:ln>
           <a:extLst>
             <a:ext uri="{C572A759-6A51-4108-AA02-DFA0A04FC94B}">
-              <ma14:wrappingTextBoxFlag xmlns="" xmlns:m="http://schemas.openxmlformats.org/officeDocument/2006/math" xmlns:a14="http://schemas.microsoft.com/office/drawing/2010/main" xmlns:ma14="http://schemas.microsoft.com/office/mac/drawingml/2011/main" val="1"/>
+              <ma14:wrappingTextBoxFlag xmlns:ma14="http://schemas.microsoft.com/office/mac/drawingml/2011/main" xmlns:a14="http://schemas.microsoft.com/office/drawing/2010/main" xmlns:m="http://schemas.openxmlformats.org/officeDocument/2006/math" xmlns="" val="1"/>
             </a:ext>
           </a:extLst>
         </p:spPr>
@@ -29875,7 +30063,7 @@
           </a:ln>
           <a:extLst>
             <a:ext uri="{C572A759-6A51-4108-AA02-DFA0A04FC94B}">
-              <ma14:wrappingTextBoxFlag xmlns="" xmlns:m="http://schemas.openxmlformats.org/officeDocument/2006/math" xmlns:a14="http://schemas.microsoft.com/office/drawing/2010/main" xmlns:ma14="http://schemas.microsoft.com/office/mac/drawingml/2011/main" val="1"/>
+              <ma14:wrappingTextBoxFlag xmlns:ma14="http://schemas.microsoft.com/office/mac/drawingml/2011/main" xmlns:a14="http://schemas.microsoft.com/office/drawing/2010/main" xmlns:m="http://schemas.openxmlformats.org/officeDocument/2006/math" xmlns="" val="1"/>
             </a:ext>
           </a:extLst>
         </p:spPr>
@@ -29927,7 +30115,7 @@
           </a:ln>
           <a:extLst>
             <a:ext uri="{C572A759-6A51-4108-AA02-DFA0A04FC94B}">
-              <ma14:wrappingTextBoxFlag xmlns="" xmlns:m="http://schemas.openxmlformats.org/officeDocument/2006/math" xmlns:a14="http://schemas.microsoft.com/office/drawing/2010/main" xmlns:ma14="http://schemas.microsoft.com/office/mac/drawingml/2011/main" val="1"/>
+              <ma14:wrappingTextBoxFlag xmlns:ma14="http://schemas.microsoft.com/office/mac/drawingml/2011/main" xmlns:a14="http://schemas.microsoft.com/office/drawing/2010/main" xmlns:m="http://schemas.openxmlformats.org/officeDocument/2006/math" xmlns="" val="1"/>
             </a:ext>
           </a:extLst>
         </p:spPr>
@@ -29979,7 +30167,7 @@
           </a:ln>
           <a:extLst>
             <a:ext uri="{C572A759-6A51-4108-AA02-DFA0A04FC94B}">
-              <ma14:wrappingTextBoxFlag xmlns="" xmlns:m="http://schemas.openxmlformats.org/officeDocument/2006/math" xmlns:a14="http://schemas.microsoft.com/office/drawing/2010/main" xmlns:ma14="http://schemas.microsoft.com/office/mac/drawingml/2011/main" val="1"/>
+              <ma14:wrappingTextBoxFlag xmlns:ma14="http://schemas.microsoft.com/office/mac/drawingml/2011/main" xmlns:a14="http://schemas.microsoft.com/office/drawing/2010/main" xmlns:m="http://schemas.openxmlformats.org/officeDocument/2006/math" xmlns="" val="1"/>
             </a:ext>
           </a:extLst>
         </p:spPr>
@@ -30031,7 +30219,7 @@
           </a:ln>
           <a:extLst>
             <a:ext uri="{C572A759-6A51-4108-AA02-DFA0A04FC94B}">
-              <ma14:wrappingTextBoxFlag xmlns="" xmlns:m="http://schemas.openxmlformats.org/officeDocument/2006/math" xmlns:a14="http://schemas.microsoft.com/office/drawing/2010/main" xmlns:ma14="http://schemas.microsoft.com/office/mac/drawingml/2011/main" val="1"/>
+              <ma14:wrappingTextBoxFlag xmlns:ma14="http://schemas.microsoft.com/office/mac/drawingml/2011/main" xmlns:a14="http://schemas.microsoft.com/office/drawing/2010/main" xmlns:m="http://schemas.openxmlformats.org/officeDocument/2006/math" xmlns="" val="1"/>
             </a:ext>
           </a:extLst>
         </p:spPr>
@@ -30083,7 +30271,7 @@
           </a:ln>
           <a:extLst>
             <a:ext uri="{C572A759-6A51-4108-AA02-DFA0A04FC94B}">
-              <ma14:wrappingTextBoxFlag xmlns="" xmlns:m="http://schemas.openxmlformats.org/officeDocument/2006/math" xmlns:a14="http://schemas.microsoft.com/office/drawing/2010/main" xmlns:ma14="http://schemas.microsoft.com/office/mac/drawingml/2011/main" val="1"/>
+              <ma14:wrappingTextBoxFlag xmlns:ma14="http://schemas.microsoft.com/office/mac/drawingml/2011/main" xmlns:a14="http://schemas.microsoft.com/office/drawing/2010/main" xmlns:m="http://schemas.openxmlformats.org/officeDocument/2006/math" xmlns="" val="1"/>
             </a:ext>
           </a:extLst>
         </p:spPr>
@@ -30135,7 +30323,7 @@
           </a:ln>
           <a:extLst>
             <a:ext uri="{C572A759-6A51-4108-AA02-DFA0A04FC94B}">
-              <ma14:wrappingTextBoxFlag xmlns="" xmlns:m="http://schemas.openxmlformats.org/officeDocument/2006/math" xmlns:a14="http://schemas.microsoft.com/office/drawing/2010/main" xmlns:ma14="http://schemas.microsoft.com/office/mac/drawingml/2011/main" val="1"/>
+              <ma14:wrappingTextBoxFlag xmlns:ma14="http://schemas.microsoft.com/office/mac/drawingml/2011/main" xmlns:a14="http://schemas.microsoft.com/office/drawing/2010/main" xmlns:m="http://schemas.openxmlformats.org/officeDocument/2006/math" xmlns="" val="1"/>
             </a:ext>
           </a:extLst>
         </p:spPr>
@@ -30187,7 +30375,7 @@
           </a:ln>
           <a:extLst>
             <a:ext uri="{C572A759-6A51-4108-AA02-DFA0A04FC94B}">
-              <ma14:wrappingTextBoxFlag xmlns="" xmlns:m="http://schemas.openxmlformats.org/officeDocument/2006/math" xmlns:a14="http://schemas.microsoft.com/office/drawing/2010/main" xmlns:ma14="http://schemas.microsoft.com/office/mac/drawingml/2011/main" val="1"/>
+              <ma14:wrappingTextBoxFlag xmlns:ma14="http://schemas.microsoft.com/office/mac/drawingml/2011/main" xmlns:a14="http://schemas.microsoft.com/office/drawing/2010/main" xmlns:m="http://schemas.openxmlformats.org/officeDocument/2006/math" xmlns="" val="1"/>
             </a:ext>
           </a:extLst>
         </p:spPr>
@@ -30239,7 +30427,7 @@
           </a:ln>
           <a:extLst>
             <a:ext uri="{C572A759-6A51-4108-AA02-DFA0A04FC94B}">
-              <ma14:wrappingTextBoxFlag xmlns="" xmlns:m="http://schemas.openxmlformats.org/officeDocument/2006/math" xmlns:a14="http://schemas.microsoft.com/office/drawing/2010/main" xmlns:ma14="http://schemas.microsoft.com/office/mac/drawingml/2011/main" val="1"/>
+              <ma14:wrappingTextBoxFlag xmlns:ma14="http://schemas.microsoft.com/office/mac/drawingml/2011/main" xmlns:a14="http://schemas.microsoft.com/office/drawing/2010/main" xmlns:m="http://schemas.openxmlformats.org/officeDocument/2006/math" xmlns="" val="1"/>
             </a:ext>
           </a:extLst>
         </p:spPr>
@@ -30291,7 +30479,7 @@
           </a:ln>
           <a:extLst>
             <a:ext uri="{C572A759-6A51-4108-AA02-DFA0A04FC94B}">
-              <ma14:wrappingTextBoxFlag xmlns="" xmlns:m="http://schemas.openxmlformats.org/officeDocument/2006/math" xmlns:a14="http://schemas.microsoft.com/office/drawing/2010/main" xmlns:ma14="http://schemas.microsoft.com/office/mac/drawingml/2011/main" val="1"/>
+              <ma14:wrappingTextBoxFlag xmlns:ma14="http://schemas.microsoft.com/office/mac/drawingml/2011/main" xmlns:a14="http://schemas.microsoft.com/office/drawing/2010/main" xmlns:m="http://schemas.openxmlformats.org/officeDocument/2006/math" xmlns="" val="1"/>
             </a:ext>
           </a:extLst>
         </p:spPr>
@@ -30343,7 +30531,7 @@
           </a:ln>
           <a:extLst>
             <a:ext uri="{C572A759-6A51-4108-AA02-DFA0A04FC94B}">
-              <ma14:wrappingTextBoxFlag xmlns="" xmlns:m="http://schemas.openxmlformats.org/officeDocument/2006/math" xmlns:a14="http://schemas.microsoft.com/office/drawing/2010/main" xmlns:ma14="http://schemas.microsoft.com/office/mac/drawingml/2011/main" val="1"/>
+              <ma14:wrappingTextBoxFlag xmlns:ma14="http://schemas.microsoft.com/office/mac/drawingml/2011/main" xmlns:a14="http://schemas.microsoft.com/office/drawing/2010/main" xmlns:m="http://schemas.openxmlformats.org/officeDocument/2006/math" xmlns="" val="1"/>
             </a:ext>
           </a:extLst>
         </p:spPr>
@@ -30395,7 +30583,7 @@
           </a:ln>
           <a:extLst>
             <a:ext uri="{C572A759-6A51-4108-AA02-DFA0A04FC94B}">
-              <ma14:wrappingTextBoxFlag xmlns="" xmlns:m="http://schemas.openxmlformats.org/officeDocument/2006/math" xmlns:a14="http://schemas.microsoft.com/office/drawing/2010/main" xmlns:ma14="http://schemas.microsoft.com/office/mac/drawingml/2011/main" val="1"/>
+              <ma14:wrappingTextBoxFlag xmlns:ma14="http://schemas.microsoft.com/office/mac/drawingml/2011/main" xmlns:a14="http://schemas.microsoft.com/office/drawing/2010/main" xmlns:m="http://schemas.openxmlformats.org/officeDocument/2006/math" xmlns="" val="1"/>
             </a:ext>
           </a:extLst>
         </p:spPr>
@@ -30447,7 +30635,7 @@
           </a:ln>
           <a:extLst>
             <a:ext uri="{C572A759-6A51-4108-AA02-DFA0A04FC94B}">
-              <ma14:wrappingTextBoxFlag xmlns="" xmlns:m="http://schemas.openxmlformats.org/officeDocument/2006/math" xmlns:a14="http://schemas.microsoft.com/office/drawing/2010/main" xmlns:ma14="http://schemas.microsoft.com/office/mac/drawingml/2011/main" val="1"/>
+              <ma14:wrappingTextBoxFlag xmlns:ma14="http://schemas.microsoft.com/office/mac/drawingml/2011/main" xmlns:a14="http://schemas.microsoft.com/office/drawing/2010/main" xmlns:m="http://schemas.openxmlformats.org/officeDocument/2006/math" xmlns="" val="1"/>
             </a:ext>
           </a:extLst>
         </p:spPr>
@@ -30499,7 +30687,7 @@
           </a:ln>
           <a:extLst>
             <a:ext uri="{C572A759-6A51-4108-AA02-DFA0A04FC94B}">
-              <ma14:wrappingTextBoxFlag xmlns="" xmlns:m="http://schemas.openxmlformats.org/officeDocument/2006/math" xmlns:a14="http://schemas.microsoft.com/office/drawing/2010/main" xmlns:ma14="http://schemas.microsoft.com/office/mac/drawingml/2011/main" val="1"/>
+              <ma14:wrappingTextBoxFlag xmlns:ma14="http://schemas.microsoft.com/office/mac/drawingml/2011/main" xmlns:a14="http://schemas.microsoft.com/office/drawing/2010/main" xmlns:m="http://schemas.openxmlformats.org/officeDocument/2006/math" xmlns="" val="1"/>
             </a:ext>
           </a:extLst>
         </p:spPr>
@@ -30551,7 +30739,7 @@
           </a:ln>
           <a:extLst>
             <a:ext uri="{C572A759-6A51-4108-AA02-DFA0A04FC94B}">
-              <ma14:wrappingTextBoxFlag xmlns="" xmlns:m="http://schemas.openxmlformats.org/officeDocument/2006/math" xmlns:a14="http://schemas.microsoft.com/office/drawing/2010/main" xmlns:ma14="http://schemas.microsoft.com/office/mac/drawingml/2011/main" val="1"/>
+              <ma14:wrappingTextBoxFlag xmlns:ma14="http://schemas.microsoft.com/office/mac/drawingml/2011/main" xmlns:a14="http://schemas.microsoft.com/office/drawing/2010/main" xmlns:m="http://schemas.openxmlformats.org/officeDocument/2006/math" xmlns="" val="1"/>
             </a:ext>
           </a:extLst>
         </p:spPr>
@@ -30603,7 +30791,7 @@
           </a:ln>
           <a:extLst>
             <a:ext uri="{C572A759-6A51-4108-AA02-DFA0A04FC94B}">
-              <ma14:wrappingTextBoxFlag xmlns="" xmlns:m="http://schemas.openxmlformats.org/officeDocument/2006/math" xmlns:a14="http://schemas.microsoft.com/office/drawing/2010/main" xmlns:ma14="http://schemas.microsoft.com/office/mac/drawingml/2011/main" val="1"/>
+              <ma14:wrappingTextBoxFlag xmlns:ma14="http://schemas.microsoft.com/office/mac/drawingml/2011/main" xmlns:a14="http://schemas.microsoft.com/office/drawing/2010/main" xmlns:m="http://schemas.openxmlformats.org/officeDocument/2006/math" xmlns="" val="1"/>
             </a:ext>
           </a:extLst>
         </p:spPr>
@@ -30655,7 +30843,7 @@
           </a:ln>
           <a:extLst>
             <a:ext uri="{C572A759-6A51-4108-AA02-DFA0A04FC94B}">
-              <ma14:wrappingTextBoxFlag xmlns="" xmlns:m="http://schemas.openxmlformats.org/officeDocument/2006/math" xmlns:a14="http://schemas.microsoft.com/office/drawing/2010/main" xmlns:ma14="http://schemas.microsoft.com/office/mac/drawingml/2011/main" val="1"/>
+              <ma14:wrappingTextBoxFlag xmlns:ma14="http://schemas.microsoft.com/office/mac/drawingml/2011/main" xmlns:a14="http://schemas.microsoft.com/office/drawing/2010/main" xmlns:m="http://schemas.openxmlformats.org/officeDocument/2006/math" xmlns="" val="1"/>
             </a:ext>
           </a:extLst>
         </p:spPr>
@@ -30707,7 +30895,7 @@
           </a:ln>
           <a:extLst>
             <a:ext uri="{C572A759-6A51-4108-AA02-DFA0A04FC94B}">
-              <ma14:wrappingTextBoxFlag xmlns="" xmlns:m="http://schemas.openxmlformats.org/officeDocument/2006/math" xmlns:a14="http://schemas.microsoft.com/office/drawing/2010/main" xmlns:ma14="http://schemas.microsoft.com/office/mac/drawingml/2011/main" val="1"/>
+              <ma14:wrappingTextBoxFlag xmlns:ma14="http://schemas.microsoft.com/office/mac/drawingml/2011/main" xmlns:a14="http://schemas.microsoft.com/office/drawing/2010/main" xmlns:m="http://schemas.openxmlformats.org/officeDocument/2006/math" xmlns="" val="1"/>
             </a:ext>
           </a:extLst>
         </p:spPr>
@@ -30759,7 +30947,7 @@
           </a:ln>
           <a:extLst>
             <a:ext uri="{C572A759-6A51-4108-AA02-DFA0A04FC94B}">
-              <ma14:wrappingTextBoxFlag xmlns="" xmlns:m="http://schemas.openxmlformats.org/officeDocument/2006/math" xmlns:a14="http://schemas.microsoft.com/office/drawing/2010/main" xmlns:ma14="http://schemas.microsoft.com/office/mac/drawingml/2011/main" val="1"/>
+              <ma14:wrappingTextBoxFlag xmlns:ma14="http://schemas.microsoft.com/office/mac/drawingml/2011/main" xmlns:a14="http://schemas.microsoft.com/office/drawing/2010/main" xmlns:m="http://schemas.openxmlformats.org/officeDocument/2006/math" xmlns="" val="1"/>
             </a:ext>
           </a:extLst>
         </p:spPr>
@@ -30811,7 +30999,7 @@
           </a:ln>
           <a:extLst>
             <a:ext uri="{C572A759-6A51-4108-AA02-DFA0A04FC94B}">
-              <ma14:wrappingTextBoxFlag xmlns="" xmlns:m="http://schemas.openxmlformats.org/officeDocument/2006/math" xmlns:a14="http://schemas.microsoft.com/office/drawing/2010/main" xmlns:ma14="http://schemas.microsoft.com/office/mac/drawingml/2011/main" val="1"/>
+              <ma14:wrappingTextBoxFlag xmlns:ma14="http://schemas.microsoft.com/office/mac/drawingml/2011/main" xmlns:a14="http://schemas.microsoft.com/office/drawing/2010/main" xmlns:m="http://schemas.openxmlformats.org/officeDocument/2006/math" xmlns="" val="1"/>
             </a:ext>
           </a:extLst>
         </p:spPr>
@@ -30863,7 +31051,7 @@
           </a:ln>
           <a:extLst>
             <a:ext uri="{C572A759-6A51-4108-AA02-DFA0A04FC94B}">
-              <ma14:wrappingTextBoxFlag xmlns="" xmlns:m="http://schemas.openxmlformats.org/officeDocument/2006/math" xmlns:a14="http://schemas.microsoft.com/office/drawing/2010/main" xmlns:ma14="http://schemas.microsoft.com/office/mac/drawingml/2011/main" val="1"/>
+              <ma14:wrappingTextBoxFlag xmlns:ma14="http://schemas.microsoft.com/office/mac/drawingml/2011/main" xmlns:a14="http://schemas.microsoft.com/office/drawing/2010/main" xmlns:m="http://schemas.openxmlformats.org/officeDocument/2006/math" xmlns="" val="1"/>
             </a:ext>
           </a:extLst>
         </p:spPr>
@@ -30915,7 +31103,7 @@
           </a:ln>
           <a:extLst>
             <a:ext uri="{C572A759-6A51-4108-AA02-DFA0A04FC94B}">
-              <ma14:wrappingTextBoxFlag xmlns="" xmlns:m="http://schemas.openxmlformats.org/officeDocument/2006/math" xmlns:a14="http://schemas.microsoft.com/office/drawing/2010/main" xmlns:ma14="http://schemas.microsoft.com/office/mac/drawingml/2011/main" val="1"/>
+              <ma14:wrappingTextBoxFlag xmlns:ma14="http://schemas.microsoft.com/office/mac/drawingml/2011/main" xmlns:a14="http://schemas.microsoft.com/office/drawing/2010/main" xmlns:m="http://schemas.openxmlformats.org/officeDocument/2006/math" xmlns="" val="1"/>
             </a:ext>
           </a:extLst>
         </p:spPr>
@@ -30967,7 +31155,7 @@
           </a:ln>
           <a:extLst>
             <a:ext uri="{C572A759-6A51-4108-AA02-DFA0A04FC94B}">
-              <ma14:wrappingTextBoxFlag xmlns="" xmlns:m="http://schemas.openxmlformats.org/officeDocument/2006/math" xmlns:a14="http://schemas.microsoft.com/office/drawing/2010/main" xmlns:ma14="http://schemas.microsoft.com/office/mac/drawingml/2011/main" val="1"/>
+              <ma14:wrappingTextBoxFlag xmlns:ma14="http://schemas.microsoft.com/office/mac/drawingml/2011/main" xmlns:a14="http://schemas.microsoft.com/office/drawing/2010/main" xmlns:m="http://schemas.openxmlformats.org/officeDocument/2006/math" xmlns="" val="1"/>
             </a:ext>
           </a:extLst>
         </p:spPr>
@@ -31019,7 +31207,7 @@
           </a:ln>
           <a:extLst>
             <a:ext uri="{C572A759-6A51-4108-AA02-DFA0A04FC94B}">
-              <ma14:wrappingTextBoxFlag xmlns="" xmlns:m="http://schemas.openxmlformats.org/officeDocument/2006/math" xmlns:a14="http://schemas.microsoft.com/office/drawing/2010/main" xmlns:ma14="http://schemas.microsoft.com/office/mac/drawingml/2011/main" val="1"/>
+              <ma14:wrappingTextBoxFlag xmlns:ma14="http://schemas.microsoft.com/office/mac/drawingml/2011/main" xmlns:a14="http://schemas.microsoft.com/office/drawing/2010/main" xmlns:m="http://schemas.openxmlformats.org/officeDocument/2006/math" xmlns="" val="1"/>
             </a:ext>
           </a:extLst>
         </p:spPr>
@@ -31071,7 +31259,7 @@
           </a:ln>
           <a:extLst>
             <a:ext uri="{C572A759-6A51-4108-AA02-DFA0A04FC94B}">
-              <ma14:wrappingTextBoxFlag xmlns="" xmlns:m="http://schemas.openxmlformats.org/officeDocument/2006/math" xmlns:a14="http://schemas.microsoft.com/office/drawing/2010/main" xmlns:ma14="http://schemas.microsoft.com/office/mac/drawingml/2011/main" val="1"/>
+              <ma14:wrappingTextBoxFlag xmlns:ma14="http://schemas.microsoft.com/office/mac/drawingml/2011/main" xmlns:a14="http://schemas.microsoft.com/office/drawing/2010/main" xmlns:m="http://schemas.openxmlformats.org/officeDocument/2006/math" xmlns="" val="1"/>
             </a:ext>
           </a:extLst>
         </p:spPr>
@@ -31157,7 +31345,7 @@
           </a:ln>
           <a:extLst>
             <a:ext uri="{C572A759-6A51-4108-AA02-DFA0A04FC94B}">
-              <ma14:wrappingTextBoxFlag xmlns="" xmlns:m="http://schemas.openxmlformats.org/officeDocument/2006/math" xmlns:a14="http://schemas.microsoft.com/office/drawing/2010/main" xmlns:ma14="http://schemas.microsoft.com/office/mac/drawingml/2011/main" val="1"/>
+              <ma14:wrappingTextBoxFlag xmlns:ma14="http://schemas.microsoft.com/office/mac/drawingml/2011/main" xmlns:a14="http://schemas.microsoft.com/office/drawing/2010/main" xmlns:m="http://schemas.openxmlformats.org/officeDocument/2006/math" xmlns="" val="1"/>
             </a:ext>
           </a:extLst>
         </p:spPr>
@@ -31244,7 +31432,7 @@
           </a:ln>
           <a:extLst>
             <a:ext uri="{C572A759-6A51-4108-AA02-DFA0A04FC94B}">
-              <ma14:wrappingTextBoxFlag xmlns="" xmlns:m="http://schemas.openxmlformats.org/officeDocument/2006/math" xmlns:a14="http://schemas.microsoft.com/office/drawing/2010/main" xmlns:ma14="http://schemas.microsoft.com/office/mac/drawingml/2011/main" val="1"/>
+              <ma14:wrappingTextBoxFlag xmlns:ma14="http://schemas.microsoft.com/office/mac/drawingml/2011/main" xmlns:a14="http://schemas.microsoft.com/office/drawing/2010/main" xmlns:m="http://schemas.openxmlformats.org/officeDocument/2006/math" xmlns="" val="1"/>
             </a:ext>
           </a:extLst>
         </p:spPr>
@@ -31331,7 +31519,7 @@
           </a:ln>
           <a:extLst>
             <a:ext uri="{C572A759-6A51-4108-AA02-DFA0A04FC94B}">
-              <ma14:wrappingTextBoxFlag xmlns="" xmlns:m="http://schemas.openxmlformats.org/officeDocument/2006/math" xmlns:a14="http://schemas.microsoft.com/office/drawing/2010/main" xmlns:ma14="http://schemas.microsoft.com/office/mac/drawingml/2011/main" val="1"/>
+              <ma14:wrappingTextBoxFlag xmlns:ma14="http://schemas.microsoft.com/office/mac/drawingml/2011/main" xmlns:a14="http://schemas.microsoft.com/office/drawing/2010/main" xmlns:m="http://schemas.openxmlformats.org/officeDocument/2006/math" xmlns="" val="1"/>
             </a:ext>
           </a:extLst>
         </p:spPr>
@@ -32409,7 +32597,7 @@
           </a:ln>
           <a:extLst>
             <a:ext uri="{C572A759-6A51-4108-AA02-DFA0A04FC94B}">
-              <ma14:wrappingTextBoxFlag xmlns="" xmlns:m="http://schemas.openxmlformats.org/officeDocument/2006/math" xmlns:a14="http://schemas.microsoft.com/office/drawing/2010/main" xmlns:ma14="http://schemas.microsoft.com/office/mac/drawingml/2011/main" val="1"/>
+              <ma14:wrappingTextBoxFlag xmlns:ma14="http://schemas.microsoft.com/office/mac/drawingml/2011/main" xmlns:a14="http://schemas.microsoft.com/office/drawing/2010/main" xmlns:m="http://schemas.openxmlformats.org/officeDocument/2006/math" xmlns="" val="1"/>
             </a:ext>
           </a:extLst>
         </p:spPr>
@@ -33170,7 +33358,7 @@
           </a:ln>
           <a:extLst>
             <a:ext uri="{C572A759-6A51-4108-AA02-DFA0A04FC94B}">
-              <ma14:wrappingTextBoxFlag xmlns="" xmlns:m="http://schemas.openxmlformats.org/officeDocument/2006/math" xmlns:a14="http://schemas.microsoft.com/office/drawing/2010/main" xmlns:ma14="http://schemas.microsoft.com/office/mac/drawingml/2011/main" val="1"/>
+              <ma14:wrappingTextBoxFlag xmlns:ma14="http://schemas.microsoft.com/office/mac/drawingml/2011/main" xmlns:a14="http://schemas.microsoft.com/office/drawing/2010/main" xmlns:m="http://schemas.openxmlformats.org/officeDocument/2006/math" xmlns="" val="1"/>
             </a:ext>
           </a:extLst>
         </p:spPr>
@@ -33983,7 +34171,7 @@
           </a:ln>
           <a:extLst>
             <a:ext uri="{C572A759-6A51-4108-AA02-DFA0A04FC94B}">
-              <ma14:wrappingTextBoxFlag xmlns="" xmlns:m="http://schemas.openxmlformats.org/officeDocument/2006/math" xmlns:a14="http://schemas.microsoft.com/office/drawing/2010/main" xmlns:ma14="http://schemas.microsoft.com/office/mac/drawingml/2011/main" val="1"/>
+              <ma14:wrappingTextBoxFlag xmlns:ma14="http://schemas.microsoft.com/office/mac/drawingml/2011/main" xmlns:a14="http://schemas.microsoft.com/office/drawing/2010/main" xmlns:m="http://schemas.openxmlformats.org/officeDocument/2006/math" xmlns="" val="1"/>
             </a:ext>
           </a:extLst>
         </p:spPr>
@@ -34798,7 +34986,7 @@
           </a:ln>
           <a:extLst>
             <a:ext uri="{C572A759-6A51-4108-AA02-DFA0A04FC94B}">
-              <ma14:wrappingTextBoxFlag xmlns="" xmlns:m="http://schemas.openxmlformats.org/officeDocument/2006/math" xmlns:a14="http://schemas.microsoft.com/office/drawing/2010/main" xmlns:ma14="http://schemas.microsoft.com/office/mac/drawingml/2011/main" val="1"/>
+              <ma14:wrappingTextBoxFlag xmlns:ma14="http://schemas.microsoft.com/office/mac/drawingml/2011/main" xmlns:a14="http://schemas.microsoft.com/office/drawing/2010/main" xmlns:m="http://schemas.openxmlformats.org/officeDocument/2006/math" xmlns="" val="1"/>
             </a:ext>
           </a:extLst>
         </p:spPr>
@@ -34850,7 +35038,7 @@
           </a:ln>
           <a:extLst>
             <a:ext uri="{C572A759-6A51-4108-AA02-DFA0A04FC94B}">
-              <ma14:wrappingTextBoxFlag xmlns="" xmlns:m="http://schemas.openxmlformats.org/officeDocument/2006/math" xmlns:a14="http://schemas.microsoft.com/office/drawing/2010/main" xmlns:ma14="http://schemas.microsoft.com/office/mac/drawingml/2011/main" val="1"/>
+              <ma14:wrappingTextBoxFlag xmlns:ma14="http://schemas.microsoft.com/office/mac/drawingml/2011/main" xmlns:a14="http://schemas.microsoft.com/office/drawing/2010/main" xmlns:m="http://schemas.openxmlformats.org/officeDocument/2006/math" xmlns="" val="1"/>
             </a:ext>
           </a:extLst>
         </p:spPr>
@@ -34916,7 +35104,7 @@
           </a:ln>
           <a:extLst>
             <a:ext uri="{C572A759-6A51-4108-AA02-DFA0A04FC94B}">
-              <ma14:wrappingTextBoxFlag xmlns="" xmlns:m="http://schemas.openxmlformats.org/officeDocument/2006/math" xmlns:a14="http://schemas.microsoft.com/office/drawing/2010/main" xmlns:ma14="http://schemas.microsoft.com/office/mac/drawingml/2011/main" val="1"/>
+              <ma14:wrappingTextBoxFlag xmlns:ma14="http://schemas.microsoft.com/office/mac/drawingml/2011/main" xmlns:a14="http://schemas.microsoft.com/office/drawing/2010/main" xmlns:m="http://schemas.openxmlformats.org/officeDocument/2006/math" xmlns="" val="1"/>
             </a:ext>
           </a:extLst>
         </p:spPr>
@@ -34968,7 +35156,7 @@
           </a:ln>
           <a:extLst>
             <a:ext uri="{C572A759-6A51-4108-AA02-DFA0A04FC94B}">
-              <ma14:wrappingTextBoxFlag xmlns="" xmlns:m="http://schemas.openxmlformats.org/officeDocument/2006/math" xmlns:a14="http://schemas.microsoft.com/office/drawing/2010/main" xmlns:ma14="http://schemas.microsoft.com/office/mac/drawingml/2011/main" val="1"/>
+              <ma14:wrappingTextBoxFlag xmlns:ma14="http://schemas.microsoft.com/office/mac/drawingml/2011/main" xmlns:a14="http://schemas.microsoft.com/office/drawing/2010/main" xmlns:m="http://schemas.openxmlformats.org/officeDocument/2006/math" xmlns="" val="1"/>
             </a:ext>
           </a:extLst>
         </p:spPr>
@@ -35165,7 +35353,7 @@
           </a:ln>
           <a:extLst>
             <a:ext uri="{C572A759-6A51-4108-AA02-DFA0A04FC94B}">
-              <ma14:wrappingTextBoxFlag xmlns="" xmlns:m="http://schemas.openxmlformats.org/officeDocument/2006/math" xmlns:a14="http://schemas.microsoft.com/office/drawing/2010/main" xmlns:ma14="http://schemas.microsoft.com/office/mac/drawingml/2011/main" val="1"/>
+              <ma14:wrappingTextBoxFlag xmlns:ma14="http://schemas.microsoft.com/office/mac/drawingml/2011/main" xmlns:a14="http://schemas.microsoft.com/office/drawing/2010/main" xmlns:m="http://schemas.openxmlformats.org/officeDocument/2006/math" xmlns="" val="1"/>
             </a:ext>
           </a:extLst>
         </p:spPr>
